--- a/01_Workflow with AI Agent.pptx
+++ b/01_Workflow with AI Agent.pptx
@@ -5,10 +5,10 @@
     <p:sldMasterId id="2147483660" r:id="rId1"/>
   </p:sldMasterIdLst>
   <p:notesMasterIdLst>
-    <p:notesMasterId r:id="rId7"/>
+    <p:notesMasterId r:id="rId8"/>
   </p:notesMasterIdLst>
   <p:handoutMasterIdLst>
-    <p:handoutMasterId r:id="rId8"/>
+    <p:handoutMasterId r:id="rId9"/>
   </p:handoutMasterIdLst>
   <p:sldIdLst>
     <p:sldId id="256" r:id="rId2"/>
@@ -16,6 +16,7 @@
     <p:sldId id="1144" r:id="rId4"/>
     <p:sldId id="1146" r:id="rId5"/>
     <p:sldId id="1145" r:id="rId6"/>
+    <p:sldId id="1147" r:id="rId7"/>
   </p:sldIdLst>
   <p:sldSz cx="12192000" cy="6858000"/>
   <p:notesSz cx="6858000" cy="9144000"/>
@@ -128,6 +129,7 @@
             <p14:sldId id="1144"/>
             <p14:sldId id="1146"/>
             <p14:sldId id="1145"/>
+            <p14:sldId id="1147"/>
           </p14:sldIdLst>
         </p14:section>
         <p14:section name="자세한 정보" id="{2CC34DB2-6590-42C0-AD4B-A04C6060184E}">
@@ -4317,6 +4319,227 @@
     <p:extLst>
       <p:ext uri="{BB962C8B-B14F-4D97-AF65-F5344CB8AC3E}">
         <p14:creationId xmlns:p14="http://schemas.microsoft.com/office/powerpoint/2010/main" val="2413008201"/>
+      </p:ext>
+    </p:extLst>
+  </p:cSld>
+  <p:clrMapOvr>
+    <a:masterClrMapping/>
+  </p:clrMapOvr>
+</p:sld>
+</file>
+
+<file path=ppt/slides/slide6.xml><?xml version="1.0" encoding="utf-8"?>
+<p:sld xmlns:a="http://schemas.openxmlformats.org/drawingml/2006/main" xmlns:r="http://schemas.openxmlformats.org/officeDocument/2006/relationships" xmlns:p="http://schemas.openxmlformats.org/presentationml/2006/main">
+  <p:cSld>
+    <p:spTree>
+      <p:nvGrpSpPr>
+        <p:cNvPr id="1" name="">
+          <a:extLst>
+            <a:ext uri="{FF2B5EF4-FFF2-40B4-BE49-F238E27FC236}">
+              <a16:creationId xmlns:a16="http://schemas.microsoft.com/office/drawing/2014/main" id="{0BAD4B57-93D9-0468-7551-29306C63BF7A}"/>
+            </a:ext>
+          </a:extLst>
+        </p:cNvPr>
+        <p:cNvGrpSpPr/>
+        <p:nvPr/>
+      </p:nvGrpSpPr>
+      <p:grpSpPr>
+        <a:xfrm>
+          <a:off x="0" y="0"/>
+          <a:ext cx="0" cy="0"/>
+          <a:chOff x="0" y="0"/>
+          <a:chExt cx="0" cy="0"/>
+        </a:xfrm>
+      </p:grpSpPr>
+      <p:sp>
+        <p:nvSpPr>
+          <p:cNvPr id="4" name="슬라이드 번호 개체 틀 3">
+            <a:extLst>
+              <a:ext uri="{FF2B5EF4-FFF2-40B4-BE49-F238E27FC236}">
+                <a16:creationId xmlns:a16="http://schemas.microsoft.com/office/drawing/2014/main" id="{E808D50B-4B99-DF47-3BF4-F81FFA20E603}"/>
+              </a:ext>
+            </a:extLst>
+          </p:cNvPr>
+          <p:cNvSpPr>
+            <a:spLocks noGrp="1"/>
+          </p:cNvSpPr>
+          <p:nvPr>
+            <p:ph type="sldNum" sz="quarter" idx="12"/>
+          </p:nvPr>
+        </p:nvSpPr>
+        <p:spPr>
+          <a:xfrm>
+            <a:off x="10514011" y="6036261"/>
+            <a:ext cx="753545" cy="365125"/>
+          </a:xfrm>
+        </p:spPr>
+        <p:txBody>
+          <a:bodyPr/>
+          <a:lstStyle/>
+          <a:p>
+            <a:fld id="{D57F1E4F-1CFF-5643-939E-217C01CDF565}" type="slidenum">
+              <a:rPr lang="en-US" smtClean="0"/>
+              <a:pPr/>
+              <a:t>6</a:t>
+            </a:fld>
+            <a:endParaRPr lang="en-US" dirty="0"/>
+          </a:p>
+        </p:txBody>
+      </p:sp>
+      <p:sp>
+        <p:nvSpPr>
+          <p:cNvPr id="3" name="제목 1">
+            <a:extLst>
+              <a:ext uri="{FF2B5EF4-FFF2-40B4-BE49-F238E27FC236}">
+                <a16:creationId xmlns:a16="http://schemas.microsoft.com/office/drawing/2014/main" id="{27DB069D-FCC4-495B-B505-098B57F27B2F}"/>
+              </a:ext>
+            </a:extLst>
+          </p:cNvPr>
+          <p:cNvSpPr txBox="1">
+            <a:spLocks/>
+          </p:cNvSpPr>
+          <p:nvPr/>
+        </p:nvSpPr>
+        <p:spPr>
+          <a:xfrm>
+            <a:off x="475645" y="481983"/>
+            <a:ext cx="10353762" cy="766439"/>
+          </a:xfrm>
+          <a:prstGeom prst="rect">
+            <a:avLst/>
+          </a:prstGeom>
+        </p:spPr>
+        <p:txBody>
+          <a:bodyPr vert="horz" lIns="91440" tIns="45720" rIns="91440" bIns="45720" rtlCol="0" anchor="ctr">
+            <a:normAutofit/>
+          </a:bodyPr>
+          <a:lstStyle>
+            <a:lvl1pPr algn="ctr" defTabSz="914400" rtl="0" eaLnBrk="1" latinLnBrk="1" hangingPunct="1">
+              <a:lnSpc>
+                <a:spcPct val="90000"/>
+              </a:lnSpc>
+              <a:spcBef>
+                <a:spcPct val="0"/>
+              </a:spcBef>
+              <a:buNone/>
+              <a:defRPr sz="3200" kern="1200" cap="all" baseline="0">
+                <a:solidFill>
+                  <a:schemeClr val="tx1"/>
+                </a:solidFill>
+                <a:effectLst/>
+                <a:latin typeface="Batang" panose="02030600000101010101" pitchFamily="18" charset="-127"/>
+                <a:ea typeface="Batang" panose="02030600000101010101" pitchFamily="18" charset="-127"/>
+                <a:cs typeface="+mj-cs"/>
+              </a:defRPr>
+            </a:lvl1pPr>
+          </a:lstStyle>
+          <a:p>
+            <a:pPr algn="l"/>
+            <a:r>
+              <a:rPr lang="en-US" altLang="ko-KR" sz="2800" b="1" cap="none" dirty="0">
+                <a:latin typeface="Lora" pitchFamily="2" charset="0"/>
+              </a:rPr>
+              <a:t>google </a:t>
+            </a:r>
+            <a:r>
+              <a:rPr lang="en-US" altLang="ko-KR" sz="2800" b="1" cap="none" dirty="0" err="1">
+                <a:latin typeface="Lora" pitchFamily="2" charset="0"/>
+              </a:rPr>
+              <a:t>gemini</a:t>
+            </a:r>
+            <a:r>
+              <a:rPr lang="en-US" altLang="ko-KR" sz="2800" b="1" cap="none" dirty="0">
+                <a:latin typeface="Lora" pitchFamily="2" charset="0"/>
+              </a:rPr>
+              <a:t> SDK</a:t>
+            </a:r>
+          </a:p>
+        </p:txBody>
+      </p:sp>
+      <p:sp>
+        <p:nvSpPr>
+          <p:cNvPr id="2" name="TextBox 1">
+            <a:extLst>
+              <a:ext uri="{FF2B5EF4-FFF2-40B4-BE49-F238E27FC236}">
+                <a16:creationId xmlns:a16="http://schemas.microsoft.com/office/drawing/2014/main" id="{E6E448FD-C14E-92DF-BCEC-2802271E4081}"/>
+              </a:ext>
+            </a:extLst>
+          </p:cNvPr>
+          <p:cNvSpPr txBox="1"/>
+          <p:nvPr/>
+        </p:nvSpPr>
+        <p:spPr>
+          <a:xfrm>
+            <a:off x="685800" y="1857375"/>
+            <a:ext cx="2145139" cy="369332"/>
+          </a:xfrm>
+          <a:prstGeom prst="rect">
+            <a:avLst/>
+          </a:prstGeom>
+          <a:noFill/>
+        </p:spPr>
+        <p:txBody>
+          <a:bodyPr wrap="none" rtlCol="0">
+            <a:spAutoFit/>
+          </a:bodyPr>
+          <a:lstStyle/>
+          <a:p>
+            <a:r>
+              <a:rPr lang="en-US" altLang="ko-KR" dirty="0">
+                <a:hlinkClick r:id="rId2"/>
+              </a:rPr>
+              <a:t>google </a:t>
+            </a:r>
+            <a:r>
+              <a:rPr lang="en-US" altLang="ko-KR" dirty="0" err="1">
+                <a:hlinkClick r:id="rId2"/>
+              </a:rPr>
+              <a:t>gemini</a:t>
+            </a:r>
+            <a:r>
+              <a:rPr lang="en-US" altLang="ko-KR" dirty="0">
+                <a:hlinkClick r:id="rId2"/>
+              </a:rPr>
+              <a:t> SDK</a:t>
+            </a:r>
+            <a:endParaRPr lang="ko-KR" altLang="en-US" dirty="0"/>
+          </a:p>
+        </p:txBody>
+      </p:sp>
+      <p:pic>
+        <p:nvPicPr>
+          <p:cNvPr id="7" name="그림 6">
+            <a:extLst>
+              <a:ext uri="{FF2B5EF4-FFF2-40B4-BE49-F238E27FC236}">
+                <a16:creationId xmlns:a16="http://schemas.microsoft.com/office/drawing/2014/main" id="{36B178D1-92C3-CCC2-D524-AF57427B624D}"/>
+              </a:ext>
+            </a:extLst>
+          </p:cNvPr>
+          <p:cNvPicPr>
+            <a:picLocks noChangeAspect="1"/>
+          </p:cNvPicPr>
+          <p:nvPr/>
+        </p:nvPicPr>
+        <p:blipFill>
+          <a:blip r:embed="rId3"/>
+          <a:stretch>
+            <a:fillRect/>
+          </a:stretch>
+        </p:blipFill>
+        <p:spPr>
+          <a:xfrm>
+            <a:off x="1143000" y="2346163"/>
+            <a:ext cx="9439275" cy="3872660"/>
+          </a:xfrm>
+          <a:prstGeom prst="rect">
+            <a:avLst/>
+          </a:prstGeom>
+        </p:spPr>
+      </p:pic>
+    </p:spTree>
+    <p:extLst>
+      <p:ext uri="{BB962C8B-B14F-4D97-AF65-F5344CB8AC3E}">
+        <p14:creationId xmlns:p14="http://schemas.microsoft.com/office/powerpoint/2010/main" val="570096588"/>
       </p:ext>
     </p:extLst>
   </p:cSld>

--- a/01_Workflow with AI Agent.pptx
+++ b/01_Workflow with AI Agent.pptx
@@ -5,18 +5,27 @@
     <p:sldMasterId id="2147483660" r:id="rId1"/>
   </p:sldMasterIdLst>
   <p:notesMasterIdLst>
-    <p:notesMasterId r:id="rId8"/>
+    <p:notesMasterId r:id="rId17"/>
   </p:notesMasterIdLst>
   <p:handoutMasterIdLst>
-    <p:handoutMasterId r:id="rId9"/>
+    <p:handoutMasterId r:id="rId18"/>
   </p:handoutMasterIdLst>
   <p:sldIdLst>
     <p:sldId id="256" r:id="rId2"/>
-    <p:sldId id="1135" r:id="rId3"/>
-    <p:sldId id="1144" r:id="rId4"/>
-    <p:sldId id="1146" r:id="rId5"/>
-    <p:sldId id="1145" r:id="rId6"/>
-    <p:sldId id="1147" r:id="rId7"/>
+    <p:sldId id="1151" r:id="rId3"/>
+    <p:sldId id="1149" r:id="rId4"/>
+    <p:sldId id="1153" r:id="rId5"/>
+    <p:sldId id="1154" r:id="rId6"/>
+    <p:sldId id="1155" r:id="rId7"/>
+    <p:sldId id="1156" r:id="rId8"/>
+    <p:sldId id="1158" r:id="rId9"/>
+    <p:sldId id="1157" r:id="rId10"/>
+    <p:sldId id="1152" r:id="rId11"/>
+    <p:sldId id="1148" r:id="rId12"/>
+    <p:sldId id="1144" r:id="rId13"/>
+    <p:sldId id="1146" r:id="rId14"/>
+    <p:sldId id="1145" r:id="rId15"/>
+    <p:sldId id="1147" r:id="rId16"/>
   </p:sldIdLst>
   <p:sldSz cx="12192000" cy="6858000"/>
   <p:notesSz cx="6858000" cy="9144000"/>
@@ -125,7 +134,16 @@
         </p14:section>
         <p14:section name="디자인, 모핑, 주석 달기, 공동 작업, 입력하세요" id="{B9B51309-D148-4332-87C2-07BE32FBCA3B}">
           <p14:sldIdLst>
-            <p14:sldId id="1135"/>
+            <p14:sldId id="1151"/>
+            <p14:sldId id="1149"/>
+            <p14:sldId id="1153"/>
+            <p14:sldId id="1154"/>
+            <p14:sldId id="1155"/>
+            <p14:sldId id="1156"/>
+            <p14:sldId id="1158"/>
+            <p14:sldId id="1157"/>
+            <p14:sldId id="1152"/>
+            <p14:sldId id="1148"/>
             <p14:sldId id="1144"/>
             <p14:sldId id="1146"/>
             <p14:sldId id="1145"/>
@@ -254,7 +272,7 @@
                 <a:latin typeface="맑은 고딕" panose="020B0503020000020004" pitchFamily="50" charset="-127"/>
                 <a:ea typeface="맑은 고딕" panose="020B0503020000020004" pitchFamily="50" charset="-127"/>
               </a:rPr>
-              <a:t>2026-07-04</a:t>
+              <a:t>2026-07-06</a:t>
             </a:fld>
             <a:endParaRPr lang="ko-KR" altLang="en-US">
               <a:latin typeface="맑은 고딕" panose="020B0503020000020004" pitchFamily="50" charset="-127"/>
@@ -440,7 +458,7 @@
           <a:p>
             <a:fld id="{43E1C3DD-4A19-441D-907C-380838DB51C4}" type="datetime1">
               <a:rPr lang="ko-KR" altLang="en-US" noProof="0" smtClean="0"/>
-              <a:t>2026-07-04</a:t>
+              <a:t>2026-07-06</a:t>
             </a:fld>
             <a:endParaRPr lang="ko-KR" altLang="en-US" noProof="0"/>
           </a:p>
@@ -820,6 +838,254 @@
 </p:notes>
 </file>
 
+<file path=ppt/notesSlides/notesSlide2.xml><?xml version="1.0" encoding="utf-8"?>
+<p:notes xmlns:a="http://schemas.openxmlformats.org/drawingml/2006/main" xmlns:r="http://schemas.openxmlformats.org/officeDocument/2006/relationships" xmlns:p="http://schemas.openxmlformats.org/presentationml/2006/main">
+  <p:cSld>
+    <p:spTree>
+      <p:nvGrpSpPr>
+        <p:cNvPr id="1" name="">
+          <a:extLst>
+            <a:ext uri="{FF2B5EF4-FFF2-40B4-BE49-F238E27FC236}">
+              <a16:creationId xmlns:a16="http://schemas.microsoft.com/office/drawing/2014/main" id="{002C9BBB-4A23-E21A-8244-9A1666457342}"/>
+            </a:ext>
+          </a:extLst>
+        </p:cNvPr>
+        <p:cNvGrpSpPr/>
+        <p:nvPr/>
+      </p:nvGrpSpPr>
+      <p:grpSpPr>
+        <a:xfrm>
+          <a:off x="0" y="0"/>
+          <a:ext cx="0" cy="0"/>
+          <a:chOff x="0" y="0"/>
+          <a:chExt cx="0" cy="0"/>
+        </a:xfrm>
+      </p:grpSpPr>
+      <p:sp>
+        <p:nvSpPr>
+          <p:cNvPr id="2" name="슬라이드 이미지 개체 틀 1">
+            <a:extLst>
+              <a:ext uri="{FF2B5EF4-FFF2-40B4-BE49-F238E27FC236}">
+                <a16:creationId xmlns:a16="http://schemas.microsoft.com/office/drawing/2014/main" id="{D542B148-30DF-9C89-8EB1-0DAC5F084447}"/>
+              </a:ext>
+            </a:extLst>
+          </p:cNvPr>
+          <p:cNvSpPr>
+            <a:spLocks noGrp="1" noRot="1" noChangeAspect="1"/>
+          </p:cNvSpPr>
+          <p:nvPr>
+            <p:ph type="sldImg"/>
+          </p:nvPr>
+        </p:nvSpPr>
+        <p:spPr>
+          <a:xfrm>
+            <a:off x="685800" y="1143000"/>
+            <a:ext cx="5486400" cy="3086100"/>
+          </a:xfrm>
+        </p:spPr>
+      </p:sp>
+      <p:sp>
+        <p:nvSpPr>
+          <p:cNvPr id="3" name="슬라이드 노트 개체 틀 2">
+            <a:extLst>
+              <a:ext uri="{FF2B5EF4-FFF2-40B4-BE49-F238E27FC236}">
+                <a16:creationId xmlns:a16="http://schemas.microsoft.com/office/drawing/2014/main" id="{5E39DC16-78A6-4EE7-0852-436C58036FE1}"/>
+              </a:ext>
+            </a:extLst>
+          </p:cNvPr>
+          <p:cNvSpPr>
+            <a:spLocks noGrp="1"/>
+          </p:cNvSpPr>
+          <p:nvPr>
+            <p:ph type="body" idx="1"/>
+          </p:nvPr>
+        </p:nvSpPr>
+        <p:spPr/>
+        <p:txBody>
+          <a:bodyPr rtlCol="0"/>
+          <a:lstStyle/>
+          <a:p>
+            <a:pPr rtl="0"/>
+            <a:endParaRPr lang="ko-KR" altLang="en-US">
+              <a:latin typeface="맑은 고딕" panose="020B0503020000020004" pitchFamily="50" charset="-127"/>
+              <a:ea typeface="맑은 고딕" panose="020B0503020000020004" pitchFamily="50" charset="-127"/>
+            </a:endParaRPr>
+          </a:p>
+        </p:txBody>
+      </p:sp>
+      <p:sp>
+        <p:nvSpPr>
+          <p:cNvPr id="4" name="슬라이드 번호 개체 틀 3">
+            <a:extLst>
+              <a:ext uri="{FF2B5EF4-FFF2-40B4-BE49-F238E27FC236}">
+                <a16:creationId xmlns:a16="http://schemas.microsoft.com/office/drawing/2014/main" id="{5DCEE036-ABA4-0BFC-663A-BDFAA104B966}"/>
+              </a:ext>
+            </a:extLst>
+          </p:cNvPr>
+          <p:cNvSpPr>
+            <a:spLocks noGrp="1"/>
+          </p:cNvSpPr>
+          <p:nvPr>
+            <p:ph type="sldNum" sz="quarter" idx="10"/>
+          </p:nvPr>
+        </p:nvSpPr>
+        <p:spPr/>
+        <p:txBody>
+          <a:bodyPr rtlCol="0"/>
+          <a:lstStyle/>
+          <a:p>
+            <a:pPr rtl="0"/>
+            <a:fld id="{DF61EA0F-A667-4B49-8422-0062BC55E249}" type="slidenum">
+              <a:rPr lang="en-US" altLang="ko-KR" smtClean="0">
+                <a:latin typeface="맑은 고딕" panose="020B0503020000020004" pitchFamily="50" charset="-127"/>
+                <a:ea typeface="맑은 고딕" panose="020B0503020000020004" pitchFamily="50" charset="-127"/>
+              </a:rPr>
+              <a:t>2</a:t>
+            </a:fld>
+            <a:endParaRPr lang="ko-KR" altLang="en-US">
+              <a:latin typeface="맑은 고딕" panose="020B0503020000020004" pitchFamily="50" charset="-127"/>
+              <a:ea typeface="맑은 고딕" panose="020B0503020000020004" pitchFamily="50" charset="-127"/>
+            </a:endParaRPr>
+          </a:p>
+        </p:txBody>
+      </p:sp>
+    </p:spTree>
+    <p:extLst>
+      <p:ext uri="{BB962C8B-B14F-4D97-AF65-F5344CB8AC3E}">
+        <p14:creationId xmlns:p14="http://schemas.microsoft.com/office/powerpoint/2010/main" val="2694394135"/>
+      </p:ext>
+    </p:extLst>
+  </p:cSld>
+  <p:clrMapOvr>
+    <a:masterClrMapping/>
+  </p:clrMapOvr>
+</p:notes>
+</file>
+
+<file path=ppt/notesSlides/notesSlide3.xml><?xml version="1.0" encoding="utf-8"?>
+<p:notes xmlns:a="http://schemas.openxmlformats.org/drawingml/2006/main" xmlns:r="http://schemas.openxmlformats.org/officeDocument/2006/relationships" xmlns:p="http://schemas.openxmlformats.org/presentationml/2006/main">
+  <p:cSld>
+    <p:spTree>
+      <p:nvGrpSpPr>
+        <p:cNvPr id="1" name="">
+          <a:extLst>
+            <a:ext uri="{FF2B5EF4-FFF2-40B4-BE49-F238E27FC236}">
+              <a16:creationId xmlns:a16="http://schemas.microsoft.com/office/drawing/2014/main" id="{5CBA5E13-4274-FC83-0C13-AB7E64FEA72E}"/>
+            </a:ext>
+          </a:extLst>
+        </p:cNvPr>
+        <p:cNvGrpSpPr/>
+        <p:nvPr/>
+      </p:nvGrpSpPr>
+      <p:grpSpPr>
+        <a:xfrm>
+          <a:off x="0" y="0"/>
+          <a:ext cx="0" cy="0"/>
+          <a:chOff x="0" y="0"/>
+          <a:chExt cx="0" cy="0"/>
+        </a:xfrm>
+      </p:grpSpPr>
+      <p:sp>
+        <p:nvSpPr>
+          <p:cNvPr id="2" name="슬라이드 이미지 개체 틀 1">
+            <a:extLst>
+              <a:ext uri="{FF2B5EF4-FFF2-40B4-BE49-F238E27FC236}">
+                <a16:creationId xmlns:a16="http://schemas.microsoft.com/office/drawing/2014/main" id="{FF8A59E7-2C61-6B42-DBB2-990B60A9FA4B}"/>
+              </a:ext>
+            </a:extLst>
+          </p:cNvPr>
+          <p:cNvSpPr>
+            <a:spLocks noGrp="1" noRot="1" noChangeAspect="1"/>
+          </p:cNvSpPr>
+          <p:nvPr>
+            <p:ph type="sldImg"/>
+          </p:nvPr>
+        </p:nvSpPr>
+        <p:spPr>
+          <a:xfrm>
+            <a:off x="685800" y="1143000"/>
+            <a:ext cx="5486400" cy="3086100"/>
+          </a:xfrm>
+        </p:spPr>
+      </p:sp>
+      <p:sp>
+        <p:nvSpPr>
+          <p:cNvPr id="3" name="슬라이드 노트 개체 틀 2">
+            <a:extLst>
+              <a:ext uri="{FF2B5EF4-FFF2-40B4-BE49-F238E27FC236}">
+                <a16:creationId xmlns:a16="http://schemas.microsoft.com/office/drawing/2014/main" id="{0DDEE789-EA3F-CF59-63C1-19D2FC296839}"/>
+              </a:ext>
+            </a:extLst>
+          </p:cNvPr>
+          <p:cNvSpPr>
+            <a:spLocks noGrp="1"/>
+          </p:cNvSpPr>
+          <p:nvPr>
+            <p:ph type="body" idx="1"/>
+          </p:nvPr>
+        </p:nvSpPr>
+        <p:spPr/>
+        <p:txBody>
+          <a:bodyPr rtlCol="0"/>
+          <a:lstStyle/>
+          <a:p>
+            <a:pPr rtl="0"/>
+            <a:endParaRPr lang="ko-KR" altLang="en-US">
+              <a:latin typeface="맑은 고딕" panose="020B0503020000020004" pitchFamily="50" charset="-127"/>
+              <a:ea typeface="맑은 고딕" panose="020B0503020000020004" pitchFamily="50" charset="-127"/>
+            </a:endParaRPr>
+          </a:p>
+        </p:txBody>
+      </p:sp>
+      <p:sp>
+        <p:nvSpPr>
+          <p:cNvPr id="4" name="슬라이드 번호 개체 틀 3">
+            <a:extLst>
+              <a:ext uri="{FF2B5EF4-FFF2-40B4-BE49-F238E27FC236}">
+                <a16:creationId xmlns:a16="http://schemas.microsoft.com/office/drawing/2014/main" id="{E16EA449-FD99-96E2-D40F-77F42EB7B27E}"/>
+              </a:ext>
+            </a:extLst>
+          </p:cNvPr>
+          <p:cNvSpPr>
+            <a:spLocks noGrp="1"/>
+          </p:cNvSpPr>
+          <p:nvPr>
+            <p:ph type="sldNum" sz="quarter" idx="10"/>
+          </p:nvPr>
+        </p:nvSpPr>
+        <p:spPr/>
+        <p:txBody>
+          <a:bodyPr rtlCol="0"/>
+          <a:lstStyle/>
+          <a:p>
+            <a:pPr rtl="0"/>
+            <a:fld id="{DF61EA0F-A667-4B49-8422-0062BC55E249}" type="slidenum">
+              <a:rPr lang="en-US" altLang="ko-KR" smtClean="0">
+                <a:latin typeface="맑은 고딕" panose="020B0503020000020004" pitchFamily="50" charset="-127"/>
+                <a:ea typeface="맑은 고딕" panose="020B0503020000020004" pitchFamily="50" charset="-127"/>
+              </a:rPr>
+              <a:t>10</a:t>
+            </a:fld>
+            <a:endParaRPr lang="ko-KR" altLang="en-US">
+              <a:latin typeface="맑은 고딕" panose="020B0503020000020004" pitchFamily="50" charset="-127"/>
+              <a:ea typeface="맑은 고딕" panose="020B0503020000020004" pitchFamily="50" charset="-127"/>
+            </a:endParaRPr>
+          </a:p>
+        </p:txBody>
+      </p:sp>
+    </p:spTree>
+    <p:extLst>
+      <p:ext uri="{BB962C8B-B14F-4D97-AF65-F5344CB8AC3E}">
+        <p14:creationId xmlns:p14="http://schemas.microsoft.com/office/powerpoint/2010/main" val="4086255338"/>
+      </p:ext>
+    </p:extLst>
+  </p:cSld>
+  <p:clrMapOvr>
+    <a:masterClrMapping/>
+  </p:clrMapOvr>
+</p:notes>
+</file>
+
 <file path=ppt/slideLayouts/slideLayout1.xml><?xml version="1.0" encoding="utf-8"?>
 <p:sldLayout xmlns:a="http://schemas.openxmlformats.org/drawingml/2006/main" xmlns:r="http://schemas.openxmlformats.org/officeDocument/2006/relationships" xmlns:p="http://schemas.openxmlformats.org/presentationml/2006/main" preserve="1" userDrawn="1">
   <p:cSld name="제목 슬라이드">
@@ -1288,7 +1554,7 @@
           <a:p>
             <a:fld id="{990475B5-67CA-4281-BDCA-DA943C3C8EB3}" type="datetime1">
               <a:rPr lang="ko-KR" altLang="en-US" noProof="0" smtClean="0"/>
-              <a:t>2026-07-04</a:t>
+              <a:t>2026-07-06</a:t>
             </a:fld>
             <a:endParaRPr lang="ko-KR" altLang="en-US" noProof="0"/>
           </a:p>
@@ -1942,7 +2208,7 @@
           <a:p>
             <a:fld id="{48A87A34-81AB-432B-8DAE-1953F412C126}" type="datetimeFigureOut">
               <a:rPr lang="en-US" smtClean="0"/>
-              <a:t>7/4/2026</a:t>
+              <a:t>7/6/2026</a:t>
             </a:fld>
             <a:endParaRPr lang="en-US" dirty="0"/>
           </a:p>
@@ -2238,7 +2504,7 @@
           <a:p>
             <a:fld id="{C655C81E-72E7-4D05-94B5-F45B321A525D}" type="datetime1">
               <a:rPr lang="ko-KR" altLang="en-US" noProof="0" smtClean="0"/>
-              <a:t>2026-07-04</a:t>
+              <a:t>2026-07-06</a:t>
             </a:fld>
             <a:endParaRPr lang="ko-KR" altLang="en-US" noProof="0" dirty="0">
               <a:latin typeface="맑은 고딕" panose="020B0503020000020004" pitchFamily="50" charset="-127"/>
@@ -2737,6 +3003,54 @@
                   <a:schemeClr val="bg1"/>
                 </a:solidFill>
               </a:rPr>
+              <a:t>Workflow</a:t>
+            </a:r>
+            <a:r>
+              <a:rPr lang="ko-KR" altLang="en-US" sz="4400" dirty="0">
+                <a:solidFill>
+                  <a:schemeClr val="bg1"/>
+                </a:solidFill>
+              </a:rPr>
+              <a:t> </a:t>
+            </a:r>
+            <a:r>
+              <a:rPr lang="en-US" altLang="ko-KR" sz="4400" dirty="0">
+                <a:solidFill>
+                  <a:schemeClr val="bg1"/>
+                </a:solidFill>
+              </a:rPr>
+              <a:t>Automation</a:t>
+            </a:r>
+            <a:r>
+              <a:rPr lang="ko-KR" altLang="en-US" sz="4400" dirty="0">
+                <a:solidFill>
+                  <a:schemeClr val="bg1"/>
+                </a:solidFill>
+              </a:rPr>
+              <a:t> </a:t>
+            </a:r>
+            <a:r>
+              <a:rPr lang="en-US" altLang="ko-KR" sz="4400" dirty="0">
+                <a:solidFill>
+                  <a:schemeClr val="bg1"/>
+                </a:solidFill>
+              </a:rPr>
+              <a:t>with</a:t>
+            </a:r>
+            <a:r>
+              <a:rPr lang="ko-KR" altLang="en-US" sz="4400" dirty="0">
+                <a:solidFill>
+                  <a:schemeClr val="bg1"/>
+                </a:solidFill>
+              </a:rPr>
+              <a:t> </a:t>
+            </a:r>
+            <a:r>
+              <a:rPr lang="en-US" altLang="ko-KR" sz="4400" dirty="0">
+                <a:solidFill>
+                  <a:schemeClr val="bg1"/>
+                </a:solidFill>
+              </a:rPr>
               <a:t>AI Agents</a:t>
             </a:r>
             <a:endParaRPr lang="ko-KR" altLang="en-US" sz="4400" dirty="0">
@@ -2974,12 +3288,12 @@
           </a:p>
           <a:p>
             <a:r>
-              <a:rPr lang="ko-KR" altLang="en-US" sz="2400" dirty="0" err="1">
+              <a:rPr lang="ko-KR" altLang="en-US" sz="2400" dirty="0">
                 <a:solidFill>
                   <a:schemeClr val="bg1"/>
                 </a:solidFill>
               </a:rPr>
-              <a:t>조상구교수</a:t>
+              <a:t>조상구 교수</a:t>
             </a:r>
             <a:endParaRPr lang="en-US" altLang="ko-KR" sz="2400" dirty="0">
               <a:solidFill>
@@ -3002,7 +3316,7 @@
 </p:sld>
 </file>
 
-<file path=ppt/slides/slide2.xml><?xml version="1.0" encoding="utf-8"?>
+<file path=ppt/slides/slide10.xml><?xml version="1.0" encoding="utf-8"?>
 <p:sld xmlns:a="http://schemas.openxmlformats.org/drawingml/2006/main" xmlns:r="http://schemas.openxmlformats.org/officeDocument/2006/relationships" xmlns:p="http://schemas.openxmlformats.org/presentationml/2006/main">
   <p:cSld>
     <p:spTree>
@@ -3010,7 +3324,7 @@
         <p:cNvPr id="1" name="">
           <a:extLst>
             <a:ext uri="{FF2B5EF4-FFF2-40B4-BE49-F238E27FC236}">
-              <a16:creationId xmlns:a16="http://schemas.microsoft.com/office/drawing/2014/main" id="{1FF720D6-5AE6-3C71-71A9-7178299E6F89}"/>
+              <a16:creationId xmlns:a16="http://schemas.microsoft.com/office/drawing/2014/main" id="{6A8CC5D0-B203-CB0A-83E0-1EFA230B7538}"/>
             </a:ext>
           </a:extLst>
         </p:cNvPr>
@@ -3027,10 +3341,332 @@
       </p:grpSpPr>
       <p:sp>
         <p:nvSpPr>
+          <p:cNvPr id="2" name="제목 1">
+            <a:extLst>
+              <a:ext uri="{FF2B5EF4-FFF2-40B4-BE49-F238E27FC236}">
+                <a16:creationId xmlns:a16="http://schemas.microsoft.com/office/drawing/2014/main" id="{514E2921-ABDC-7C89-F35D-DE6E821624A1}"/>
+              </a:ext>
+            </a:extLst>
+          </p:cNvPr>
+          <p:cNvSpPr>
+            <a:spLocks noGrp="1"/>
+          </p:cNvSpPr>
+          <p:nvPr>
+            <p:ph type="ctrTitle"/>
+          </p:nvPr>
+        </p:nvSpPr>
+        <p:spPr>
+          <a:xfrm>
+            <a:off x="581025" y="1164324"/>
+            <a:ext cx="11344275" cy="2387600"/>
+          </a:xfrm>
+        </p:spPr>
+        <p:txBody>
+          <a:bodyPr rtlCol="0" anchor="ctr" anchorCtr="0">
+            <a:normAutofit/>
+          </a:bodyPr>
+          <a:lstStyle/>
+          <a:p>
+            <a:r>
+              <a:rPr lang="en-US" altLang="ko-KR" sz="4400" dirty="0">
+                <a:solidFill>
+                  <a:schemeClr val="bg1"/>
+                </a:solidFill>
+              </a:rPr>
+              <a:t>AI Agent</a:t>
+            </a:r>
+            <a:endParaRPr lang="ko-KR" altLang="en-US" sz="4400" dirty="0">
+              <a:solidFill>
+                <a:schemeClr val="bg1"/>
+              </a:solidFill>
+            </a:endParaRPr>
+          </a:p>
+        </p:txBody>
+      </p:sp>
+      <p:sp>
+        <p:nvSpPr>
+          <p:cNvPr id="5" name="부제목 2">
+            <a:extLst>
+              <a:ext uri="{FF2B5EF4-FFF2-40B4-BE49-F238E27FC236}">
+                <a16:creationId xmlns:a16="http://schemas.microsoft.com/office/drawing/2014/main" id="{9B67FEF0-23A4-CE97-21A0-164164E2422F}"/>
+              </a:ext>
+            </a:extLst>
+          </p:cNvPr>
+          <p:cNvSpPr txBox="1">
+            <a:spLocks/>
+          </p:cNvSpPr>
+          <p:nvPr/>
+        </p:nvSpPr>
+        <p:spPr>
+          <a:xfrm>
+            <a:off x="855620" y="4555883"/>
+            <a:ext cx="9582736" cy="1137793"/>
+          </a:xfrm>
+          <a:prstGeom prst="rect">
+            <a:avLst/>
+          </a:prstGeom>
+        </p:spPr>
+        <p:txBody>
+          <a:bodyPr vert="horz" lIns="91440" tIns="45720" rIns="91440" bIns="45720" rtlCol="0">
+            <a:normAutofit fontScale="85000" lnSpcReduction="20000"/>
+          </a:bodyPr>
+          <a:lstStyle>
+            <a:lvl1pPr marL="0" indent="0" algn="l" defTabSz="914400" rtl="0" eaLnBrk="1" latinLnBrk="1" hangingPunct="1">
+              <a:lnSpc>
+                <a:spcPct val="150000"/>
+              </a:lnSpc>
+              <a:spcBef>
+                <a:spcPts val="1000"/>
+              </a:spcBef>
+              <a:spcAft>
+                <a:spcPts val="1200"/>
+              </a:spcAft>
+              <a:buFontTx/>
+              <a:buNone/>
+              <a:defRPr lang="en-US" sz="1200" kern="1200" dirty="0">
+                <a:solidFill>
+                  <a:schemeClr val="tx1"/>
+                </a:solidFill>
+                <a:latin typeface="맑은 고딕" panose="020B0503020000020004" pitchFamily="50" charset="-127"/>
+                <a:ea typeface="맑은 고딕" panose="020B0503020000020004" pitchFamily="50" charset="-127"/>
+                <a:cs typeface="+mn-cs"/>
+              </a:defRPr>
+            </a:lvl1pPr>
+            <a:lvl2pPr marL="228600" indent="-228600" algn="l" defTabSz="914400" rtl="0" eaLnBrk="1" latinLnBrk="1" hangingPunct="1">
+              <a:lnSpc>
+                <a:spcPct val="150000"/>
+              </a:lnSpc>
+              <a:spcBef>
+                <a:spcPts val="1000"/>
+              </a:spcBef>
+              <a:spcAft>
+                <a:spcPts val="1200"/>
+              </a:spcAft>
+              <a:buFont typeface="Arial" panose="020B0604020202020204" pitchFamily="34" charset="0"/>
+              <a:buChar char="•"/>
+              <a:defRPr lang="en-US" sz="1200" kern="1200" dirty="0">
+                <a:solidFill>
+                  <a:schemeClr val="tx1"/>
+                </a:solidFill>
+                <a:latin typeface="맑은 고딕" panose="020B0503020000020004" pitchFamily="50" charset="-127"/>
+                <a:ea typeface="맑은 고딕" panose="020B0503020000020004" pitchFamily="50" charset="-127"/>
+                <a:cs typeface="+mn-cs"/>
+              </a:defRPr>
+            </a:lvl2pPr>
+            <a:lvl3pPr marL="685800" indent="-228600" algn="l" defTabSz="914400" rtl="0" eaLnBrk="1" latinLnBrk="1" hangingPunct="1">
+              <a:lnSpc>
+                <a:spcPct val="150000"/>
+              </a:lnSpc>
+              <a:spcBef>
+                <a:spcPts val="1000"/>
+              </a:spcBef>
+              <a:spcAft>
+                <a:spcPts val="1200"/>
+              </a:spcAft>
+              <a:buFont typeface="Arial" panose="020B0604020202020204" pitchFamily="34" charset="0"/>
+              <a:buChar char="•"/>
+              <a:defRPr lang="en-US" sz="1200" kern="1200" dirty="0">
+                <a:solidFill>
+                  <a:schemeClr val="tx1"/>
+                </a:solidFill>
+                <a:latin typeface="맑은 고딕" panose="020B0503020000020004" pitchFamily="50" charset="-127"/>
+                <a:ea typeface="맑은 고딕" panose="020B0503020000020004" pitchFamily="50" charset="-127"/>
+                <a:cs typeface="+mn-cs"/>
+              </a:defRPr>
+            </a:lvl3pPr>
+            <a:lvl4pPr marL="1143000" indent="-228600" algn="l" defTabSz="914400" rtl="0" eaLnBrk="1" latinLnBrk="1" hangingPunct="1">
+              <a:lnSpc>
+                <a:spcPct val="150000"/>
+              </a:lnSpc>
+              <a:spcBef>
+                <a:spcPts val="1000"/>
+              </a:spcBef>
+              <a:spcAft>
+                <a:spcPts val="1200"/>
+              </a:spcAft>
+              <a:buFont typeface="Arial" panose="020B0604020202020204" pitchFamily="34" charset="0"/>
+              <a:buChar char="•"/>
+              <a:defRPr lang="en-US" sz="1200" kern="1200" dirty="0" smtClean="0">
+                <a:solidFill>
+                  <a:schemeClr val="tx1"/>
+                </a:solidFill>
+                <a:latin typeface="맑은 고딕" panose="020B0503020000020004" pitchFamily="50" charset="-127"/>
+                <a:ea typeface="맑은 고딕" panose="020B0503020000020004" pitchFamily="50" charset="-127"/>
+                <a:cs typeface="+mn-cs"/>
+              </a:defRPr>
+            </a:lvl4pPr>
+            <a:lvl5pPr marL="1600200" indent="-228600" algn="l" defTabSz="914400" rtl="0" eaLnBrk="1" latinLnBrk="1" hangingPunct="1">
+              <a:lnSpc>
+                <a:spcPct val="150000"/>
+              </a:lnSpc>
+              <a:spcBef>
+                <a:spcPts val="1000"/>
+              </a:spcBef>
+              <a:spcAft>
+                <a:spcPts val="1200"/>
+              </a:spcAft>
+              <a:buFont typeface="Arial" panose="020B0604020202020204" pitchFamily="34" charset="0"/>
+              <a:buChar char="•"/>
+              <a:defRPr lang="en-US" sz="1200" kern="1200" dirty="0" smtClean="0">
+                <a:solidFill>
+                  <a:schemeClr val="tx1"/>
+                </a:solidFill>
+                <a:latin typeface="맑은 고딕" panose="020B0503020000020004" pitchFamily="50" charset="-127"/>
+                <a:ea typeface="맑은 고딕" panose="020B0503020000020004" pitchFamily="50" charset="-127"/>
+                <a:cs typeface="+mn-cs"/>
+              </a:defRPr>
+            </a:lvl5pPr>
+            <a:lvl6pPr marL="2057400" indent="-228600" algn="l" defTabSz="914400" rtl="0" eaLnBrk="1" latinLnBrk="1" hangingPunct="1">
+              <a:lnSpc>
+                <a:spcPct val="150000"/>
+              </a:lnSpc>
+              <a:spcBef>
+                <a:spcPts val="1000"/>
+              </a:spcBef>
+              <a:spcAft>
+                <a:spcPts val="1200"/>
+              </a:spcAft>
+              <a:buFont typeface="Arial" panose="020B0604020202020204" pitchFamily="34" charset="0"/>
+              <a:buChar char="•"/>
+              <a:defRPr lang="en-US" sz="1200" kern="1200" dirty="0" smtClean="0">
+                <a:solidFill>
+                  <a:schemeClr val="tx1"/>
+                </a:solidFill>
+                <a:latin typeface="+mn-lt"/>
+                <a:ea typeface="+mn-ea"/>
+                <a:cs typeface="+mn-cs"/>
+              </a:defRPr>
+            </a:lvl6pPr>
+            <a:lvl7pPr marL="2514600" indent="-228600" algn="l" defTabSz="914400" rtl="0" eaLnBrk="1" latinLnBrk="1" hangingPunct="1">
+              <a:lnSpc>
+                <a:spcPct val="150000"/>
+              </a:lnSpc>
+              <a:spcBef>
+                <a:spcPts val="1000"/>
+              </a:spcBef>
+              <a:spcAft>
+                <a:spcPts val="1200"/>
+              </a:spcAft>
+              <a:buFont typeface="Arial" panose="020B0604020202020204" pitchFamily="34" charset="0"/>
+              <a:buChar char="•"/>
+              <a:defRPr lang="en-US" sz="1200" kern="1200" dirty="0" smtClean="0">
+                <a:solidFill>
+                  <a:schemeClr val="tx1"/>
+                </a:solidFill>
+                <a:latin typeface="+mn-lt"/>
+                <a:ea typeface="+mn-ea"/>
+                <a:cs typeface="+mn-cs"/>
+              </a:defRPr>
+            </a:lvl7pPr>
+            <a:lvl8pPr marL="2971800" indent="-228600" algn="l" defTabSz="914400" rtl="0" eaLnBrk="1" latinLnBrk="1" hangingPunct="1">
+              <a:lnSpc>
+                <a:spcPct val="150000"/>
+              </a:lnSpc>
+              <a:spcBef>
+                <a:spcPts val="1000"/>
+              </a:spcBef>
+              <a:spcAft>
+                <a:spcPts val="1200"/>
+              </a:spcAft>
+              <a:buFont typeface="Arial" panose="020B0604020202020204" pitchFamily="34" charset="0"/>
+              <a:buChar char="•"/>
+              <a:defRPr lang="en-US" sz="1200" kern="1200" dirty="0" smtClean="0">
+                <a:solidFill>
+                  <a:schemeClr val="tx1"/>
+                </a:solidFill>
+                <a:latin typeface="+mn-lt"/>
+                <a:ea typeface="+mn-ea"/>
+                <a:cs typeface="+mn-cs"/>
+              </a:defRPr>
+            </a:lvl8pPr>
+            <a:lvl9pPr marL="3429000" indent="-228600" algn="l" defTabSz="914400" rtl="0" eaLnBrk="1" latinLnBrk="1" hangingPunct="1">
+              <a:lnSpc>
+                <a:spcPct val="90000"/>
+              </a:lnSpc>
+              <a:spcBef>
+                <a:spcPct val="30000"/>
+              </a:spcBef>
+              <a:buFont typeface="Arial" panose="020B0604020202020204" pitchFamily="34" charset="0"/>
+              <a:buNone/>
+              <a:defRPr sz="1200" kern="1200">
+                <a:solidFill>
+                  <a:schemeClr val="tx1"/>
+                </a:solidFill>
+                <a:latin typeface="+mn-lt"/>
+                <a:ea typeface="+mn-ea"/>
+                <a:cs typeface="+mn-cs"/>
+              </a:defRPr>
+            </a:lvl9pPr>
+          </a:lstStyle>
+          <a:p>
+            <a:r>
+              <a:rPr lang="en-US" altLang="ko-KR" sz="2400" dirty="0">
+                <a:solidFill>
+                  <a:schemeClr val="bg1"/>
+                </a:solidFill>
+              </a:rPr>
+              <a:t>2026 Fall</a:t>
+            </a:r>
+          </a:p>
+          <a:p>
+            <a:r>
+              <a:rPr lang="ko-KR" altLang="en-US" sz="2400" dirty="0">
+                <a:solidFill>
+                  <a:schemeClr val="bg1"/>
+                </a:solidFill>
+              </a:rPr>
+              <a:t>조상구 교수</a:t>
+            </a:r>
+            <a:endParaRPr lang="en-US" altLang="ko-KR" sz="2400" dirty="0">
+              <a:solidFill>
+                <a:schemeClr val="bg1"/>
+              </a:solidFill>
+            </a:endParaRPr>
+          </a:p>
+        </p:txBody>
+      </p:sp>
+    </p:spTree>
+    <p:extLst>
+      <p:ext uri="{BB962C8B-B14F-4D97-AF65-F5344CB8AC3E}">
+        <p14:creationId xmlns:p14="http://schemas.microsoft.com/office/powerpoint/2010/main" val="1742696570"/>
+      </p:ext>
+    </p:extLst>
+  </p:cSld>
+  <p:clrMapOvr>
+    <a:masterClrMapping/>
+  </p:clrMapOvr>
+</p:sld>
+</file>
+
+<file path=ppt/slides/slide11.xml><?xml version="1.0" encoding="utf-8"?>
+<p:sld xmlns:a="http://schemas.openxmlformats.org/drawingml/2006/main" xmlns:r="http://schemas.openxmlformats.org/officeDocument/2006/relationships" xmlns:p="http://schemas.openxmlformats.org/presentationml/2006/main">
+  <p:cSld>
+    <p:spTree>
+      <p:nvGrpSpPr>
+        <p:cNvPr id="1" name="">
+          <a:extLst>
+            <a:ext uri="{FF2B5EF4-FFF2-40B4-BE49-F238E27FC236}">
+              <a16:creationId xmlns:a16="http://schemas.microsoft.com/office/drawing/2014/main" id="{7CCF3B32-7AD8-6A79-B20F-F40621507CA4}"/>
+            </a:ext>
+          </a:extLst>
+        </p:cNvPr>
+        <p:cNvGrpSpPr/>
+        <p:nvPr/>
+      </p:nvGrpSpPr>
+      <p:grpSpPr>
+        <a:xfrm>
+          <a:off x="0" y="0"/>
+          <a:ext cx="0" cy="0"/>
+          <a:chOff x="0" y="0"/>
+          <a:chExt cx="0" cy="0"/>
+        </a:xfrm>
+      </p:grpSpPr>
+      <p:sp>
+        <p:nvSpPr>
           <p:cNvPr id="4" name="슬라이드 번호 개체 틀 3">
             <a:extLst>
               <a:ext uri="{FF2B5EF4-FFF2-40B4-BE49-F238E27FC236}">
-                <a16:creationId xmlns:a16="http://schemas.microsoft.com/office/drawing/2014/main" id="{9BA99687-4C48-8DA7-5F76-6B7712A597D4}"/>
+                <a16:creationId xmlns:a16="http://schemas.microsoft.com/office/drawing/2014/main" id="{C810A2E4-4F28-0263-3320-8C0A0FF713BD}"/>
               </a:ext>
             </a:extLst>
           </p:cNvPr>
@@ -3054,7 +3690,7 @@
             <a:fld id="{D57F1E4F-1CFF-5643-939E-217C01CDF565}" type="slidenum">
               <a:rPr lang="en-US" smtClean="0"/>
               <a:pPr/>
-              <a:t>2</a:t>
+              <a:t>11</a:t>
             </a:fld>
             <a:endParaRPr lang="en-US" dirty="0"/>
           </a:p>
@@ -3065,7 +3701,7 @@
           <p:cNvPr id="3" name="제목 1">
             <a:extLst>
               <a:ext uri="{FF2B5EF4-FFF2-40B4-BE49-F238E27FC236}">
-                <a16:creationId xmlns:a16="http://schemas.microsoft.com/office/drawing/2014/main" id="{FD810985-A788-B5F8-19D5-7D75D19399E4}"/>
+                <a16:creationId xmlns:a16="http://schemas.microsoft.com/office/drawing/2014/main" id="{92CD3408-A442-A13C-A96B-CBBE01412689}"/>
               </a:ext>
             </a:extLst>
           </p:cNvPr>
@@ -3140,7 +3776,7 @@
           <p:cNvPr id="5" name="TextBox 4">
             <a:extLst>
               <a:ext uri="{FF2B5EF4-FFF2-40B4-BE49-F238E27FC236}">
-                <a16:creationId xmlns:a16="http://schemas.microsoft.com/office/drawing/2014/main" id="{3EAAB68B-A2BA-07A3-DB75-5B56921FF4A0}"/>
+                <a16:creationId xmlns:a16="http://schemas.microsoft.com/office/drawing/2014/main" id="{FA016EFA-B588-D13F-2C59-D9750F2A1ED4}"/>
               </a:ext>
             </a:extLst>
           </p:cNvPr>
@@ -3189,7 +3825,7 @@
     </p:spTree>
     <p:extLst>
       <p:ext uri="{BB962C8B-B14F-4D97-AF65-F5344CB8AC3E}">
-        <p14:creationId xmlns:p14="http://schemas.microsoft.com/office/powerpoint/2010/main" val="578434090"/>
+        <p14:creationId xmlns:p14="http://schemas.microsoft.com/office/powerpoint/2010/main" val="4197575882"/>
       </p:ext>
     </p:extLst>
   </p:cSld>
@@ -3199,7 +3835,7 @@
 </p:sld>
 </file>
 
-<file path=ppt/slides/slide3.xml><?xml version="1.0" encoding="utf-8"?>
+<file path=ppt/slides/slide12.xml><?xml version="1.0" encoding="utf-8"?>
 <p:sld xmlns:a="http://schemas.openxmlformats.org/drawingml/2006/main" xmlns:r="http://schemas.openxmlformats.org/officeDocument/2006/relationships" xmlns:p="http://schemas.openxmlformats.org/presentationml/2006/main">
   <p:cSld>
     <p:spTree>
@@ -3251,7 +3887,7 @@
             <a:fld id="{D57F1E4F-1CFF-5643-939E-217C01CDF565}" type="slidenum">
               <a:rPr lang="en-US" smtClean="0"/>
               <a:pPr/>
-              <a:t>3</a:t>
+              <a:t>12</a:t>
             </a:fld>
             <a:endParaRPr lang="en-US" dirty="0"/>
           </a:p>
@@ -3469,7 +4105,7 @@
 </p:sld>
 </file>
 
-<file path=ppt/slides/slide4.xml><?xml version="1.0" encoding="utf-8"?>
+<file path=ppt/slides/slide13.xml><?xml version="1.0" encoding="utf-8"?>
 <p:sld xmlns:a="http://schemas.openxmlformats.org/drawingml/2006/main" xmlns:r="http://schemas.openxmlformats.org/officeDocument/2006/relationships" xmlns:p="http://schemas.openxmlformats.org/presentationml/2006/main">
   <p:cSld>
     <p:spTree>
@@ -3521,7 +4157,7 @@
             <a:fld id="{D57F1E4F-1CFF-5643-939E-217C01CDF565}" type="slidenum">
               <a:rPr lang="en-US" smtClean="0"/>
               <a:pPr/>
-              <a:t>4</a:t>
+              <a:t>13</a:t>
             </a:fld>
             <a:endParaRPr lang="en-US" dirty="0"/>
           </a:p>
@@ -3785,7 +4421,7 @@
 </p:sld>
 </file>
 
-<file path=ppt/slides/slide5.xml><?xml version="1.0" encoding="utf-8"?>
+<file path=ppt/slides/slide14.xml><?xml version="1.0" encoding="utf-8"?>
 <p:sld xmlns:a="http://schemas.openxmlformats.org/drawingml/2006/main" xmlns:r="http://schemas.openxmlformats.org/officeDocument/2006/relationships" xmlns:p="http://schemas.openxmlformats.org/presentationml/2006/main">
   <p:cSld>
     <p:spTree>
@@ -3837,7 +4473,7 @@
             <a:fld id="{D57F1E4F-1CFF-5643-939E-217C01CDF565}" type="slidenum">
               <a:rPr lang="en-US" smtClean="0"/>
               <a:pPr/>
-              <a:t>5</a:t>
+              <a:t>14</a:t>
             </a:fld>
             <a:endParaRPr lang="en-US" dirty="0"/>
           </a:p>
@@ -4294,10 +4930,10 @@
           <p:nvPr/>
         </p:nvPicPr>
         <p:blipFill>
-          <a:blip r:embed="rId2">
+          <a:blip>
             <a:extLst>
               <a:ext uri="{96DAC541-7B7A-43D3-8B79-37D633B846F1}">
-                <asvg:svgBlip xmlns:asvg="http://schemas.microsoft.com/office/drawing/2016/SVG/main" r:embed="rId3"/>
+                <asvg:svgBlip xmlns:asvg="http://schemas.microsoft.com/office/drawing/2016/SVG/main" r:embed="rId2"/>
               </a:ext>
             </a:extLst>
           </a:blip>
@@ -4328,7 +4964,7 @@
 </p:sld>
 </file>
 
-<file path=ppt/slides/slide6.xml><?xml version="1.0" encoding="utf-8"?>
+<file path=ppt/slides/slide15.xml><?xml version="1.0" encoding="utf-8"?>
 <p:sld xmlns:a="http://schemas.openxmlformats.org/drawingml/2006/main" xmlns:r="http://schemas.openxmlformats.org/officeDocument/2006/relationships" xmlns:p="http://schemas.openxmlformats.org/presentationml/2006/main">
   <p:cSld>
     <p:spTree>
@@ -4380,7 +5016,7 @@
             <a:fld id="{D57F1E4F-1CFF-5643-939E-217C01CDF565}" type="slidenum">
               <a:rPr lang="en-US" smtClean="0"/>
               <a:pPr/>
-              <a:t>6</a:t>
+              <a:t>15</a:t>
             </a:fld>
             <a:endParaRPr lang="en-US" dirty="0"/>
           </a:p>
@@ -4540,6 +5176,2426 @@
     <p:extLst>
       <p:ext uri="{BB962C8B-B14F-4D97-AF65-F5344CB8AC3E}">
         <p14:creationId xmlns:p14="http://schemas.microsoft.com/office/powerpoint/2010/main" val="570096588"/>
+      </p:ext>
+    </p:extLst>
+  </p:cSld>
+  <p:clrMapOvr>
+    <a:masterClrMapping/>
+  </p:clrMapOvr>
+</p:sld>
+</file>
+
+<file path=ppt/slides/slide2.xml><?xml version="1.0" encoding="utf-8"?>
+<p:sld xmlns:a="http://schemas.openxmlformats.org/drawingml/2006/main" xmlns:r="http://schemas.openxmlformats.org/officeDocument/2006/relationships" xmlns:p="http://schemas.openxmlformats.org/presentationml/2006/main">
+  <p:cSld>
+    <p:spTree>
+      <p:nvGrpSpPr>
+        <p:cNvPr id="1" name="">
+          <a:extLst>
+            <a:ext uri="{FF2B5EF4-FFF2-40B4-BE49-F238E27FC236}">
+              <a16:creationId xmlns:a16="http://schemas.microsoft.com/office/drawing/2014/main" id="{DB119595-A7A2-8D11-697D-CA319DF335E2}"/>
+            </a:ext>
+          </a:extLst>
+        </p:cNvPr>
+        <p:cNvGrpSpPr/>
+        <p:nvPr/>
+      </p:nvGrpSpPr>
+      <p:grpSpPr>
+        <a:xfrm>
+          <a:off x="0" y="0"/>
+          <a:ext cx="0" cy="0"/>
+          <a:chOff x="0" y="0"/>
+          <a:chExt cx="0" cy="0"/>
+        </a:xfrm>
+      </p:grpSpPr>
+      <p:sp>
+        <p:nvSpPr>
+          <p:cNvPr id="2" name="제목 1">
+            <a:extLst>
+              <a:ext uri="{FF2B5EF4-FFF2-40B4-BE49-F238E27FC236}">
+                <a16:creationId xmlns:a16="http://schemas.microsoft.com/office/drawing/2014/main" id="{7FD18F6A-7E6A-AD19-2830-0E0A1F926514}"/>
+              </a:ext>
+            </a:extLst>
+          </p:cNvPr>
+          <p:cNvSpPr>
+            <a:spLocks noGrp="1"/>
+          </p:cNvSpPr>
+          <p:nvPr>
+            <p:ph type="ctrTitle"/>
+          </p:nvPr>
+        </p:nvSpPr>
+        <p:spPr>
+          <a:xfrm>
+            <a:off x="581025" y="1164324"/>
+            <a:ext cx="11344275" cy="2387600"/>
+          </a:xfrm>
+        </p:spPr>
+        <p:txBody>
+          <a:bodyPr rtlCol="0" anchor="ctr" anchorCtr="0">
+            <a:normAutofit/>
+          </a:bodyPr>
+          <a:lstStyle/>
+          <a:p>
+            <a:r>
+              <a:rPr lang="en-US" altLang="ko-KR" sz="4400" dirty="0">
+                <a:solidFill>
+                  <a:schemeClr val="bg1"/>
+                </a:solidFill>
+              </a:rPr>
+              <a:t>Workflow Automation </a:t>
+            </a:r>
+            <a:endParaRPr lang="ko-KR" altLang="en-US" sz="4400" dirty="0">
+              <a:solidFill>
+                <a:schemeClr val="bg1"/>
+              </a:solidFill>
+            </a:endParaRPr>
+          </a:p>
+        </p:txBody>
+      </p:sp>
+      <p:sp>
+        <p:nvSpPr>
+          <p:cNvPr id="5" name="부제목 2">
+            <a:extLst>
+              <a:ext uri="{FF2B5EF4-FFF2-40B4-BE49-F238E27FC236}">
+                <a16:creationId xmlns:a16="http://schemas.microsoft.com/office/drawing/2014/main" id="{0292716D-C476-8D34-55FE-086386A1F740}"/>
+              </a:ext>
+            </a:extLst>
+          </p:cNvPr>
+          <p:cNvSpPr txBox="1">
+            <a:spLocks/>
+          </p:cNvSpPr>
+          <p:nvPr/>
+        </p:nvSpPr>
+        <p:spPr>
+          <a:xfrm>
+            <a:off x="855620" y="4555883"/>
+            <a:ext cx="9582736" cy="1137793"/>
+          </a:xfrm>
+          <a:prstGeom prst="rect">
+            <a:avLst/>
+          </a:prstGeom>
+        </p:spPr>
+        <p:txBody>
+          <a:bodyPr vert="horz" lIns="91440" tIns="45720" rIns="91440" bIns="45720" rtlCol="0">
+            <a:normAutofit fontScale="85000" lnSpcReduction="20000"/>
+          </a:bodyPr>
+          <a:lstStyle>
+            <a:lvl1pPr marL="0" indent="0" algn="l" defTabSz="914400" rtl="0" eaLnBrk="1" latinLnBrk="1" hangingPunct="1">
+              <a:lnSpc>
+                <a:spcPct val="150000"/>
+              </a:lnSpc>
+              <a:spcBef>
+                <a:spcPts val="1000"/>
+              </a:spcBef>
+              <a:spcAft>
+                <a:spcPts val="1200"/>
+              </a:spcAft>
+              <a:buFontTx/>
+              <a:buNone/>
+              <a:defRPr lang="en-US" sz="1200" kern="1200" dirty="0">
+                <a:solidFill>
+                  <a:schemeClr val="tx1"/>
+                </a:solidFill>
+                <a:latin typeface="맑은 고딕" panose="020B0503020000020004" pitchFamily="50" charset="-127"/>
+                <a:ea typeface="맑은 고딕" panose="020B0503020000020004" pitchFamily="50" charset="-127"/>
+                <a:cs typeface="+mn-cs"/>
+              </a:defRPr>
+            </a:lvl1pPr>
+            <a:lvl2pPr marL="228600" indent="-228600" algn="l" defTabSz="914400" rtl="0" eaLnBrk="1" latinLnBrk="1" hangingPunct="1">
+              <a:lnSpc>
+                <a:spcPct val="150000"/>
+              </a:lnSpc>
+              <a:spcBef>
+                <a:spcPts val="1000"/>
+              </a:spcBef>
+              <a:spcAft>
+                <a:spcPts val="1200"/>
+              </a:spcAft>
+              <a:buFont typeface="Arial" panose="020B0604020202020204" pitchFamily="34" charset="0"/>
+              <a:buChar char="•"/>
+              <a:defRPr lang="en-US" sz="1200" kern="1200" dirty="0">
+                <a:solidFill>
+                  <a:schemeClr val="tx1"/>
+                </a:solidFill>
+                <a:latin typeface="맑은 고딕" panose="020B0503020000020004" pitchFamily="50" charset="-127"/>
+                <a:ea typeface="맑은 고딕" panose="020B0503020000020004" pitchFamily="50" charset="-127"/>
+                <a:cs typeface="+mn-cs"/>
+              </a:defRPr>
+            </a:lvl2pPr>
+            <a:lvl3pPr marL="685800" indent="-228600" algn="l" defTabSz="914400" rtl="0" eaLnBrk="1" latinLnBrk="1" hangingPunct="1">
+              <a:lnSpc>
+                <a:spcPct val="150000"/>
+              </a:lnSpc>
+              <a:spcBef>
+                <a:spcPts val="1000"/>
+              </a:spcBef>
+              <a:spcAft>
+                <a:spcPts val="1200"/>
+              </a:spcAft>
+              <a:buFont typeface="Arial" panose="020B0604020202020204" pitchFamily="34" charset="0"/>
+              <a:buChar char="•"/>
+              <a:defRPr lang="en-US" sz="1200" kern="1200" dirty="0">
+                <a:solidFill>
+                  <a:schemeClr val="tx1"/>
+                </a:solidFill>
+                <a:latin typeface="맑은 고딕" panose="020B0503020000020004" pitchFamily="50" charset="-127"/>
+                <a:ea typeface="맑은 고딕" panose="020B0503020000020004" pitchFamily="50" charset="-127"/>
+                <a:cs typeface="+mn-cs"/>
+              </a:defRPr>
+            </a:lvl3pPr>
+            <a:lvl4pPr marL="1143000" indent="-228600" algn="l" defTabSz="914400" rtl="0" eaLnBrk="1" latinLnBrk="1" hangingPunct="1">
+              <a:lnSpc>
+                <a:spcPct val="150000"/>
+              </a:lnSpc>
+              <a:spcBef>
+                <a:spcPts val="1000"/>
+              </a:spcBef>
+              <a:spcAft>
+                <a:spcPts val="1200"/>
+              </a:spcAft>
+              <a:buFont typeface="Arial" panose="020B0604020202020204" pitchFamily="34" charset="0"/>
+              <a:buChar char="•"/>
+              <a:defRPr lang="en-US" sz="1200" kern="1200" dirty="0" smtClean="0">
+                <a:solidFill>
+                  <a:schemeClr val="tx1"/>
+                </a:solidFill>
+                <a:latin typeface="맑은 고딕" panose="020B0503020000020004" pitchFamily="50" charset="-127"/>
+                <a:ea typeface="맑은 고딕" panose="020B0503020000020004" pitchFamily="50" charset="-127"/>
+                <a:cs typeface="+mn-cs"/>
+              </a:defRPr>
+            </a:lvl4pPr>
+            <a:lvl5pPr marL="1600200" indent="-228600" algn="l" defTabSz="914400" rtl="0" eaLnBrk="1" latinLnBrk="1" hangingPunct="1">
+              <a:lnSpc>
+                <a:spcPct val="150000"/>
+              </a:lnSpc>
+              <a:spcBef>
+                <a:spcPts val="1000"/>
+              </a:spcBef>
+              <a:spcAft>
+                <a:spcPts val="1200"/>
+              </a:spcAft>
+              <a:buFont typeface="Arial" panose="020B0604020202020204" pitchFamily="34" charset="0"/>
+              <a:buChar char="•"/>
+              <a:defRPr lang="en-US" sz="1200" kern="1200" dirty="0" smtClean="0">
+                <a:solidFill>
+                  <a:schemeClr val="tx1"/>
+                </a:solidFill>
+                <a:latin typeface="맑은 고딕" panose="020B0503020000020004" pitchFamily="50" charset="-127"/>
+                <a:ea typeface="맑은 고딕" panose="020B0503020000020004" pitchFamily="50" charset="-127"/>
+                <a:cs typeface="+mn-cs"/>
+              </a:defRPr>
+            </a:lvl5pPr>
+            <a:lvl6pPr marL="2057400" indent="-228600" algn="l" defTabSz="914400" rtl="0" eaLnBrk="1" latinLnBrk="1" hangingPunct="1">
+              <a:lnSpc>
+                <a:spcPct val="150000"/>
+              </a:lnSpc>
+              <a:spcBef>
+                <a:spcPts val="1000"/>
+              </a:spcBef>
+              <a:spcAft>
+                <a:spcPts val="1200"/>
+              </a:spcAft>
+              <a:buFont typeface="Arial" panose="020B0604020202020204" pitchFamily="34" charset="0"/>
+              <a:buChar char="•"/>
+              <a:defRPr lang="en-US" sz="1200" kern="1200" dirty="0" smtClean="0">
+                <a:solidFill>
+                  <a:schemeClr val="tx1"/>
+                </a:solidFill>
+                <a:latin typeface="+mn-lt"/>
+                <a:ea typeface="+mn-ea"/>
+                <a:cs typeface="+mn-cs"/>
+              </a:defRPr>
+            </a:lvl6pPr>
+            <a:lvl7pPr marL="2514600" indent="-228600" algn="l" defTabSz="914400" rtl="0" eaLnBrk="1" latinLnBrk="1" hangingPunct="1">
+              <a:lnSpc>
+                <a:spcPct val="150000"/>
+              </a:lnSpc>
+              <a:spcBef>
+                <a:spcPts val="1000"/>
+              </a:spcBef>
+              <a:spcAft>
+                <a:spcPts val="1200"/>
+              </a:spcAft>
+              <a:buFont typeface="Arial" panose="020B0604020202020204" pitchFamily="34" charset="0"/>
+              <a:buChar char="•"/>
+              <a:defRPr lang="en-US" sz="1200" kern="1200" dirty="0" smtClean="0">
+                <a:solidFill>
+                  <a:schemeClr val="tx1"/>
+                </a:solidFill>
+                <a:latin typeface="+mn-lt"/>
+                <a:ea typeface="+mn-ea"/>
+                <a:cs typeface="+mn-cs"/>
+              </a:defRPr>
+            </a:lvl7pPr>
+            <a:lvl8pPr marL="2971800" indent="-228600" algn="l" defTabSz="914400" rtl="0" eaLnBrk="1" latinLnBrk="1" hangingPunct="1">
+              <a:lnSpc>
+                <a:spcPct val="150000"/>
+              </a:lnSpc>
+              <a:spcBef>
+                <a:spcPts val="1000"/>
+              </a:spcBef>
+              <a:spcAft>
+                <a:spcPts val="1200"/>
+              </a:spcAft>
+              <a:buFont typeface="Arial" panose="020B0604020202020204" pitchFamily="34" charset="0"/>
+              <a:buChar char="•"/>
+              <a:defRPr lang="en-US" sz="1200" kern="1200" dirty="0" smtClean="0">
+                <a:solidFill>
+                  <a:schemeClr val="tx1"/>
+                </a:solidFill>
+                <a:latin typeface="+mn-lt"/>
+                <a:ea typeface="+mn-ea"/>
+                <a:cs typeface="+mn-cs"/>
+              </a:defRPr>
+            </a:lvl8pPr>
+            <a:lvl9pPr marL="3429000" indent="-228600" algn="l" defTabSz="914400" rtl="0" eaLnBrk="1" latinLnBrk="1" hangingPunct="1">
+              <a:lnSpc>
+                <a:spcPct val="90000"/>
+              </a:lnSpc>
+              <a:spcBef>
+                <a:spcPct val="30000"/>
+              </a:spcBef>
+              <a:buFont typeface="Arial" panose="020B0604020202020204" pitchFamily="34" charset="0"/>
+              <a:buNone/>
+              <a:defRPr sz="1200" kern="1200">
+                <a:solidFill>
+                  <a:schemeClr val="tx1"/>
+                </a:solidFill>
+                <a:latin typeface="+mn-lt"/>
+                <a:ea typeface="+mn-ea"/>
+                <a:cs typeface="+mn-cs"/>
+              </a:defRPr>
+            </a:lvl9pPr>
+          </a:lstStyle>
+          <a:p>
+            <a:r>
+              <a:rPr lang="en-US" altLang="ko-KR" sz="2400" dirty="0">
+                <a:solidFill>
+                  <a:schemeClr val="bg1"/>
+                </a:solidFill>
+              </a:rPr>
+              <a:t>2026 Fall</a:t>
+            </a:r>
+          </a:p>
+          <a:p>
+            <a:r>
+              <a:rPr lang="ko-KR" altLang="en-US" sz="2400" dirty="0">
+                <a:solidFill>
+                  <a:schemeClr val="bg1"/>
+                </a:solidFill>
+              </a:rPr>
+              <a:t>조상구 교수</a:t>
+            </a:r>
+            <a:endParaRPr lang="en-US" altLang="ko-KR" sz="2400" dirty="0">
+              <a:solidFill>
+                <a:schemeClr val="bg1"/>
+              </a:solidFill>
+            </a:endParaRPr>
+          </a:p>
+        </p:txBody>
+      </p:sp>
+    </p:spTree>
+    <p:extLst>
+      <p:ext uri="{BB962C8B-B14F-4D97-AF65-F5344CB8AC3E}">
+        <p14:creationId xmlns:p14="http://schemas.microsoft.com/office/powerpoint/2010/main" val="4089856985"/>
+      </p:ext>
+    </p:extLst>
+  </p:cSld>
+  <p:clrMapOvr>
+    <a:masterClrMapping/>
+  </p:clrMapOvr>
+</p:sld>
+</file>
+
+<file path=ppt/slides/slide3.xml><?xml version="1.0" encoding="utf-8"?>
+<p:sld xmlns:a="http://schemas.openxmlformats.org/drawingml/2006/main" xmlns:r="http://schemas.openxmlformats.org/officeDocument/2006/relationships" xmlns:p="http://schemas.openxmlformats.org/presentationml/2006/main">
+  <p:cSld>
+    <p:spTree>
+      <p:nvGrpSpPr>
+        <p:cNvPr id="1" name="">
+          <a:extLst>
+            <a:ext uri="{FF2B5EF4-FFF2-40B4-BE49-F238E27FC236}">
+              <a16:creationId xmlns:a16="http://schemas.microsoft.com/office/drawing/2014/main" id="{83F1806B-3677-1D38-9F7D-896DBF021687}"/>
+            </a:ext>
+          </a:extLst>
+        </p:cNvPr>
+        <p:cNvGrpSpPr/>
+        <p:nvPr/>
+      </p:nvGrpSpPr>
+      <p:grpSpPr>
+        <a:xfrm>
+          <a:off x="0" y="0"/>
+          <a:ext cx="0" cy="0"/>
+          <a:chOff x="0" y="0"/>
+          <a:chExt cx="0" cy="0"/>
+        </a:xfrm>
+      </p:grpSpPr>
+      <p:sp>
+        <p:nvSpPr>
+          <p:cNvPr id="4" name="슬라이드 번호 개체 틀 3">
+            <a:extLst>
+              <a:ext uri="{FF2B5EF4-FFF2-40B4-BE49-F238E27FC236}">
+                <a16:creationId xmlns:a16="http://schemas.microsoft.com/office/drawing/2014/main" id="{02B71861-A105-753E-F5E8-C57C8BA9992E}"/>
+              </a:ext>
+            </a:extLst>
+          </p:cNvPr>
+          <p:cNvSpPr>
+            <a:spLocks noGrp="1"/>
+          </p:cNvSpPr>
+          <p:nvPr>
+            <p:ph type="sldNum" sz="quarter" idx="12"/>
+          </p:nvPr>
+        </p:nvSpPr>
+        <p:spPr>
+          <a:xfrm>
+            <a:off x="10514011" y="6036261"/>
+            <a:ext cx="753545" cy="365125"/>
+          </a:xfrm>
+        </p:spPr>
+        <p:txBody>
+          <a:bodyPr/>
+          <a:lstStyle/>
+          <a:p>
+            <a:fld id="{D57F1E4F-1CFF-5643-939E-217C01CDF565}" type="slidenum">
+              <a:rPr lang="en-US" smtClean="0"/>
+              <a:pPr/>
+              <a:t>3</a:t>
+            </a:fld>
+            <a:endParaRPr lang="en-US" dirty="0"/>
+          </a:p>
+        </p:txBody>
+      </p:sp>
+      <p:sp>
+        <p:nvSpPr>
+          <p:cNvPr id="3" name="제목 1">
+            <a:extLst>
+              <a:ext uri="{FF2B5EF4-FFF2-40B4-BE49-F238E27FC236}">
+                <a16:creationId xmlns:a16="http://schemas.microsoft.com/office/drawing/2014/main" id="{91059EA3-E600-8D96-DF93-F92E75733DC3}"/>
+              </a:ext>
+            </a:extLst>
+          </p:cNvPr>
+          <p:cNvSpPr txBox="1">
+            <a:spLocks/>
+          </p:cNvSpPr>
+          <p:nvPr/>
+        </p:nvSpPr>
+        <p:spPr>
+          <a:xfrm>
+            <a:off x="475645" y="481983"/>
+            <a:ext cx="10353762" cy="766439"/>
+          </a:xfrm>
+          <a:prstGeom prst="rect">
+            <a:avLst/>
+          </a:prstGeom>
+        </p:spPr>
+        <p:txBody>
+          <a:bodyPr vert="horz" lIns="91440" tIns="45720" rIns="91440" bIns="45720" rtlCol="0" anchor="ctr">
+            <a:normAutofit/>
+          </a:bodyPr>
+          <a:lstStyle>
+            <a:lvl1pPr algn="ctr" defTabSz="914400" rtl="0" eaLnBrk="1" latinLnBrk="1" hangingPunct="1">
+              <a:lnSpc>
+                <a:spcPct val="90000"/>
+              </a:lnSpc>
+              <a:spcBef>
+                <a:spcPct val="0"/>
+              </a:spcBef>
+              <a:buNone/>
+              <a:defRPr sz="3200" kern="1200" cap="all" baseline="0">
+                <a:solidFill>
+                  <a:schemeClr val="tx1"/>
+                </a:solidFill>
+                <a:effectLst/>
+                <a:latin typeface="Batang" panose="02030600000101010101" pitchFamily="18" charset="-127"/>
+                <a:ea typeface="Batang" panose="02030600000101010101" pitchFamily="18" charset="-127"/>
+                <a:cs typeface="+mj-cs"/>
+              </a:defRPr>
+            </a:lvl1pPr>
+          </a:lstStyle>
+          <a:p>
+            <a:pPr algn="l"/>
+            <a:r>
+              <a:rPr lang="en-US" altLang="ko-KR" sz="2800" cap="none" dirty="0">
+                <a:solidFill>
+                  <a:schemeClr val="bg2">
+                    <a:lumMod val="25000"/>
+                  </a:schemeClr>
+                </a:solidFill>
+                <a:latin typeface="D2Coding" panose="020B0609020101020101" pitchFamily="49" charset="-127"/>
+                <a:ea typeface="D2Coding" panose="020B0609020101020101" pitchFamily="49" charset="-127"/>
+                <a:cs typeface="Segoe UI Light" panose="020B0502040204020203" pitchFamily="34" charset="0"/>
+              </a:rPr>
+              <a:t>Goals</a:t>
+            </a:r>
+            <a:endParaRPr lang="ko-KR" altLang="en-US" sz="2800" cap="none" dirty="0">
+              <a:solidFill>
+                <a:schemeClr val="bg2">
+                  <a:lumMod val="25000"/>
+                </a:schemeClr>
+              </a:solidFill>
+              <a:latin typeface="D2Coding" panose="020B0609020101020101" pitchFamily="49" charset="-127"/>
+              <a:ea typeface="D2Coding" panose="020B0609020101020101" pitchFamily="49" charset="-127"/>
+              <a:cs typeface="Segoe UI Light" panose="020B0502040204020203" pitchFamily="34" charset="0"/>
+            </a:endParaRPr>
+          </a:p>
+        </p:txBody>
+      </p:sp>
+      <p:sp>
+        <p:nvSpPr>
+          <p:cNvPr id="5" name="TextBox 4">
+            <a:extLst>
+              <a:ext uri="{FF2B5EF4-FFF2-40B4-BE49-F238E27FC236}">
+                <a16:creationId xmlns:a16="http://schemas.microsoft.com/office/drawing/2014/main" id="{EC7B32EC-3117-37D9-7774-7F4DAE2BF2FA}"/>
+              </a:ext>
+            </a:extLst>
+          </p:cNvPr>
+          <p:cNvSpPr txBox="1"/>
+          <p:nvPr/>
+        </p:nvSpPr>
+        <p:spPr>
+          <a:xfrm>
+            <a:off x="577530" y="1248422"/>
+            <a:ext cx="11233469" cy="5160195"/>
+          </a:xfrm>
+          <a:prstGeom prst="rect">
+            <a:avLst/>
+          </a:prstGeom>
+          <a:noFill/>
+        </p:spPr>
+        <p:txBody>
+          <a:bodyPr wrap="square">
+            <a:spAutoFit/>
+          </a:bodyPr>
+          <a:lstStyle/>
+          <a:p>
+            <a:pPr marL="800100" lvl="1" indent="-342900">
+              <a:lnSpc>
+                <a:spcPct val="200000"/>
+              </a:lnSpc>
+              <a:buFont typeface="Wingdings" panose="05000000000000000000" pitchFamily="2" charset="2"/>
+              <a:buChar char="v"/>
+            </a:pPr>
+            <a:r>
+              <a:rPr lang="en-US" altLang="ko-KR" sz="2400" dirty="0">
+                <a:latin typeface="D2Coding" panose="020B0609020101020101" pitchFamily="49" charset="-127"/>
+                <a:ea typeface="D2Coding" panose="020B0609020101020101" pitchFamily="49" charset="-127"/>
+              </a:rPr>
+              <a:t>Workflow Automation</a:t>
+            </a:r>
+          </a:p>
+          <a:p>
+            <a:pPr marL="800100" lvl="1" indent="-342900">
+              <a:lnSpc>
+                <a:spcPct val="200000"/>
+              </a:lnSpc>
+              <a:buFont typeface="Wingdings" panose="05000000000000000000" pitchFamily="2" charset="2"/>
+              <a:buChar char="v"/>
+            </a:pPr>
+            <a:r>
+              <a:rPr lang="ko-KR" altLang="ko-KR" sz="2400" dirty="0" err="1">
+                <a:latin typeface="D2Coding" panose="020B0609020101020101" pitchFamily="49" charset="-127"/>
+                <a:ea typeface="D2Coding" panose="020B0609020101020101" pitchFamily="49" charset="-127"/>
+              </a:rPr>
+              <a:t>Orchestrate</a:t>
+            </a:r>
+            <a:r>
+              <a:rPr lang="ko-KR" altLang="ko-KR" sz="2400" dirty="0">
+                <a:latin typeface="D2Coding" panose="020B0609020101020101" pitchFamily="49" charset="-127"/>
+                <a:ea typeface="D2Coding" panose="020B0609020101020101" pitchFamily="49" charset="-127"/>
+              </a:rPr>
+              <a:t> </a:t>
+            </a:r>
+            <a:r>
+              <a:rPr lang="en-US" altLang="ko-KR" sz="2400" dirty="0">
+                <a:latin typeface="D2Coding" panose="020B0609020101020101" pitchFamily="49" charset="-127"/>
+                <a:ea typeface="D2Coding" panose="020B0609020101020101" pitchFamily="49" charset="-127"/>
+              </a:rPr>
+              <a:t>Workflow with python</a:t>
+            </a:r>
+          </a:p>
+          <a:p>
+            <a:pPr marL="800100" lvl="1" indent="-342900">
+              <a:lnSpc>
+                <a:spcPct val="200000"/>
+              </a:lnSpc>
+              <a:buFont typeface="Wingdings" panose="05000000000000000000" pitchFamily="2" charset="2"/>
+              <a:buChar char="v"/>
+            </a:pPr>
+            <a:r>
+              <a:rPr lang="ko-KR" altLang="ko-KR" sz="2400" dirty="0" err="1">
+                <a:latin typeface="D2Coding" panose="020B0609020101020101" pitchFamily="49" charset="-127"/>
+                <a:ea typeface="D2Coding" panose="020B0609020101020101" pitchFamily="49" charset="-127"/>
+              </a:rPr>
+              <a:t>Orchestrate</a:t>
+            </a:r>
+            <a:r>
+              <a:rPr lang="ko-KR" altLang="ko-KR" sz="2400" dirty="0">
+                <a:latin typeface="D2Coding" panose="020B0609020101020101" pitchFamily="49" charset="-127"/>
+                <a:ea typeface="D2Coding" panose="020B0609020101020101" pitchFamily="49" charset="-127"/>
+              </a:rPr>
+              <a:t> </a:t>
+            </a:r>
+            <a:r>
+              <a:rPr lang="en-US" altLang="ko-KR" sz="2400" dirty="0">
+                <a:latin typeface="D2Coding" panose="020B0609020101020101" pitchFamily="49" charset="-127"/>
+                <a:ea typeface="D2Coding" panose="020B0609020101020101" pitchFamily="49" charset="-127"/>
+              </a:rPr>
+              <a:t>Workflow with Prefect</a:t>
+            </a:r>
+          </a:p>
+          <a:p>
+            <a:pPr marL="800100" lvl="1" indent="-342900">
+              <a:lnSpc>
+                <a:spcPct val="200000"/>
+              </a:lnSpc>
+              <a:buFont typeface="Wingdings" panose="05000000000000000000" pitchFamily="2" charset="2"/>
+              <a:buChar char="v"/>
+            </a:pPr>
+            <a:r>
+              <a:rPr lang="ko-KR" altLang="ko-KR" sz="2400" dirty="0" err="1">
+                <a:latin typeface="D2Coding" panose="020B0609020101020101" pitchFamily="49" charset="-127"/>
+                <a:ea typeface="D2Coding" panose="020B0609020101020101" pitchFamily="49" charset="-127"/>
+              </a:rPr>
+              <a:t>Orchestrate</a:t>
+            </a:r>
+            <a:r>
+              <a:rPr lang="ko-KR" altLang="ko-KR" sz="2400" dirty="0">
+                <a:latin typeface="D2Coding" panose="020B0609020101020101" pitchFamily="49" charset="-127"/>
+                <a:ea typeface="D2Coding" panose="020B0609020101020101" pitchFamily="49" charset="-127"/>
+              </a:rPr>
+              <a:t> </a:t>
+            </a:r>
+            <a:r>
+              <a:rPr lang="en-US" altLang="ko-KR" sz="2400" dirty="0">
+                <a:latin typeface="D2Coding" panose="020B0609020101020101" pitchFamily="49" charset="-127"/>
+                <a:ea typeface="D2Coding" panose="020B0609020101020101" pitchFamily="49" charset="-127"/>
+              </a:rPr>
+              <a:t>Workflow with python</a:t>
+            </a:r>
+          </a:p>
+          <a:p>
+            <a:pPr marL="800100" lvl="1" indent="-342900">
+              <a:lnSpc>
+                <a:spcPct val="200000"/>
+              </a:lnSpc>
+              <a:buFont typeface="Wingdings" panose="05000000000000000000" pitchFamily="2" charset="2"/>
+              <a:buChar char="v"/>
+            </a:pPr>
+            <a:endParaRPr lang="en-US" altLang="ko-KR" sz="2400" dirty="0">
+              <a:latin typeface="D2Coding" panose="020B0609020101020101" pitchFamily="49" charset="-127"/>
+              <a:ea typeface="D2Coding" panose="020B0609020101020101" pitchFamily="49" charset="-127"/>
+            </a:endParaRPr>
+          </a:p>
+          <a:p>
+            <a:pPr marL="800100" lvl="1" indent="-342900">
+              <a:lnSpc>
+                <a:spcPct val="200000"/>
+              </a:lnSpc>
+              <a:buFont typeface="Wingdings" panose="05000000000000000000" pitchFamily="2" charset="2"/>
+              <a:buChar char="v"/>
+            </a:pPr>
+            <a:endParaRPr lang="ko-KR" altLang="ko-KR" sz="2400" dirty="0">
+              <a:latin typeface="D2Coding" panose="020B0609020101020101" pitchFamily="49" charset="-127"/>
+              <a:ea typeface="D2Coding" panose="020B0609020101020101" pitchFamily="49" charset="-127"/>
+            </a:endParaRPr>
+          </a:p>
+          <a:p>
+            <a:pPr marL="800100" lvl="1" indent="-342900">
+              <a:lnSpc>
+                <a:spcPct val="200000"/>
+              </a:lnSpc>
+              <a:buFont typeface="Wingdings" panose="05000000000000000000" pitchFamily="2" charset="2"/>
+              <a:buChar char="v"/>
+            </a:pPr>
+            <a:endParaRPr lang="en-US" altLang="ko-KR" sz="2400" dirty="0">
+              <a:latin typeface="D2Coding" panose="020B0609020101020101" pitchFamily="49" charset="-127"/>
+              <a:ea typeface="D2Coding" panose="020B0609020101020101" pitchFamily="49" charset="-127"/>
+            </a:endParaRPr>
+          </a:p>
+        </p:txBody>
+      </p:sp>
+    </p:spTree>
+    <p:extLst>
+      <p:ext uri="{BB962C8B-B14F-4D97-AF65-F5344CB8AC3E}">
+        <p14:creationId xmlns:p14="http://schemas.microsoft.com/office/powerpoint/2010/main" val="1633861538"/>
+      </p:ext>
+    </p:extLst>
+  </p:cSld>
+  <p:clrMapOvr>
+    <a:masterClrMapping/>
+  </p:clrMapOvr>
+</p:sld>
+</file>
+
+<file path=ppt/slides/slide4.xml><?xml version="1.0" encoding="utf-8"?>
+<p:sld xmlns:a="http://schemas.openxmlformats.org/drawingml/2006/main" xmlns:r="http://schemas.openxmlformats.org/officeDocument/2006/relationships" xmlns:p="http://schemas.openxmlformats.org/presentationml/2006/main">
+  <p:cSld>
+    <p:spTree>
+      <p:nvGrpSpPr>
+        <p:cNvPr id="1" name="">
+          <a:extLst>
+            <a:ext uri="{FF2B5EF4-FFF2-40B4-BE49-F238E27FC236}">
+              <a16:creationId xmlns:a16="http://schemas.microsoft.com/office/drawing/2014/main" id="{8FAF90BD-0B46-D0D6-7007-8D2D1A9A3223}"/>
+            </a:ext>
+          </a:extLst>
+        </p:cNvPr>
+        <p:cNvGrpSpPr/>
+        <p:nvPr/>
+      </p:nvGrpSpPr>
+      <p:grpSpPr>
+        <a:xfrm>
+          <a:off x="0" y="0"/>
+          <a:ext cx="0" cy="0"/>
+          <a:chOff x="0" y="0"/>
+          <a:chExt cx="0" cy="0"/>
+        </a:xfrm>
+      </p:grpSpPr>
+      <p:sp>
+        <p:nvSpPr>
+          <p:cNvPr id="4" name="슬라이드 번호 개체 틀 3">
+            <a:extLst>
+              <a:ext uri="{FF2B5EF4-FFF2-40B4-BE49-F238E27FC236}">
+                <a16:creationId xmlns:a16="http://schemas.microsoft.com/office/drawing/2014/main" id="{CEEC3FF6-2F84-C946-93A5-E51AE4A97676}"/>
+              </a:ext>
+            </a:extLst>
+          </p:cNvPr>
+          <p:cNvSpPr>
+            <a:spLocks noGrp="1"/>
+          </p:cNvSpPr>
+          <p:nvPr>
+            <p:ph type="sldNum" sz="quarter" idx="12"/>
+          </p:nvPr>
+        </p:nvSpPr>
+        <p:spPr>
+          <a:xfrm>
+            <a:off x="10514011" y="6036261"/>
+            <a:ext cx="753545" cy="365125"/>
+          </a:xfrm>
+        </p:spPr>
+        <p:txBody>
+          <a:bodyPr/>
+          <a:lstStyle/>
+          <a:p>
+            <a:fld id="{D57F1E4F-1CFF-5643-939E-217C01CDF565}" type="slidenum">
+              <a:rPr lang="en-US" smtClean="0"/>
+              <a:pPr/>
+              <a:t>4</a:t>
+            </a:fld>
+            <a:endParaRPr lang="en-US" dirty="0"/>
+          </a:p>
+        </p:txBody>
+      </p:sp>
+      <p:sp>
+        <p:nvSpPr>
+          <p:cNvPr id="3" name="제목 1">
+            <a:extLst>
+              <a:ext uri="{FF2B5EF4-FFF2-40B4-BE49-F238E27FC236}">
+                <a16:creationId xmlns:a16="http://schemas.microsoft.com/office/drawing/2014/main" id="{0CB5E933-0C3E-C5BC-19F6-59B973129D4D}"/>
+              </a:ext>
+            </a:extLst>
+          </p:cNvPr>
+          <p:cNvSpPr txBox="1">
+            <a:spLocks/>
+          </p:cNvSpPr>
+          <p:nvPr/>
+        </p:nvSpPr>
+        <p:spPr>
+          <a:xfrm>
+            <a:off x="475645" y="481983"/>
+            <a:ext cx="10353762" cy="766439"/>
+          </a:xfrm>
+          <a:prstGeom prst="rect">
+            <a:avLst/>
+          </a:prstGeom>
+        </p:spPr>
+        <p:txBody>
+          <a:bodyPr vert="horz" lIns="91440" tIns="45720" rIns="91440" bIns="45720" rtlCol="0" anchor="ctr">
+            <a:normAutofit/>
+          </a:bodyPr>
+          <a:lstStyle>
+            <a:lvl1pPr algn="ctr" defTabSz="914400" rtl="0" eaLnBrk="1" latinLnBrk="1" hangingPunct="1">
+              <a:lnSpc>
+                <a:spcPct val="90000"/>
+              </a:lnSpc>
+              <a:spcBef>
+                <a:spcPct val="0"/>
+              </a:spcBef>
+              <a:buNone/>
+              <a:defRPr sz="3200" kern="1200" cap="all" baseline="0">
+                <a:solidFill>
+                  <a:schemeClr val="tx1"/>
+                </a:solidFill>
+                <a:effectLst/>
+                <a:latin typeface="Batang" panose="02030600000101010101" pitchFamily="18" charset="-127"/>
+                <a:ea typeface="Batang" panose="02030600000101010101" pitchFamily="18" charset="-127"/>
+                <a:cs typeface="+mj-cs"/>
+              </a:defRPr>
+            </a:lvl1pPr>
+          </a:lstStyle>
+          <a:p>
+            <a:pPr algn="l"/>
+            <a:r>
+              <a:rPr lang="ko-KR" altLang="ko-KR" sz="2800" b="1" cap="none" dirty="0">
+                <a:latin typeface="Lora" pitchFamily="2" charset="0"/>
+              </a:rPr>
+              <a:t>Data </a:t>
+            </a:r>
+            <a:r>
+              <a:rPr lang="ko-KR" altLang="ko-KR" sz="2800" b="1" cap="none" dirty="0" err="1">
+                <a:latin typeface="Lora" pitchFamily="2" charset="0"/>
+              </a:rPr>
+              <a:t>Science</a:t>
+            </a:r>
+            <a:r>
+              <a:rPr lang="ko-KR" altLang="ko-KR" sz="2800" b="1" cap="none" dirty="0">
+                <a:latin typeface="Lora" pitchFamily="2" charset="0"/>
+              </a:rPr>
+              <a:t> </a:t>
+            </a:r>
+            <a:r>
+              <a:rPr lang="en-US" altLang="ko-KR" sz="2800" b="1" cap="none" dirty="0">
+                <a:latin typeface="Lora" pitchFamily="2" charset="0"/>
+              </a:rPr>
+              <a:t>Workflow</a:t>
+            </a:r>
+            <a:endParaRPr lang="ko-KR" altLang="ko-KR" sz="2800" b="1" cap="none" dirty="0">
+              <a:latin typeface="Lora" pitchFamily="2" charset="0"/>
+            </a:endParaRPr>
+          </a:p>
+        </p:txBody>
+      </p:sp>
+      <p:pic>
+        <p:nvPicPr>
+          <p:cNvPr id="6" name="그림 5">
+            <a:extLst>
+              <a:ext uri="{FF2B5EF4-FFF2-40B4-BE49-F238E27FC236}">
+                <a16:creationId xmlns:a16="http://schemas.microsoft.com/office/drawing/2014/main" id="{6EEF76D1-CAE6-CD5A-633D-F6C7822D37E2}"/>
+              </a:ext>
+            </a:extLst>
+          </p:cNvPr>
+          <p:cNvPicPr>
+            <a:picLocks noChangeAspect="1"/>
+          </p:cNvPicPr>
+          <p:nvPr/>
+        </p:nvPicPr>
+        <p:blipFill>
+          <a:blip r:embed="rId2"/>
+          <a:stretch>
+            <a:fillRect/>
+          </a:stretch>
+        </p:blipFill>
+        <p:spPr>
+          <a:xfrm>
+            <a:off x="2603137" y="1761079"/>
+            <a:ext cx="5692633" cy="4153260"/>
+          </a:xfrm>
+          <a:prstGeom prst="rect">
+            <a:avLst/>
+          </a:prstGeom>
+        </p:spPr>
+      </p:pic>
+      <p:sp>
+        <p:nvSpPr>
+          <p:cNvPr id="7" name="TextBox 6">
+            <a:extLst>
+              <a:ext uri="{FF2B5EF4-FFF2-40B4-BE49-F238E27FC236}">
+                <a16:creationId xmlns:a16="http://schemas.microsoft.com/office/drawing/2014/main" id="{02757BAF-76C5-DC9F-96FE-0F8C46935739}"/>
+              </a:ext>
+            </a:extLst>
+          </p:cNvPr>
+          <p:cNvSpPr txBox="1"/>
+          <p:nvPr/>
+        </p:nvSpPr>
+        <p:spPr>
+          <a:xfrm>
+            <a:off x="2603137" y="6218823"/>
+            <a:ext cx="3614579" cy="307777"/>
+          </a:xfrm>
+          <a:prstGeom prst="rect">
+            <a:avLst/>
+          </a:prstGeom>
+          <a:noFill/>
+        </p:spPr>
+        <p:txBody>
+          <a:bodyPr wrap="none" rtlCol="0">
+            <a:spAutoFit/>
+          </a:bodyPr>
+          <a:lstStyle/>
+          <a:p>
+            <a:r>
+              <a:rPr lang="en-US" altLang="ko-KR" sz="1400" dirty="0">
+                <a:hlinkClick r:id="rId3"/>
+              </a:rPr>
+              <a:t>https://math.asu.edu/datascience/workflow</a:t>
+            </a:r>
+            <a:endParaRPr lang="ko-KR" altLang="en-US" sz="1400" dirty="0"/>
+          </a:p>
+        </p:txBody>
+      </p:sp>
+    </p:spTree>
+    <p:extLst>
+      <p:ext uri="{BB962C8B-B14F-4D97-AF65-F5344CB8AC3E}">
+        <p14:creationId xmlns:p14="http://schemas.microsoft.com/office/powerpoint/2010/main" val="3913412000"/>
+      </p:ext>
+    </p:extLst>
+  </p:cSld>
+  <p:clrMapOvr>
+    <a:masterClrMapping/>
+  </p:clrMapOvr>
+</p:sld>
+</file>
+
+<file path=ppt/slides/slide5.xml><?xml version="1.0" encoding="utf-8"?>
+<p:sld xmlns:a="http://schemas.openxmlformats.org/drawingml/2006/main" xmlns:r="http://schemas.openxmlformats.org/officeDocument/2006/relationships" xmlns:p="http://schemas.openxmlformats.org/presentationml/2006/main">
+  <p:cSld>
+    <p:spTree>
+      <p:nvGrpSpPr>
+        <p:cNvPr id="1" name="">
+          <a:extLst>
+            <a:ext uri="{FF2B5EF4-FFF2-40B4-BE49-F238E27FC236}">
+              <a16:creationId xmlns:a16="http://schemas.microsoft.com/office/drawing/2014/main" id="{0EA2204B-E244-99B3-34B7-EEDB50DF135C}"/>
+            </a:ext>
+          </a:extLst>
+        </p:cNvPr>
+        <p:cNvGrpSpPr/>
+        <p:nvPr/>
+      </p:nvGrpSpPr>
+      <p:grpSpPr>
+        <a:xfrm>
+          <a:off x="0" y="0"/>
+          <a:ext cx="0" cy="0"/>
+          <a:chOff x="0" y="0"/>
+          <a:chExt cx="0" cy="0"/>
+        </a:xfrm>
+      </p:grpSpPr>
+      <p:sp>
+        <p:nvSpPr>
+          <p:cNvPr id="4" name="슬라이드 번호 개체 틀 3">
+            <a:extLst>
+              <a:ext uri="{FF2B5EF4-FFF2-40B4-BE49-F238E27FC236}">
+                <a16:creationId xmlns:a16="http://schemas.microsoft.com/office/drawing/2014/main" id="{7D175648-4026-87A2-1E7D-D50D1AA43DE5}"/>
+              </a:ext>
+            </a:extLst>
+          </p:cNvPr>
+          <p:cNvSpPr>
+            <a:spLocks noGrp="1"/>
+          </p:cNvSpPr>
+          <p:nvPr>
+            <p:ph type="sldNum" sz="quarter" idx="12"/>
+          </p:nvPr>
+        </p:nvSpPr>
+        <p:spPr>
+          <a:xfrm>
+            <a:off x="10514011" y="6036261"/>
+            <a:ext cx="753545" cy="365125"/>
+          </a:xfrm>
+        </p:spPr>
+        <p:txBody>
+          <a:bodyPr/>
+          <a:lstStyle/>
+          <a:p>
+            <a:fld id="{D57F1E4F-1CFF-5643-939E-217C01CDF565}" type="slidenum">
+              <a:rPr lang="en-US" smtClean="0"/>
+              <a:pPr/>
+              <a:t>5</a:t>
+            </a:fld>
+            <a:endParaRPr lang="en-US" dirty="0"/>
+          </a:p>
+        </p:txBody>
+      </p:sp>
+      <p:sp>
+        <p:nvSpPr>
+          <p:cNvPr id="3" name="제목 1">
+            <a:extLst>
+              <a:ext uri="{FF2B5EF4-FFF2-40B4-BE49-F238E27FC236}">
+                <a16:creationId xmlns:a16="http://schemas.microsoft.com/office/drawing/2014/main" id="{C544180C-87C2-5DB1-94D1-6F90334605DF}"/>
+              </a:ext>
+            </a:extLst>
+          </p:cNvPr>
+          <p:cNvSpPr txBox="1">
+            <a:spLocks/>
+          </p:cNvSpPr>
+          <p:nvPr/>
+        </p:nvSpPr>
+        <p:spPr>
+          <a:xfrm>
+            <a:off x="475645" y="481983"/>
+            <a:ext cx="10353762" cy="766439"/>
+          </a:xfrm>
+          <a:prstGeom prst="rect">
+            <a:avLst/>
+          </a:prstGeom>
+        </p:spPr>
+        <p:txBody>
+          <a:bodyPr vert="horz" lIns="91440" tIns="45720" rIns="91440" bIns="45720" rtlCol="0" anchor="ctr">
+            <a:normAutofit/>
+          </a:bodyPr>
+          <a:lstStyle>
+            <a:lvl1pPr algn="ctr" defTabSz="914400" rtl="0" eaLnBrk="1" latinLnBrk="1" hangingPunct="1">
+              <a:lnSpc>
+                <a:spcPct val="90000"/>
+              </a:lnSpc>
+              <a:spcBef>
+                <a:spcPct val="0"/>
+              </a:spcBef>
+              <a:buNone/>
+              <a:defRPr sz="3200" kern="1200" cap="all" baseline="0">
+                <a:solidFill>
+                  <a:schemeClr val="tx1"/>
+                </a:solidFill>
+                <a:effectLst/>
+                <a:latin typeface="Batang" panose="02030600000101010101" pitchFamily="18" charset="-127"/>
+                <a:ea typeface="Batang" panose="02030600000101010101" pitchFamily="18" charset="-127"/>
+                <a:cs typeface="+mj-cs"/>
+              </a:defRPr>
+            </a:lvl1pPr>
+          </a:lstStyle>
+          <a:p>
+            <a:pPr algn="l"/>
+            <a:r>
+              <a:rPr lang="ko-KR" altLang="ko-KR" sz="2800" b="1" cap="none" dirty="0" err="1">
+                <a:latin typeface="Lora" pitchFamily="2" charset="0"/>
+              </a:rPr>
+              <a:t>Orchestrate</a:t>
+            </a:r>
+            <a:r>
+              <a:rPr lang="ko-KR" altLang="ko-KR" sz="2800" b="1" cap="none" dirty="0">
+                <a:latin typeface="Lora" pitchFamily="2" charset="0"/>
+              </a:rPr>
+              <a:t> </a:t>
+            </a:r>
+            <a:r>
+              <a:rPr lang="ko-KR" altLang="ko-KR" sz="2800" b="1" cap="none" dirty="0" err="1">
+                <a:latin typeface="Lora" pitchFamily="2" charset="0"/>
+              </a:rPr>
+              <a:t>a</a:t>
+            </a:r>
+            <a:r>
+              <a:rPr lang="ko-KR" altLang="ko-KR" sz="2800" b="1" cap="none" dirty="0">
+                <a:latin typeface="Lora" pitchFamily="2" charset="0"/>
+              </a:rPr>
+              <a:t> Data </a:t>
+            </a:r>
+            <a:r>
+              <a:rPr lang="ko-KR" altLang="ko-KR" sz="2800" b="1" cap="none" dirty="0" err="1">
+                <a:latin typeface="Lora" pitchFamily="2" charset="0"/>
+              </a:rPr>
+              <a:t>Science</a:t>
+            </a:r>
+            <a:r>
+              <a:rPr lang="ko-KR" altLang="ko-KR" sz="2800" b="1" cap="none" dirty="0">
+                <a:latin typeface="Lora" pitchFamily="2" charset="0"/>
+              </a:rPr>
+              <a:t> Project</a:t>
+            </a:r>
+          </a:p>
+        </p:txBody>
+      </p:sp>
+      <p:sp>
+        <p:nvSpPr>
+          <p:cNvPr id="7" name="TextBox 6">
+            <a:extLst>
+              <a:ext uri="{FF2B5EF4-FFF2-40B4-BE49-F238E27FC236}">
+                <a16:creationId xmlns:a16="http://schemas.microsoft.com/office/drawing/2014/main" id="{14794F62-7060-F457-BB09-8CDFA2D7E7F4}"/>
+              </a:ext>
+            </a:extLst>
+          </p:cNvPr>
+          <p:cNvSpPr txBox="1"/>
+          <p:nvPr/>
+        </p:nvSpPr>
+        <p:spPr>
+          <a:xfrm>
+            <a:off x="2603137" y="6218823"/>
+            <a:ext cx="4033476" cy="307777"/>
+          </a:xfrm>
+          <a:prstGeom prst="rect">
+            <a:avLst/>
+          </a:prstGeom>
+          <a:noFill/>
+        </p:spPr>
+        <p:txBody>
+          <a:bodyPr wrap="none" rtlCol="0">
+            <a:spAutoFit/>
+          </a:bodyPr>
+          <a:lstStyle/>
+          <a:p>
+            <a:r>
+              <a:rPr lang="en-US" altLang="ko-KR" sz="1400" dirty="0">
+                <a:hlinkClick r:id="rId2"/>
+              </a:rPr>
+              <a:t>orchestrate-data-science-project-python-prefect</a:t>
+            </a:r>
+            <a:endParaRPr lang="ko-KR" altLang="en-US" sz="1400" dirty="0"/>
+          </a:p>
+        </p:txBody>
+      </p:sp>
+      <p:pic>
+        <p:nvPicPr>
+          <p:cNvPr id="8" name="그림 7" descr="Orchestrate a Data Science Project in Python With Prefect">
+            <a:extLst>
+              <a:ext uri="{FF2B5EF4-FFF2-40B4-BE49-F238E27FC236}">
+                <a16:creationId xmlns:a16="http://schemas.microsoft.com/office/drawing/2014/main" id="{BAB35102-7A6D-E82D-69A8-5728B64583F3}"/>
+              </a:ext>
+            </a:extLst>
+          </p:cNvPr>
+          <p:cNvPicPr>
+            <a:picLocks noChangeAspect="1"/>
+          </p:cNvPicPr>
+          <p:nvPr/>
+        </p:nvPicPr>
+        <p:blipFill>
+          <a:blip r:embed="rId3"/>
+          <a:stretch>
+            <a:fillRect/>
+          </a:stretch>
+        </p:blipFill>
+        <p:spPr>
+          <a:xfrm>
+            <a:off x="1779663" y="1667389"/>
+            <a:ext cx="6275173" cy="1184439"/>
+          </a:xfrm>
+          <a:prstGeom prst="rect">
+            <a:avLst/>
+          </a:prstGeom>
+        </p:spPr>
+      </p:pic>
+      <p:pic>
+        <p:nvPicPr>
+          <p:cNvPr id="10" name="그림 9" descr="Orchestrate a Data Science Project in Python With Prefect">
+            <a:extLst>
+              <a:ext uri="{FF2B5EF4-FFF2-40B4-BE49-F238E27FC236}">
+                <a16:creationId xmlns:a16="http://schemas.microsoft.com/office/drawing/2014/main" id="{B77324CF-0ED1-B05F-052A-B45F4768B9EA}"/>
+              </a:ext>
+            </a:extLst>
+          </p:cNvPr>
+          <p:cNvPicPr>
+            <a:picLocks noChangeAspect="1"/>
+          </p:cNvPicPr>
+          <p:nvPr/>
+        </p:nvPicPr>
+        <p:blipFill>
+          <a:blip r:embed="rId4"/>
+          <a:stretch>
+            <a:fillRect/>
+          </a:stretch>
+        </p:blipFill>
+        <p:spPr>
+          <a:xfrm>
+            <a:off x="1394365" y="3270796"/>
+            <a:ext cx="7045768" cy="2765465"/>
+          </a:xfrm>
+          <a:prstGeom prst="rect">
+            <a:avLst/>
+          </a:prstGeom>
+        </p:spPr>
+      </p:pic>
+    </p:spTree>
+    <p:extLst>
+      <p:ext uri="{BB962C8B-B14F-4D97-AF65-F5344CB8AC3E}">
+        <p14:creationId xmlns:p14="http://schemas.microsoft.com/office/powerpoint/2010/main" val="2172409989"/>
+      </p:ext>
+    </p:extLst>
+  </p:cSld>
+  <p:clrMapOvr>
+    <a:masterClrMapping/>
+  </p:clrMapOvr>
+  <p:timing>
+    <p:tnLst>
+      <p:par>
+        <p:cTn id="1" dur="indefinite" restart="never" nodeType="tmRoot">
+          <p:childTnLst>
+            <p:seq concurrent="1" nextAc="seek">
+              <p:cTn id="2" dur="indefinite" nodeType="mainSeq">
+                <p:childTnLst>
+                  <p:par>
+                    <p:cTn id="3" fill="hold">
+                      <p:stCondLst>
+                        <p:cond delay="indefinite"/>
+                      </p:stCondLst>
+                      <p:childTnLst>
+                        <p:par>
+                          <p:cTn id="4" fill="hold">
+                            <p:stCondLst>
+                              <p:cond delay="0"/>
+                            </p:stCondLst>
+                            <p:childTnLst>
+                              <p:par>
+                                <p:cTn id="5" presetID="1" presetClass="entr" presetSubtype="0" fill="hold" nodeType="clickEffect">
+                                  <p:stCondLst>
+                                    <p:cond delay="0"/>
+                                  </p:stCondLst>
+                                  <p:childTnLst>
+                                    <p:set>
+                                      <p:cBhvr>
+                                        <p:cTn id="6" dur="1" fill="hold">
+                                          <p:stCondLst>
+                                            <p:cond delay="0"/>
+                                          </p:stCondLst>
+                                        </p:cTn>
+                                        <p:tgtEl>
+                                          <p:spTgt spid="10"/>
+                                        </p:tgtEl>
+                                        <p:attrNameLst>
+                                          <p:attrName>style.visibility</p:attrName>
+                                        </p:attrNameLst>
+                                      </p:cBhvr>
+                                      <p:to>
+                                        <p:strVal val="visible"/>
+                                      </p:to>
+                                    </p:set>
+                                  </p:childTnLst>
+                                </p:cTn>
+                              </p:par>
+                            </p:childTnLst>
+                          </p:cTn>
+                        </p:par>
+                      </p:childTnLst>
+                    </p:cTn>
+                  </p:par>
+                </p:childTnLst>
+              </p:cTn>
+              <p:prevCondLst>
+                <p:cond evt="onPrev" delay="0">
+                  <p:tgtEl>
+                    <p:sldTgt/>
+                  </p:tgtEl>
+                </p:cond>
+              </p:prevCondLst>
+              <p:nextCondLst>
+                <p:cond evt="onNext" delay="0">
+                  <p:tgtEl>
+                    <p:sldTgt/>
+                  </p:tgtEl>
+                </p:cond>
+              </p:nextCondLst>
+            </p:seq>
+          </p:childTnLst>
+        </p:cTn>
+      </p:par>
+    </p:tnLst>
+  </p:timing>
+</p:sld>
+</file>
+
+<file path=ppt/slides/slide6.xml><?xml version="1.0" encoding="utf-8"?>
+<p:sld xmlns:a="http://schemas.openxmlformats.org/drawingml/2006/main" xmlns:r="http://schemas.openxmlformats.org/officeDocument/2006/relationships" xmlns:p="http://schemas.openxmlformats.org/presentationml/2006/main">
+  <p:cSld>
+    <p:spTree>
+      <p:nvGrpSpPr>
+        <p:cNvPr id="1" name="">
+          <a:extLst>
+            <a:ext uri="{FF2B5EF4-FFF2-40B4-BE49-F238E27FC236}">
+              <a16:creationId xmlns:a16="http://schemas.microsoft.com/office/drawing/2014/main" id="{815B4C47-E289-8753-9E79-FF183A3C2561}"/>
+            </a:ext>
+          </a:extLst>
+        </p:cNvPr>
+        <p:cNvGrpSpPr/>
+        <p:nvPr/>
+      </p:nvGrpSpPr>
+      <p:grpSpPr>
+        <a:xfrm>
+          <a:off x="0" y="0"/>
+          <a:ext cx="0" cy="0"/>
+          <a:chOff x="0" y="0"/>
+          <a:chExt cx="0" cy="0"/>
+        </a:xfrm>
+      </p:grpSpPr>
+      <p:sp>
+        <p:nvSpPr>
+          <p:cNvPr id="4" name="슬라이드 번호 개체 틀 3">
+            <a:extLst>
+              <a:ext uri="{FF2B5EF4-FFF2-40B4-BE49-F238E27FC236}">
+                <a16:creationId xmlns:a16="http://schemas.microsoft.com/office/drawing/2014/main" id="{104B04ED-2915-0FD5-7414-0117E08E876E}"/>
+              </a:ext>
+            </a:extLst>
+          </p:cNvPr>
+          <p:cNvSpPr>
+            <a:spLocks noGrp="1"/>
+          </p:cNvSpPr>
+          <p:nvPr>
+            <p:ph type="sldNum" sz="quarter" idx="12"/>
+          </p:nvPr>
+        </p:nvSpPr>
+        <p:spPr>
+          <a:xfrm>
+            <a:off x="10514011" y="6036261"/>
+            <a:ext cx="753545" cy="365125"/>
+          </a:xfrm>
+        </p:spPr>
+        <p:txBody>
+          <a:bodyPr/>
+          <a:lstStyle/>
+          <a:p>
+            <a:fld id="{D57F1E4F-1CFF-5643-939E-217C01CDF565}" type="slidenum">
+              <a:rPr lang="en-US" smtClean="0"/>
+              <a:pPr/>
+              <a:t>6</a:t>
+            </a:fld>
+            <a:endParaRPr lang="en-US" dirty="0"/>
+          </a:p>
+        </p:txBody>
+      </p:sp>
+      <p:sp>
+        <p:nvSpPr>
+          <p:cNvPr id="3" name="제목 1">
+            <a:extLst>
+              <a:ext uri="{FF2B5EF4-FFF2-40B4-BE49-F238E27FC236}">
+                <a16:creationId xmlns:a16="http://schemas.microsoft.com/office/drawing/2014/main" id="{C03C99A5-46C6-9651-2516-907CE520EF2A}"/>
+              </a:ext>
+            </a:extLst>
+          </p:cNvPr>
+          <p:cNvSpPr txBox="1">
+            <a:spLocks/>
+          </p:cNvSpPr>
+          <p:nvPr/>
+        </p:nvSpPr>
+        <p:spPr>
+          <a:xfrm>
+            <a:off x="475645" y="481983"/>
+            <a:ext cx="10353762" cy="766439"/>
+          </a:xfrm>
+          <a:prstGeom prst="rect">
+            <a:avLst/>
+          </a:prstGeom>
+        </p:spPr>
+        <p:txBody>
+          <a:bodyPr vert="horz" lIns="91440" tIns="45720" rIns="91440" bIns="45720" rtlCol="0" anchor="ctr">
+            <a:normAutofit/>
+          </a:bodyPr>
+          <a:lstStyle>
+            <a:lvl1pPr algn="ctr" defTabSz="914400" rtl="0" eaLnBrk="1" latinLnBrk="1" hangingPunct="1">
+              <a:lnSpc>
+                <a:spcPct val="90000"/>
+              </a:lnSpc>
+              <a:spcBef>
+                <a:spcPct val="0"/>
+              </a:spcBef>
+              <a:buNone/>
+              <a:defRPr sz="3200" kern="1200" cap="all" baseline="0">
+                <a:solidFill>
+                  <a:schemeClr val="tx1"/>
+                </a:solidFill>
+                <a:effectLst/>
+                <a:latin typeface="Batang" panose="02030600000101010101" pitchFamily="18" charset="-127"/>
+                <a:ea typeface="Batang" panose="02030600000101010101" pitchFamily="18" charset="-127"/>
+                <a:cs typeface="+mj-cs"/>
+              </a:defRPr>
+            </a:lvl1pPr>
+          </a:lstStyle>
+          <a:p>
+            <a:pPr algn="l"/>
+            <a:r>
+              <a:rPr lang="ko-KR" altLang="ko-KR" sz="2800" b="1" cap="none" dirty="0" err="1">
+                <a:latin typeface="Lora" pitchFamily="2" charset="0"/>
+              </a:rPr>
+              <a:t>Orchestrate</a:t>
+            </a:r>
+            <a:r>
+              <a:rPr lang="ko-KR" altLang="ko-KR" sz="2800" b="1" cap="none" dirty="0">
+                <a:latin typeface="Lora" pitchFamily="2" charset="0"/>
+              </a:rPr>
+              <a:t> </a:t>
+            </a:r>
+            <a:r>
+              <a:rPr lang="ko-KR" altLang="ko-KR" sz="2800" b="1" cap="none" dirty="0" err="1">
+                <a:latin typeface="Lora" pitchFamily="2" charset="0"/>
+              </a:rPr>
+              <a:t>a</a:t>
+            </a:r>
+            <a:r>
+              <a:rPr lang="ko-KR" altLang="ko-KR" sz="2800" b="1" cap="none" dirty="0">
+                <a:latin typeface="Lora" pitchFamily="2" charset="0"/>
+              </a:rPr>
+              <a:t> Data </a:t>
+            </a:r>
+            <a:r>
+              <a:rPr lang="ko-KR" altLang="ko-KR" sz="2800" b="1" cap="none" dirty="0" err="1">
+                <a:latin typeface="Lora" pitchFamily="2" charset="0"/>
+              </a:rPr>
+              <a:t>Science</a:t>
+            </a:r>
+            <a:r>
+              <a:rPr lang="ko-KR" altLang="ko-KR" sz="2800" b="1" cap="none" dirty="0">
+                <a:latin typeface="Lora" pitchFamily="2" charset="0"/>
+              </a:rPr>
+              <a:t> Project</a:t>
+            </a:r>
+          </a:p>
+        </p:txBody>
+      </p:sp>
+      <p:sp>
+        <p:nvSpPr>
+          <p:cNvPr id="7" name="TextBox 6">
+            <a:extLst>
+              <a:ext uri="{FF2B5EF4-FFF2-40B4-BE49-F238E27FC236}">
+                <a16:creationId xmlns:a16="http://schemas.microsoft.com/office/drawing/2014/main" id="{51E8E2FE-2764-8001-2A80-04D659F82C39}"/>
+              </a:ext>
+            </a:extLst>
+          </p:cNvPr>
+          <p:cNvSpPr txBox="1"/>
+          <p:nvPr/>
+        </p:nvSpPr>
+        <p:spPr>
+          <a:xfrm>
+            <a:off x="2603137" y="6218823"/>
+            <a:ext cx="4033476" cy="307777"/>
+          </a:xfrm>
+          <a:prstGeom prst="rect">
+            <a:avLst/>
+          </a:prstGeom>
+          <a:noFill/>
+        </p:spPr>
+        <p:txBody>
+          <a:bodyPr wrap="none" rtlCol="0">
+            <a:spAutoFit/>
+          </a:bodyPr>
+          <a:lstStyle/>
+          <a:p>
+            <a:r>
+              <a:rPr lang="en-US" altLang="ko-KR" sz="1400" dirty="0">
+                <a:hlinkClick r:id="rId2"/>
+              </a:rPr>
+              <a:t>orchestrate-data-science-project-python-prefect</a:t>
+            </a:r>
+            <a:endParaRPr lang="ko-KR" altLang="en-US" sz="1400" dirty="0"/>
+          </a:p>
+        </p:txBody>
+      </p:sp>
+      <p:pic>
+        <p:nvPicPr>
+          <p:cNvPr id="9" name="그림 8" descr="Orchestrate a Data Science Project in Python With Prefect">
+            <a:extLst>
+              <a:ext uri="{FF2B5EF4-FFF2-40B4-BE49-F238E27FC236}">
+                <a16:creationId xmlns:a16="http://schemas.microsoft.com/office/drawing/2014/main" id="{E563AFD1-D0F5-B00F-188C-A316F685F6EE}"/>
+              </a:ext>
+            </a:extLst>
+          </p:cNvPr>
+          <p:cNvPicPr>
+            <a:picLocks noChangeAspect="1"/>
+          </p:cNvPicPr>
+          <p:nvPr/>
+        </p:nvPicPr>
+        <p:blipFill>
+          <a:blip r:embed="rId3"/>
+          <a:stretch>
+            <a:fillRect/>
+          </a:stretch>
+        </p:blipFill>
+        <p:spPr>
+          <a:xfrm>
+            <a:off x="720247" y="2421937"/>
+            <a:ext cx="5354461" cy="2724082"/>
+          </a:xfrm>
+          <a:prstGeom prst="rect">
+            <a:avLst/>
+          </a:prstGeom>
+        </p:spPr>
+      </p:pic>
+      <p:pic>
+        <p:nvPicPr>
+          <p:cNvPr id="2" name="그림 1" descr="Orchestrate a Data Science Project in Python With Prefect">
+            <a:extLst>
+              <a:ext uri="{FF2B5EF4-FFF2-40B4-BE49-F238E27FC236}">
+                <a16:creationId xmlns:a16="http://schemas.microsoft.com/office/drawing/2014/main" id="{5C84935F-2D7D-69FA-59BE-E2D260932946}"/>
+              </a:ext>
+            </a:extLst>
+          </p:cNvPr>
+          <p:cNvPicPr>
+            <a:picLocks noChangeAspect="1"/>
+          </p:cNvPicPr>
+          <p:nvPr/>
+        </p:nvPicPr>
+        <p:blipFill>
+          <a:blip r:embed="rId4"/>
+          <a:stretch>
+            <a:fillRect/>
+          </a:stretch>
+        </p:blipFill>
+        <p:spPr>
+          <a:xfrm>
+            <a:off x="6435421" y="1773032"/>
+            <a:ext cx="5350179" cy="4052761"/>
+          </a:xfrm>
+          <a:prstGeom prst="rect">
+            <a:avLst/>
+          </a:prstGeom>
+        </p:spPr>
+      </p:pic>
+    </p:spTree>
+    <p:extLst>
+      <p:ext uri="{BB962C8B-B14F-4D97-AF65-F5344CB8AC3E}">
+        <p14:creationId xmlns:p14="http://schemas.microsoft.com/office/powerpoint/2010/main" val="2553823816"/>
+      </p:ext>
+    </p:extLst>
+  </p:cSld>
+  <p:clrMapOvr>
+    <a:masterClrMapping/>
+  </p:clrMapOvr>
+  <p:timing>
+    <p:tnLst>
+      <p:par>
+        <p:cTn id="1" dur="indefinite" restart="never" nodeType="tmRoot">
+          <p:childTnLst>
+            <p:seq concurrent="1" nextAc="seek">
+              <p:cTn id="2" dur="indefinite" nodeType="mainSeq">
+                <p:childTnLst>
+                  <p:par>
+                    <p:cTn id="3" fill="hold">
+                      <p:stCondLst>
+                        <p:cond delay="indefinite"/>
+                      </p:stCondLst>
+                      <p:childTnLst>
+                        <p:par>
+                          <p:cTn id="4" fill="hold">
+                            <p:stCondLst>
+                              <p:cond delay="0"/>
+                            </p:stCondLst>
+                            <p:childTnLst>
+                              <p:par>
+                                <p:cTn id="5" presetID="1" presetClass="entr" presetSubtype="0" fill="hold" nodeType="clickEffect">
+                                  <p:stCondLst>
+                                    <p:cond delay="0"/>
+                                  </p:stCondLst>
+                                  <p:childTnLst>
+                                    <p:set>
+                                      <p:cBhvr>
+                                        <p:cTn id="6" dur="1" fill="hold">
+                                          <p:stCondLst>
+                                            <p:cond delay="0"/>
+                                          </p:stCondLst>
+                                        </p:cTn>
+                                        <p:tgtEl>
+                                          <p:spTgt spid="2"/>
+                                        </p:tgtEl>
+                                        <p:attrNameLst>
+                                          <p:attrName>style.visibility</p:attrName>
+                                        </p:attrNameLst>
+                                      </p:cBhvr>
+                                      <p:to>
+                                        <p:strVal val="visible"/>
+                                      </p:to>
+                                    </p:set>
+                                  </p:childTnLst>
+                                </p:cTn>
+                              </p:par>
+                            </p:childTnLst>
+                          </p:cTn>
+                        </p:par>
+                      </p:childTnLst>
+                    </p:cTn>
+                  </p:par>
+                </p:childTnLst>
+              </p:cTn>
+              <p:prevCondLst>
+                <p:cond evt="onPrev" delay="0">
+                  <p:tgtEl>
+                    <p:sldTgt/>
+                  </p:tgtEl>
+                </p:cond>
+              </p:prevCondLst>
+              <p:nextCondLst>
+                <p:cond evt="onNext" delay="0">
+                  <p:tgtEl>
+                    <p:sldTgt/>
+                  </p:tgtEl>
+                </p:cond>
+              </p:nextCondLst>
+            </p:seq>
+          </p:childTnLst>
+        </p:cTn>
+      </p:par>
+    </p:tnLst>
+  </p:timing>
+</p:sld>
+</file>
+
+<file path=ppt/slides/slide7.xml><?xml version="1.0" encoding="utf-8"?>
+<p:sld xmlns:a="http://schemas.openxmlformats.org/drawingml/2006/main" xmlns:r="http://schemas.openxmlformats.org/officeDocument/2006/relationships" xmlns:p="http://schemas.openxmlformats.org/presentationml/2006/main">
+  <p:cSld>
+    <p:spTree>
+      <p:nvGrpSpPr>
+        <p:cNvPr id="1" name="">
+          <a:extLst>
+            <a:ext uri="{FF2B5EF4-FFF2-40B4-BE49-F238E27FC236}">
+              <a16:creationId xmlns:a16="http://schemas.microsoft.com/office/drawing/2014/main" id="{18E35B68-13BC-82A8-E69A-EBF636861518}"/>
+            </a:ext>
+          </a:extLst>
+        </p:cNvPr>
+        <p:cNvGrpSpPr/>
+        <p:nvPr/>
+      </p:nvGrpSpPr>
+      <p:grpSpPr>
+        <a:xfrm>
+          <a:off x="0" y="0"/>
+          <a:ext cx="0" cy="0"/>
+          <a:chOff x="0" y="0"/>
+          <a:chExt cx="0" cy="0"/>
+        </a:xfrm>
+      </p:grpSpPr>
+      <p:sp>
+        <p:nvSpPr>
+          <p:cNvPr id="4" name="슬라이드 번호 개체 틀 3">
+            <a:extLst>
+              <a:ext uri="{FF2B5EF4-FFF2-40B4-BE49-F238E27FC236}">
+                <a16:creationId xmlns:a16="http://schemas.microsoft.com/office/drawing/2014/main" id="{A002455A-6684-4AFE-7F70-D243495C940B}"/>
+              </a:ext>
+            </a:extLst>
+          </p:cNvPr>
+          <p:cNvSpPr>
+            <a:spLocks noGrp="1"/>
+          </p:cNvSpPr>
+          <p:nvPr>
+            <p:ph type="sldNum" sz="quarter" idx="12"/>
+          </p:nvPr>
+        </p:nvSpPr>
+        <p:spPr>
+          <a:xfrm>
+            <a:off x="10514011" y="6036261"/>
+            <a:ext cx="753545" cy="365125"/>
+          </a:xfrm>
+        </p:spPr>
+        <p:txBody>
+          <a:bodyPr/>
+          <a:lstStyle/>
+          <a:p>
+            <a:fld id="{D57F1E4F-1CFF-5643-939E-217C01CDF565}" type="slidenum">
+              <a:rPr lang="en-US" smtClean="0"/>
+              <a:pPr/>
+              <a:t>7</a:t>
+            </a:fld>
+            <a:endParaRPr lang="en-US" dirty="0"/>
+          </a:p>
+        </p:txBody>
+      </p:sp>
+      <p:sp>
+        <p:nvSpPr>
+          <p:cNvPr id="3" name="제목 1">
+            <a:extLst>
+              <a:ext uri="{FF2B5EF4-FFF2-40B4-BE49-F238E27FC236}">
+                <a16:creationId xmlns:a16="http://schemas.microsoft.com/office/drawing/2014/main" id="{1F394978-3A88-4C9F-19C4-6B402CF98A01}"/>
+              </a:ext>
+            </a:extLst>
+          </p:cNvPr>
+          <p:cNvSpPr txBox="1">
+            <a:spLocks/>
+          </p:cNvSpPr>
+          <p:nvPr/>
+        </p:nvSpPr>
+        <p:spPr>
+          <a:xfrm>
+            <a:off x="475645" y="481983"/>
+            <a:ext cx="10353762" cy="766439"/>
+          </a:xfrm>
+          <a:prstGeom prst="rect">
+            <a:avLst/>
+          </a:prstGeom>
+        </p:spPr>
+        <p:txBody>
+          <a:bodyPr vert="horz" lIns="91440" tIns="45720" rIns="91440" bIns="45720" rtlCol="0" anchor="ctr">
+            <a:normAutofit/>
+          </a:bodyPr>
+          <a:lstStyle>
+            <a:lvl1pPr algn="ctr" defTabSz="914400" rtl="0" eaLnBrk="1" latinLnBrk="1" hangingPunct="1">
+              <a:lnSpc>
+                <a:spcPct val="90000"/>
+              </a:lnSpc>
+              <a:spcBef>
+                <a:spcPct val="0"/>
+              </a:spcBef>
+              <a:buNone/>
+              <a:defRPr sz="3200" kern="1200" cap="all" baseline="0">
+                <a:solidFill>
+                  <a:schemeClr val="tx1"/>
+                </a:solidFill>
+                <a:effectLst/>
+                <a:latin typeface="Batang" panose="02030600000101010101" pitchFamily="18" charset="-127"/>
+                <a:ea typeface="Batang" panose="02030600000101010101" pitchFamily="18" charset="-127"/>
+                <a:cs typeface="+mj-cs"/>
+              </a:defRPr>
+            </a:lvl1pPr>
+          </a:lstStyle>
+          <a:p>
+            <a:pPr algn="l"/>
+            <a:r>
+              <a:rPr lang="en-US" altLang="ko-KR" sz="2800" b="1" cap="none" dirty="0">
+                <a:latin typeface="Lora" pitchFamily="2" charset="0"/>
+              </a:rPr>
+              <a:t>Practice 01_machine learning with titanic </a:t>
+            </a:r>
+            <a:endParaRPr lang="ko-KR" altLang="ko-KR" sz="2800" b="1" cap="none" dirty="0">
+              <a:latin typeface="Lora" pitchFamily="2" charset="0"/>
+            </a:endParaRPr>
+          </a:p>
+        </p:txBody>
+      </p:sp>
+      <p:sp>
+        <p:nvSpPr>
+          <p:cNvPr id="6" name="TextBox 5">
+            <a:extLst>
+              <a:ext uri="{FF2B5EF4-FFF2-40B4-BE49-F238E27FC236}">
+                <a16:creationId xmlns:a16="http://schemas.microsoft.com/office/drawing/2014/main" id="{2EE5E77B-3B3E-CE13-A28F-177623F536B2}"/>
+              </a:ext>
+            </a:extLst>
+          </p:cNvPr>
+          <p:cNvSpPr txBox="1"/>
+          <p:nvPr/>
+        </p:nvSpPr>
+        <p:spPr>
+          <a:xfrm>
+            <a:off x="740527" y="1631367"/>
+            <a:ext cx="10088880" cy="1200329"/>
+          </a:xfrm>
+          <a:prstGeom prst="rect">
+            <a:avLst/>
+          </a:prstGeom>
+          <a:noFill/>
+        </p:spPr>
+        <p:txBody>
+          <a:bodyPr wrap="square">
+            <a:spAutoFit/>
+          </a:bodyPr>
+          <a:lstStyle/>
+          <a:p>
+            <a:pPr marL="342900" indent="-342900" rtl="0">
+              <a:buFont typeface="Wingdings" panose="05000000000000000000" pitchFamily="2" charset="2"/>
+              <a:buChar char="v"/>
+            </a:pPr>
+            <a:r>
+              <a:rPr lang="en-US" altLang="ko-KR" sz="2400" b="0" dirty="0">
+                <a:effectLst/>
+                <a:latin typeface="D2Coding" panose="020B0609020101020101" pitchFamily="49" charset="-127"/>
+                <a:ea typeface="D2Coding" panose="020B0609020101020101" pitchFamily="49" charset="-127"/>
+              </a:rPr>
+              <a:t>Python class</a:t>
+            </a:r>
+            <a:r>
+              <a:rPr lang="ko-KR" altLang="en-US" sz="2400" b="0" dirty="0">
+                <a:effectLst/>
+                <a:latin typeface="D2Coding" panose="020B0609020101020101" pitchFamily="49" charset="-127"/>
+                <a:ea typeface="D2Coding" panose="020B0609020101020101" pitchFamily="49" charset="-127"/>
+              </a:rPr>
+              <a:t> </a:t>
+            </a:r>
+            <a:endParaRPr lang="en-US" altLang="ko-KR" sz="2400" b="0" dirty="0">
+              <a:effectLst/>
+              <a:latin typeface="D2Coding" panose="020B0609020101020101" pitchFamily="49" charset="-127"/>
+              <a:ea typeface="D2Coding" panose="020B0609020101020101" pitchFamily="49" charset="-127"/>
+            </a:endParaRPr>
+          </a:p>
+          <a:p>
+            <a:pPr marL="342900" indent="-342900" rtl="0">
+              <a:buFont typeface="Wingdings" panose="05000000000000000000" pitchFamily="2" charset="2"/>
+              <a:buChar char="v"/>
+            </a:pPr>
+            <a:endParaRPr lang="en-US" altLang="ko-KR" sz="2400" dirty="0">
+              <a:latin typeface="D2Coding" panose="020B0609020101020101" pitchFamily="49" charset="-127"/>
+              <a:ea typeface="D2Coding" panose="020B0609020101020101" pitchFamily="49" charset="-127"/>
+            </a:endParaRPr>
+          </a:p>
+          <a:p>
+            <a:pPr marL="342900" indent="-342900" rtl="0">
+              <a:buFont typeface="Wingdings" panose="05000000000000000000" pitchFamily="2" charset="2"/>
+              <a:buChar char="v"/>
+            </a:pPr>
+            <a:r>
+              <a:rPr lang="en-US" altLang="ko-KR" sz="2400" b="0" dirty="0">
+                <a:effectLst/>
+                <a:latin typeface="D2Coding" panose="020B0609020101020101" pitchFamily="49" charset="-127"/>
+                <a:ea typeface="D2Coding" panose="020B0609020101020101" pitchFamily="49" charset="-127"/>
+              </a:rPr>
+              <a:t>Prefect</a:t>
+            </a:r>
+          </a:p>
+        </p:txBody>
+      </p:sp>
+      <p:sp>
+        <p:nvSpPr>
+          <p:cNvPr id="10" name="화살표: 줄무늬가 있는 오른쪽 9">
+            <a:extLst>
+              <a:ext uri="{FF2B5EF4-FFF2-40B4-BE49-F238E27FC236}">
+                <a16:creationId xmlns:a16="http://schemas.microsoft.com/office/drawing/2014/main" id="{2059E3DA-7196-C207-109D-6D0F9F2D9E1C}"/>
+              </a:ext>
+            </a:extLst>
+          </p:cNvPr>
+          <p:cNvSpPr/>
+          <p:nvPr/>
+        </p:nvSpPr>
+        <p:spPr>
+          <a:xfrm>
+            <a:off x="4821382" y="1880351"/>
+            <a:ext cx="1505527" cy="951345"/>
+          </a:xfrm>
+          <a:prstGeom prst="stripedRightArrow">
+            <a:avLst>
+              <a:gd name="adj1" fmla="val 73301"/>
+              <a:gd name="adj2" fmla="val 50000"/>
+            </a:avLst>
+          </a:prstGeom>
+        </p:spPr>
+        <p:style>
+          <a:lnRef idx="2">
+            <a:schemeClr val="accent1">
+              <a:shade val="15000"/>
+            </a:schemeClr>
+          </a:lnRef>
+          <a:fillRef idx="1">
+            <a:schemeClr val="accent1"/>
+          </a:fillRef>
+          <a:effectRef idx="0">
+            <a:schemeClr val="accent1"/>
+          </a:effectRef>
+          <a:fontRef idx="minor">
+            <a:schemeClr val="lt1"/>
+          </a:fontRef>
+        </p:style>
+        <p:txBody>
+          <a:bodyPr rtlCol="0" anchor="ctr"/>
+          <a:lstStyle/>
+          <a:p>
+            <a:pPr algn="ctr"/>
+            <a:r>
+              <a:rPr lang="en-US" altLang="ko-KR"/>
+              <a:t>App </a:t>
+            </a:r>
+            <a:r>
+              <a:rPr lang="ko-KR" altLang="en-US" dirty="0"/>
+              <a:t>서비스</a:t>
+            </a:r>
+          </a:p>
+        </p:txBody>
+      </p:sp>
+    </p:spTree>
+    <p:extLst>
+      <p:ext uri="{BB962C8B-B14F-4D97-AF65-F5344CB8AC3E}">
+        <p14:creationId xmlns:p14="http://schemas.microsoft.com/office/powerpoint/2010/main" val="1710055029"/>
+      </p:ext>
+    </p:extLst>
+  </p:cSld>
+  <p:clrMapOvr>
+    <a:masterClrMapping/>
+  </p:clrMapOvr>
+</p:sld>
+</file>
+
+<file path=ppt/slides/slide8.xml><?xml version="1.0" encoding="utf-8"?>
+<p:sld xmlns:a="http://schemas.openxmlformats.org/drawingml/2006/main" xmlns:r="http://schemas.openxmlformats.org/officeDocument/2006/relationships" xmlns:p="http://schemas.openxmlformats.org/presentationml/2006/main">
+  <p:cSld>
+    <p:spTree>
+      <p:nvGrpSpPr>
+        <p:cNvPr id="1" name="">
+          <a:extLst>
+            <a:ext uri="{FF2B5EF4-FFF2-40B4-BE49-F238E27FC236}">
+              <a16:creationId xmlns:a16="http://schemas.microsoft.com/office/drawing/2014/main" id="{CD00C043-592A-2E99-7E0D-D54383D0FB39}"/>
+            </a:ext>
+          </a:extLst>
+        </p:cNvPr>
+        <p:cNvGrpSpPr/>
+        <p:nvPr/>
+      </p:nvGrpSpPr>
+      <p:grpSpPr>
+        <a:xfrm>
+          <a:off x="0" y="0"/>
+          <a:ext cx="0" cy="0"/>
+          <a:chOff x="0" y="0"/>
+          <a:chExt cx="0" cy="0"/>
+        </a:xfrm>
+      </p:grpSpPr>
+      <p:sp>
+        <p:nvSpPr>
+          <p:cNvPr id="4" name="슬라이드 번호 개체 틀 3">
+            <a:extLst>
+              <a:ext uri="{FF2B5EF4-FFF2-40B4-BE49-F238E27FC236}">
+                <a16:creationId xmlns:a16="http://schemas.microsoft.com/office/drawing/2014/main" id="{0C073CB0-67E7-D82B-8262-4CA760ECA040}"/>
+              </a:ext>
+            </a:extLst>
+          </p:cNvPr>
+          <p:cNvSpPr>
+            <a:spLocks noGrp="1"/>
+          </p:cNvSpPr>
+          <p:nvPr>
+            <p:ph type="sldNum" sz="quarter" idx="12"/>
+          </p:nvPr>
+        </p:nvSpPr>
+        <p:spPr>
+          <a:xfrm>
+            <a:off x="10514011" y="6036261"/>
+            <a:ext cx="753545" cy="365125"/>
+          </a:xfrm>
+        </p:spPr>
+        <p:txBody>
+          <a:bodyPr/>
+          <a:lstStyle/>
+          <a:p>
+            <a:fld id="{D57F1E4F-1CFF-5643-939E-217C01CDF565}" type="slidenum">
+              <a:rPr lang="en-US" smtClean="0"/>
+              <a:pPr/>
+              <a:t>8</a:t>
+            </a:fld>
+            <a:endParaRPr lang="en-US" dirty="0"/>
+          </a:p>
+        </p:txBody>
+      </p:sp>
+      <p:sp>
+        <p:nvSpPr>
+          <p:cNvPr id="3" name="제목 1">
+            <a:extLst>
+              <a:ext uri="{FF2B5EF4-FFF2-40B4-BE49-F238E27FC236}">
+                <a16:creationId xmlns:a16="http://schemas.microsoft.com/office/drawing/2014/main" id="{98B3C53D-7F15-DA3B-1BAA-B069AC28F29D}"/>
+              </a:ext>
+            </a:extLst>
+          </p:cNvPr>
+          <p:cNvSpPr txBox="1">
+            <a:spLocks/>
+          </p:cNvSpPr>
+          <p:nvPr/>
+        </p:nvSpPr>
+        <p:spPr>
+          <a:xfrm>
+            <a:off x="475645" y="481983"/>
+            <a:ext cx="10353762" cy="766439"/>
+          </a:xfrm>
+          <a:prstGeom prst="rect">
+            <a:avLst/>
+          </a:prstGeom>
+        </p:spPr>
+        <p:txBody>
+          <a:bodyPr vert="horz" lIns="91440" tIns="45720" rIns="91440" bIns="45720" rtlCol="0" anchor="ctr">
+            <a:normAutofit/>
+          </a:bodyPr>
+          <a:lstStyle>
+            <a:lvl1pPr algn="ctr" defTabSz="914400" rtl="0" eaLnBrk="1" latinLnBrk="1" hangingPunct="1">
+              <a:lnSpc>
+                <a:spcPct val="90000"/>
+              </a:lnSpc>
+              <a:spcBef>
+                <a:spcPct val="0"/>
+              </a:spcBef>
+              <a:buNone/>
+              <a:defRPr sz="3200" kern="1200" cap="all" baseline="0">
+                <a:solidFill>
+                  <a:schemeClr val="tx1"/>
+                </a:solidFill>
+                <a:effectLst/>
+                <a:latin typeface="Batang" panose="02030600000101010101" pitchFamily="18" charset="-127"/>
+                <a:ea typeface="Batang" panose="02030600000101010101" pitchFamily="18" charset="-127"/>
+                <a:cs typeface="+mj-cs"/>
+              </a:defRPr>
+            </a:lvl1pPr>
+          </a:lstStyle>
+          <a:p>
+            <a:pPr algn="l"/>
+            <a:r>
+              <a:rPr lang="en-US" altLang="ko-KR" sz="2800" b="1" cap="none" dirty="0">
+                <a:latin typeface="Lora" pitchFamily="2" charset="0"/>
+              </a:rPr>
+              <a:t>Prefect</a:t>
+            </a:r>
+            <a:endParaRPr lang="ko-KR" altLang="ko-KR" sz="2800" b="1" cap="none" dirty="0">
+              <a:latin typeface="Lora" pitchFamily="2" charset="0"/>
+            </a:endParaRPr>
+          </a:p>
+        </p:txBody>
+      </p:sp>
+      <p:sp>
+        <p:nvSpPr>
+          <p:cNvPr id="5" name="TextBox 4">
+            <a:extLst>
+              <a:ext uri="{FF2B5EF4-FFF2-40B4-BE49-F238E27FC236}">
+                <a16:creationId xmlns:a16="http://schemas.microsoft.com/office/drawing/2014/main" id="{7B952649-E635-4700-C7D2-B79C5D7E23D2}"/>
+              </a:ext>
+            </a:extLst>
+          </p:cNvPr>
+          <p:cNvSpPr txBox="1"/>
+          <p:nvPr/>
+        </p:nvSpPr>
+        <p:spPr>
+          <a:xfrm>
+            <a:off x="558800" y="3429000"/>
+            <a:ext cx="6096000" cy="369332"/>
+          </a:xfrm>
+          <a:prstGeom prst="rect">
+            <a:avLst/>
+          </a:prstGeom>
+          <a:noFill/>
+        </p:spPr>
+        <p:txBody>
+          <a:bodyPr wrap="square">
+            <a:spAutoFit/>
+          </a:bodyPr>
+          <a:lstStyle/>
+          <a:p>
+            <a:r>
+              <a:rPr lang="en-US" altLang="ko-KR" dirty="0">
+                <a:hlinkClick r:id="rId2"/>
+              </a:rPr>
+              <a:t>Prefect </a:t>
+            </a:r>
+            <a:r>
+              <a:rPr lang="ko-KR" altLang="en-US" dirty="0">
+                <a:hlinkClick r:id="rId2"/>
+              </a:rPr>
+              <a:t>기초부터 활용까지</a:t>
+            </a:r>
+            <a:endParaRPr lang="ko-KR" altLang="en-US" dirty="0"/>
+          </a:p>
+        </p:txBody>
+      </p:sp>
+      <p:sp>
+        <p:nvSpPr>
+          <p:cNvPr id="8" name="TextBox 7">
+            <a:extLst>
+              <a:ext uri="{FF2B5EF4-FFF2-40B4-BE49-F238E27FC236}">
+                <a16:creationId xmlns:a16="http://schemas.microsoft.com/office/drawing/2014/main" id="{1D311371-C738-6A0C-383F-4B47728C184F}"/>
+              </a:ext>
+            </a:extLst>
+          </p:cNvPr>
+          <p:cNvSpPr txBox="1"/>
+          <p:nvPr/>
+        </p:nvSpPr>
+        <p:spPr>
+          <a:xfrm>
+            <a:off x="558800" y="1248422"/>
+            <a:ext cx="11074400" cy="1881669"/>
+          </a:xfrm>
+          <a:prstGeom prst="rect">
+            <a:avLst/>
+          </a:prstGeom>
+          <a:noFill/>
+        </p:spPr>
+        <p:txBody>
+          <a:bodyPr wrap="square">
+            <a:spAutoFit/>
+          </a:bodyPr>
+          <a:lstStyle/>
+          <a:p>
+            <a:pPr marL="342900" indent="-342900">
+              <a:lnSpc>
+                <a:spcPct val="150000"/>
+              </a:lnSpc>
+              <a:buFont typeface="Wingdings" panose="05000000000000000000" pitchFamily="2" charset="2"/>
+              <a:buChar char="v"/>
+            </a:pPr>
+            <a:r>
+              <a:rPr lang="ko-KR" altLang="ko-KR" sz="2000" dirty="0" err="1">
+                <a:latin typeface="+mj-ea"/>
+                <a:ea typeface="+mj-ea"/>
+              </a:rPr>
+              <a:t>Orchestrate</a:t>
+            </a:r>
+            <a:r>
+              <a:rPr lang="ko-KR" altLang="ko-KR" sz="2000" dirty="0">
+                <a:latin typeface="+mj-ea"/>
+                <a:ea typeface="+mj-ea"/>
+              </a:rPr>
+              <a:t> </a:t>
+            </a:r>
+            <a:r>
+              <a:rPr lang="ko-KR" altLang="ko-KR" sz="2000" dirty="0" err="1">
+                <a:latin typeface="+mj-ea"/>
+                <a:ea typeface="+mj-ea"/>
+              </a:rPr>
+              <a:t>workflows</a:t>
+            </a:r>
+            <a:r>
+              <a:rPr lang="ko-KR" altLang="ko-KR" sz="2000" dirty="0">
+                <a:latin typeface="+mj-ea"/>
+                <a:ea typeface="+mj-ea"/>
+              </a:rPr>
+              <a:t>. </a:t>
+            </a:r>
+            <a:endParaRPr lang="en-US" altLang="ko-KR" sz="2000" dirty="0">
+              <a:latin typeface="+mj-ea"/>
+              <a:ea typeface="+mj-ea"/>
+            </a:endParaRPr>
+          </a:p>
+          <a:p>
+            <a:pPr marL="342900" indent="-342900">
+              <a:lnSpc>
+                <a:spcPct val="150000"/>
+              </a:lnSpc>
+              <a:buFont typeface="Wingdings" panose="05000000000000000000" pitchFamily="2" charset="2"/>
+              <a:buChar char="v"/>
+            </a:pPr>
+            <a:r>
+              <a:rPr lang="ko-KR" altLang="ko-KR" sz="2000" dirty="0" err="1">
+                <a:latin typeface="+mj-ea"/>
+                <a:ea typeface="+mj-ea"/>
+              </a:rPr>
+              <a:t>Build</a:t>
+            </a:r>
+            <a:r>
+              <a:rPr lang="ko-KR" altLang="ko-KR" sz="2000" dirty="0">
+                <a:latin typeface="+mj-ea"/>
+                <a:ea typeface="+mj-ea"/>
+              </a:rPr>
+              <a:t> AI </a:t>
+            </a:r>
+            <a:r>
+              <a:rPr lang="ko-KR" altLang="ko-KR" sz="2000" dirty="0" err="1">
+                <a:latin typeface="+mj-ea"/>
+                <a:ea typeface="+mj-ea"/>
+              </a:rPr>
+              <a:t>applications</a:t>
+            </a:r>
+            <a:r>
+              <a:rPr lang="ko-KR" altLang="ko-KR" sz="2000" dirty="0">
+                <a:latin typeface="+mj-ea"/>
+                <a:ea typeface="+mj-ea"/>
+              </a:rPr>
+              <a:t>. </a:t>
+            </a:r>
+            <a:endParaRPr lang="en-US" altLang="ko-KR" sz="2000" dirty="0">
+              <a:latin typeface="+mj-ea"/>
+              <a:ea typeface="+mj-ea"/>
+            </a:endParaRPr>
+          </a:p>
+          <a:p>
+            <a:pPr marL="342900" indent="-342900">
+              <a:lnSpc>
+                <a:spcPct val="150000"/>
+              </a:lnSpc>
+              <a:buFont typeface="Wingdings" panose="05000000000000000000" pitchFamily="2" charset="2"/>
+              <a:buChar char="v"/>
+            </a:pPr>
+            <a:r>
+              <a:rPr lang="ko-KR" altLang="ko-KR" sz="2000" dirty="0" err="1">
+                <a:latin typeface="+mj-ea"/>
+                <a:ea typeface="+mj-ea"/>
+              </a:rPr>
+              <a:t>Open-source</a:t>
+            </a:r>
+            <a:r>
+              <a:rPr lang="ko-KR" altLang="ko-KR" sz="2000" dirty="0">
+                <a:latin typeface="+mj-ea"/>
+                <a:ea typeface="+mj-ea"/>
+              </a:rPr>
+              <a:t> </a:t>
+            </a:r>
+            <a:r>
+              <a:rPr lang="ko-KR" altLang="ko-KR" sz="2000" dirty="0" err="1">
+                <a:latin typeface="+mj-ea"/>
+                <a:ea typeface="+mj-ea"/>
+              </a:rPr>
+              <a:t>foundations</a:t>
+            </a:r>
+            <a:r>
+              <a:rPr lang="ko-KR" altLang="ko-KR" sz="2000" dirty="0">
+                <a:latin typeface="+mj-ea"/>
+                <a:ea typeface="+mj-ea"/>
+              </a:rPr>
+              <a:t>, </a:t>
+            </a:r>
+            <a:r>
+              <a:rPr lang="ko-KR" altLang="ko-KR" sz="2000" dirty="0" err="1">
+                <a:latin typeface="+mj-ea"/>
+                <a:ea typeface="+mj-ea"/>
+              </a:rPr>
+              <a:t>production-ready</a:t>
+            </a:r>
+            <a:r>
+              <a:rPr lang="ko-KR" altLang="ko-KR" sz="2000" dirty="0">
+                <a:latin typeface="+mj-ea"/>
+                <a:ea typeface="+mj-ea"/>
+              </a:rPr>
+              <a:t> </a:t>
+            </a:r>
+            <a:r>
+              <a:rPr lang="ko-KR" altLang="ko-KR" sz="2000" dirty="0" err="1">
+                <a:latin typeface="+mj-ea"/>
+                <a:ea typeface="+mj-ea"/>
+              </a:rPr>
+              <a:t>platforms</a:t>
+            </a:r>
+            <a:r>
+              <a:rPr lang="ko-KR" altLang="ko-KR" sz="2000" dirty="0">
+                <a:latin typeface="+mj-ea"/>
+                <a:ea typeface="+mj-ea"/>
+              </a:rPr>
+              <a:t>.</a:t>
+            </a:r>
+          </a:p>
+          <a:p>
+            <a:pPr>
+              <a:lnSpc>
+                <a:spcPct val="150000"/>
+              </a:lnSpc>
+            </a:pPr>
+            <a:endParaRPr lang="ko-KR" altLang="en-US" sz="2000" dirty="0"/>
+          </a:p>
+        </p:txBody>
+      </p:sp>
+    </p:spTree>
+    <p:extLst>
+      <p:ext uri="{BB962C8B-B14F-4D97-AF65-F5344CB8AC3E}">
+        <p14:creationId xmlns:p14="http://schemas.microsoft.com/office/powerpoint/2010/main" val="1866845852"/>
+      </p:ext>
+    </p:extLst>
+  </p:cSld>
+  <p:clrMapOvr>
+    <a:masterClrMapping/>
+  </p:clrMapOvr>
+</p:sld>
+</file>
+
+<file path=ppt/slides/slide9.xml><?xml version="1.0" encoding="utf-8"?>
+<p:sld xmlns:a="http://schemas.openxmlformats.org/drawingml/2006/main" xmlns:r="http://schemas.openxmlformats.org/officeDocument/2006/relationships" xmlns:p="http://schemas.openxmlformats.org/presentationml/2006/main">
+  <p:cSld>
+    <p:spTree>
+      <p:nvGrpSpPr>
+        <p:cNvPr id="1" name="">
+          <a:extLst>
+            <a:ext uri="{FF2B5EF4-FFF2-40B4-BE49-F238E27FC236}">
+              <a16:creationId xmlns:a16="http://schemas.microsoft.com/office/drawing/2014/main" id="{ABF248E7-5CD4-B95C-7121-E68D8E432DCC}"/>
+            </a:ext>
+          </a:extLst>
+        </p:cNvPr>
+        <p:cNvGrpSpPr/>
+        <p:nvPr/>
+      </p:nvGrpSpPr>
+      <p:grpSpPr>
+        <a:xfrm>
+          <a:off x="0" y="0"/>
+          <a:ext cx="0" cy="0"/>
+          <a:chOff x="0" y="0"/>
+          <a:chExt cx="0" cy="0"/>
+        </a:xfrm>
+      </p:grpSpPr>
+      <p:sp>
+        <p:nvSpPr>
+          <p:cNvPr id="4" name="슬라이드 번호 개체 틀 3">
+            <a:extLst>
+              <a:ext uri="{FF2B5EF4-FFF2-40B4-BE49-F238E27FC236}">
+                <a16:creationId xmlns:a16="http://schemas.microsoft.com/office/drawing/2014/main" id="{164DE822-1DE3-48B6-4C39-6C216D1EDF40}"/>
+              </a:ext>
+            </a:extLst>
+          </p:cNvPr>
+          <p:cNvSpPr>
+            <a:spLocks noGrp="1"/>
+          </p:cNvSpPr>
+          <p:nvPr>
+            <p:ph type="sldNum" sz="quarter" idx="12"/>
+          </p:nvPr>
+        </p:nvSpPr>
+        <p:spPr>
+          <a:xfrm>
+            <a:off x="10514011" y="6036261"/>
+            <a:ext cx="753545" cy="365125"/>
+          </a:xfrm>
+        </p:spPr>
+        <p:txBody>
+          <a:bodyPr/>
+          <a:lstStyle/>
+          <a:p>
+            <a:fld id="{D57F1E4F-1CFF-5643-939E-217C01CDF565}" type="slidenum">
+              <a:rPr lang="en-US" smtClean="0"/>
+              <a:pPr/>
+              <a:t>9</a:t>
+            </a:fld>
+            <a:endParaRPr lang="en-US" dirty="0"/>
+          </a:p>
+        </p:txBody>
+      </p:sp>
+      <p:sp>
+        <p:nvSpPr>
+          <p:cNvPr id="3" name="제목 1">
+            <a:extLst>
+              <a:ext uri="{FF2B5EF4-FFF2-40B4-BE49-F238E27FC236}">
+                <a16:creationId xmlns:a16="http://schemas.microsoft.com/office/drawing/2014/main" id="{4A07C9A8-8478-9B1B-7227-65EC006D8EDC}"/>
+              </a:ext>
+            </a:extLst>
+          </p:cNvPr>
+          <p:cNvSpPr txBox="1">
+            <a:spLocks/>
+          </p:cNvSpPr>
+          <p:nvPr/>
+        </p:nvSpPr>
+        <p:spPr>
+          <a:xfrm>
+            <a:off x="475645" y="481983"/>
+            <a:ext cx="10353762" cy="766439"/>
+          </a:xfrm>
+          <a:prstGeom prst="rect">
+            <a:avLst/>
+          </a:prstGeom>
+        </p:spPr>
+        <p:txBody>
+          <a:bodyPr vert="horz" lIns="91440" tIns="45720" rIns="91440" bIns="45720" rtlCol="0" anchor="ctr">
+            <a:normAutofit/>
+          </a:bodyPr>
+          <a:lstStyle>
+            <a:lvl1pPr algn="ctr" defTabSz="914400" rtl="0" eaLnBrk="1" latinLnBrk="1" hangingPunct="1">
+              <a:lnSpc>
+                <a:spcPct val="90000"/>
+              </a:lnSpc>
+              <a:spcBef>
+                <a:spcPct val="0"/>
+              </a:spcBef>
+              <a:buNone/>
+              <a:defRPr sz="3200" kern="1200" cap="all" baseline="0">
+                <a:solidFill>
+                  <a:schemeClr val="tx1"/>
+                </a:solidFill>
+                <a:effectLst/>
+                <a:latin typeface="Batang" panose="02030600000101010101" pitchFamily="18" charset="-127"/>
+                <a:ea typeface="Batang" panose="02030600000101010101" pitchFamily="18" charset="-127"/>
+                <a:cs typeface="+mj-cs"/>
+              </a:defRPr>
+            </a:lvl1pPr>
+          </a:lstStyle>
+          <a:p>
+            <a:pPr algn="l"/>
+            <a:r>
+              <a:rPr lang="en-US" altLang="ko-KR" sz="2800" b="1" cap="none" dirty="0">
+                <a:latin typeface="Lora" pitchFamily="2" charset="0"/>
+              </a:rPr>
+              <a:t>Practice 02_machine learning with titanic </a:t>
+            </a:r>
+            <a:endParaRPr lang="ko-KR" altLang="ko-KR" sz="2800" b="1" cap="none" dirty="0">
+              <a:latin typeface="Lora" pitchFamily="2" charset="0"/>
+            </a:endParaRPr>
+          </a:p>
+        </p:txBody>
+      </p:sp>
+      <p:sp>
+        <p:nvSpPr>
+          <p:cNvPr id="6" name="TextBox 5">
+            <a:extLst>
+              <a:ext uri="{FF2B5EF4-FFF2-40B4-BE49-F238E27FC236}">
+                <a16:creationId xmlns:a16="http://schemas.microsoft.com/office/drawing/2014/main" id="{20AB749C-9DD9-693A-A0D5-CB41743B4EC1}"/>
+              </a:ext>
+            </a:extLst>
+          </p:cNvPr>
+          <p:cNvSpPr txBox="1"/>
+          <p:nvPr/>
+        </p:nvSpPr>
+        <p:spPr>
+          <a:xfrm>
+            <a:off x="740527" y="1631367"/>
+            <a:ext cx="10088880" cy="1200329"/>
+          </a:xfrm>
+          <a:prstGeom prst="rect">
+            <a:avLst/>
+          </a:prstGeom>
+          <a:noFill/>
+        </p:spPr>
+        <p:txBody>
+          <a:bodyPr wrap="square">
+            <a:spAutoFit/>
+          </a:bodyPr>
+          <a:lstStyle/>
+          <a:p>
+            <a:pPr marL="342900" indent="-342900" rtl="0">
+              <a:buFont typeface="Wingdings" panose="05000000000000000000" pitchFamily="2" charset="2"/>
+              <a:buChar char="v"/>
+            </a:pPr>
+            <a:r>
+              <a:rPr lang="en-US" altLang="ko-KR" sz="2400" b="0" dirty="0">
+                <a:effectLst/>
+                <a:latin typeface="D2Coding" panose="020B0609020101020101" pitchFamily="49" charset="-127"/>
+                <a:ea typeface="D2Coding" panose="020B0609020101020101" pitchFamily="49" charset="-127"/>
+              </a:rPr>
+              <a:t>Python class</a:t>
+            </a:r>
+            <a:r>
+              <a:rPr lang="ko-KR" altLang="en-US" sz="2400" b="0" dirty="0">
+                <a:effectLst/>
+                <a:latin typeface="D2Coding" panose="020B0609020101020101" pitchFamily="49" charset="-127"/>
+                <a:ea typeface="D2Coding" panose="020B0609020101020101" pitchFamily="49" charset="-127"/>
+              </a:rPr>
+              <a:t> </a:t>
+            </a:r>
+            <a:endParaRPr lang="en-US" altLang="ko-KR" sz="2400" b="0" dirty="0">
+              <a:effectLst/>
+              <a:latin typeface="D2Coding" panose="020B0609020101020101" pitchFamily="49" charset="-127"/>
+              <a:ea typeface="D2Coding" panose="020B0609020101020101" pitchFamily="49" charset="-127"/>
+            </a:endParaRPr>
+          </a:p>
+          <a:p>
+            <a:pPr marL="342900" indent="-342900" rtl="0">
+              <a:buFont typeface="Wingdings" panose="05000000000000000000" pitchFamily="2" charset="2"/>
+              <a:buChar char="v"/>
+            </a:pPr>
+            <a:endParaRPr lang="en-US" altLang="ko-KR" sz="2400" dirty="0">
+              <a:latin typeface="D2Coding" panose="020B0609020101020101" pitchFamily="49" charset="-127"/>
+              <a:ea typeface="D2Coding" panose="020B0609020101020101" pitchFamily="49" charset="-127"/>
+            </a:endParaRPr>
+          </a:p>
+          <a:p>
+            <a:pPr marL="342900" indent="-342900" rtl="0">
+              <a:buFont typeface="Wingdings" panose="05000000000000000000" pitchFamily="2" charset="2"/>
+              <a:buChar char="v"/>
+            </a:pPr>
+            <a:r>
+              <a:rPr lang="en-US" altLang="ko-KR" sz="2400" b="0" dirty="0">
+                <a:effectLst/>
+                <a:latin typeface="D2Coding" panose="020B0609020101020101" pitchFamily="49" charset="-127"/>
+                <a:ea typeface="D2Coding" panose="020B0609020101020101" pitchFamily="49" charset="-127"/>
+              </a:rPr>
+              <a:t>Prefect</a:t>
+            </a:r>
+          </a:p>
+        </p:txBody>
+      </p:sp>
+      <p:sp>
+        <p:nvSpPr>
+          <p:cNvPr id="10" name="화살표: 줄무늬가 있는 오른쪽 9">
+            <a:extLst>
+              <a:ext uri="{FF2B5EF4-FFF2-40B4-BE49-F238E27FC236}">
+                <a16:creationId xmlns:a16="http://schemas.microsoft.com/office/drawing/2014/main" id="{11923439-EBE3-433A-A30E-A8824719AAF8}"/>
+              </a:ext>
+            </a:extLst>
+          </p:cNvPr>
+          <p:cNvSpPr/>
+          <p:nvPr/>
+        </p:nvSpPr>
+        <p:spPr>
+          <a:xfrm>
+            <a:off x="4821382" y="1880351"/>
+            <a:ext cx="1505527" cy="951345"/>
+          </a:xfrm>
+          <a:prstGeom prst="stripedRightArrow">
+            <a:avLst>
+              <a:gd name="adj1" fmla="val 73301"/>
+              <a:gd name="adj2" fmla="val 50000"/>
+            </a:avLst>
+          </a:prstGeom>
+        </p:spPr>
+        <p:style>
+          <a:lnRef idx="2">
+            <a:schemeClr val="accent1">
+              <a:shade val="15000"/>
+            </a:schemeClr>
+          </a:lnRef>
+          <a:fillRef idx="1">
+            <a:schemeClr val="accent1"/>
+          </a:fillRef>
+          <a:effectRef idx="0">
+            <a:schemeClr val="accent1"/>
+          </a:effectRef>
+          <a:fontRef idx="minor">
+            <a:schemeClr val="lt1"/>
+          </a:fontRef>
+        </p:style>
+        <p:txBody>
+          <a:bodyPr rtlCol="0" anchor="ctr"/>
+          <a:lstStyle/>
+          <a:p>
+            <a:pPr algn="ctr"/>
+            <a:r>
+              <a:rPr lang="en-US" altLang="ko-KR"/>
+              <a:t>App </a:t>
+            </a:r>
+            <a:r>
+              <a:rPr lang="ko-KR" altLang="en-US" dirty="0"/>
+              <a:t>서비스</a:t>
+            </a:r>
+          </a:p>
+        </p:txBody>
+      </p:sp>
+    </p:spTree>
+    <p:extLst>
+      <p:ext uri="{BB962C8B-B14F-4D97-AF65-F5344CB8AC3E}">
+        <p14:creationId xmlns:p14="http://schemas.microsoft.com/office/powerpoint/2010/main" val="3815185558"/>
       </p:ext>
     </p:extLst>
   </p:cSld>

--- a/01_Workflow with AI Agent.pptx
+++ b/01_Workflow with AI Agent.pptx
@@ -5,10 +5,10 @@
     <p:sldMasterId id="2147483660" r:id="rId1"/>
   </p:sldMasterIdLst>
   <p:notesMasterIdLst>
-    <p:notesMasterId r:id="rId17"/>
+    <p:notesMasterId r:id="rId19"/>
   </p:notesMasterIdLst>
   <p:handoutMasterIdLst>
-    <p:handoutMasterId r:id="rId18"/>
+    <p:handoutMasterId r:id="rId20"/>
   </p:handoutMasterIdLst>
   <p:sldIdLst>
     <p:sldId id="256" r:id="rId2"/>
@@ -25,7 +25,9 @@
     <p:sldId id="1144" r:id="rId13"/>
     <p:sldId id="1146" r:id="rId14"/>
     <p:sldId id="1145" r:id="rId15"/>
-    <p:sldId id="1147" r:id="rId16"/>
+    <p:sldId id="1159" r:id="rId16"/>
+    <p:sldId id="1160" r:id="rId17"/>
+    <p:sldId id="1147" r:id="rId18"/>
   </p:sldIdLst>
   <p:sldSz cx="12192000" cy="6858000"/>
   <p:notesSz cx="6858000" cy="9144000"/>
@@ -147,6 +149,8 @@
             <p14:sldId id="1144"/>
             <p14:sldId id="1146"/>
             <p14:sldId id="1145"/>
+            <p14:sldId id="1159"/>
+            <p14:sldId id="1160"/>
             <p14:sldId id="1147"/>
           </p14:sldIdLst>
         </p14:section>
@@ -272,7 +276,7 @@
                 <a:latin typeface="맑은 고딕" panose="020B0503020000020004" pitchFamily="50" charset="-127"/>
                 <a:ea typeface="맑은 고딕" panose="020B0503020000020004" pitchFamily="50" charset="-127"/>
               </a:rPr>
-              <a:t>2026-07-06</a:t>
+              <a:t>2026-07-09</a:t>
             </a:fld>
             <a:endParaRPr lang="ko-KR" altLang="en-US">
               <a:latin typeface="맑은 고딕" panose="020B0503020000020004" pitchFamily="50" charset="-127"/>
@@ -458,7 +462,7 @@
           <a:p>
             <a:fld id="{43E1C3DD-4A19-441D-907C-380838DB51C4}" type="datetime1">
               <a:rPr lang="ko-KR" altLang="en-US" noProof="0" smtClean="0"/>
-              <a:t>2026-07-06</a:t>
+              <a:t>2026-07-09</a:t>
             </a:fld>
             <a:endParaRPr lang="ko-KR" altLang="en-US" noProof="0"/>
           </a:p>
@@ -1554,7 +1558,7 @@
           <a:p>
             <a:fld id="{990475B5-67CA-4281-BDCA-DA943C3C8EB3}" type="datetime1">
               <a:rPr lang="ko-KR" altLang="en-US" noProof="0" smtClean="0"/>
-              <a:t>2026-07-06</a:t>
+              <a:t>2026-07-09</a:t>
             </a:fld>
             <a:endParaRPr lang="ko-KR" altLang="en-US" noProof="0"/>
           </a:p>
@@ -2208,7 +2212,7 @@
           <a:p>
             <a:fld id="{48A87A34-81AB-432B-8DAE-1953F412C126}" type="datetimeFigureOut">
               <a:rPr lang="en-US" smtClean="0"/>
-              <a:t>7/6/2026</a:t>
+              <a:t>7/9/2026</a:t>
             </a:fld>
             <a:endParaRPr lang="en-US" dirty="0"/>
           </a:p>
@@ -2504,7 +2508,7 @@
           <a:p>
             <a:fld id="{C655C81E-72E7-4D05-94B5-F45B321A525D}" type="datetime1">
               <a:rPr lang="ko-KR" altLang="en-US" noProof="0" smtClean="0"/>
-              <a:t>2026-07-06</a:t>
+              <a:t>2026-07-09</a:t>
             </a:fld>
             <a:endParaRPr lang="ko-KR" altLang="en-US" noProof="0" dirty="0">
               <a:latin typeface="맑은 고딕" panose="020B0503020000020004" pitchFamily="50" charset="-127"/>
@@ -4930,10 +4934,10 @@
           <p:nvPr/>
         </p:nvPicPr>
         <p:blipFill>
-          <a:blip>
+          <a:blip r:embed="rId2">
             <a:extLst>
               <a:ext uri="{96DAC541-7B7A-43D3-8B79-37D633B846F1}">
-                <asvg:svgBlip xmlns:asvg="http://schemas.microsoft.com/office/drawing/2016/SVG/main" r:embed="rId2"/>
+                <asvg:svgBlip xmlns:asvg="http://schemas.microsoft.com/office/drawing/2016/SVG/main" r:embed="rId3"/>
               </a:ext>
             </a:extLst>
           </a:blip>
@@ -4972,6 +4976,743 @@
         <p:cNvPr id="1" name="">
           <a:extLst>
             <a:ext uri="{FF2B5EF4-FFF2-40B4-BE49-F238E27FC236}">
+              <a16:creationId xmlns:a16="http://schemas.microsoft.com/office/drawing/2014/main" id="{16DAFBFC-0B06-A7BB-1767-38AAEFB33159}"/>
+            </a:ext>
+          </a:extLst>
+        </p:cNvPr>
+        <p:cNvGrpSpPr/>
+        <p:nvPr/>
+      </p:nvGrpSpPr>
+      <p:grpSpPr>
+        <a:xfrm>
+          <a:off x="0" y="0"/>
+          <a:ext cx="0" cy="0"/>
+          <a:chOff x="0" y="0"/>
+          <a:chExt cx="0" cy="0"/>
+        </a:xfrm>
+      </p:grpSpPr>
+      <p:sp>
+        <p:nvSpPr>
+          <p:cNvPr id="4" name="슬라이드 번호 개체 틀 3">
+            <a:extLst>
+              <a:ext uri="{FF2B5EF4-FFF2-40B4-BE49-F238E27FC236}">
+                <a16:creationId xmlns:a16="http://schemas.microsoft.com/office/drawing/2014/main" id="{242DEE5D-48A7-1475-420E-3A1772A3BF2A}"/>
+              </a:ext>
+            </a:extLst>
+          </p:cNvPr>
+          <p:cNvSpPr>
+            <a:spLocks noGrp="1"/>
+          </p:cNvSpPr>
+          <p:nvPr>
+            <p:ph type="sldNum" sz="quarter" idx="12"/>
+          </p:nvPr>
+        </p:nvSpPr>
+        <p:spPr>
+          <a:xfrm>
+            <a:off x="10514011" y="6036261"/>
+            <a:ext cx="753545" cy="365125"/>
+          </a:xfrm>
+        </p:spPr>
+        <p:txBody>
+          <a:bodyPr/>
+          <a:lstStyle/>
+          <a:p>
+            <a:fld id="{D57F1E4F-1CFF-5643-939E-217C01CDF565}" type="slidenum">
+              <a:rPr lang="en-US" smtClean="0"/>
+              <a:pPr/>
+              <a:t>15</a:t>
+            </a:fld>
+            <a:endParaRPr lang="en-US" dirty="0"/>
+          </a:p>
+        </p:txBody>
+      </p:sp>
+      <p:sp>
+        <p:nvSpPr>
+          <p:cNvPr id="3" name="제목 1">
+            <a:extLst>
+              <a:ext uri="{FF2B5EF4-FFF2-40B4-BE49-F238E27FC236}">
+                <a16:creationId xmlns:a16="http://schemas.microsoft.com/office/drawing/2014/main" id="{0248A06A-6DC1-B280-71C6-B7BE40C18EF0}"/>
+              </a:ext>
+            </a:extLst>
+          </p:cNvPr>
+          <p:cNvSpPr txBox="1">
+            <a:spLocks/>
+          </p:cNvSpPr>
+          <p:nvPr/>
+        </p:nvSpPr>
+        <p:spPr>
+          <a:xfrm>
+            <a:off x="475645" y="481983"/>
+            <a:ext cx="10353762" cy="766439"/>
+          </a:xfrm>
+          <a:prstGeom prst="rect">
+            <a:avLst/>
+          </a:prstGeom>
+        </p:spPr>
+        <p:txBody>
+          <a:bodyPr vert="horz" lIns="91440" tIns="45720" rIns="91440" bIns="45720" rtlCol="0" anchor="ctr">
+            <a:normAutofit/>
+          </a:bodyPr>
+          <a:lstStyle>
+            <a:lvl1pPr algn="ctr" defTabSz="914400" rtl="0" eaLnBrk="1" latinLnBrk="1" hangingPunct="1">
+              <a:lnSpc>
+                <a:spcPct val="90000"/>
+              </a:lnSpc>
+              <a:spcBef>
+                <a:spcPct val="0"/>
+              </a:spcBef>
+              <a:buNone/>
+              <a:defRPr sz="3200" kern="1200" cap="all" baseline="0">
+                <a:solidFill>
+                  <a:schemeClr val="tx1"/>
+                </a:solidFill>
+                <a:effectLst/>
+                <a:latin typeface="Batang" panose="02030600000101010101" pitchFamily="18" charset="-127"/>
+                <a:ea typeface="Batang" panose="02030600000101010101" pitchFamily="18" charset="-127"/>
+                <a:cs typeface="+mj-cs"/>
+              </a:defRPr>
+            </a:lvl1pPr>
+          </a:lstStyle>
+          <a:p>
+            <a:pPr algn="l"/>
+            <a:r>
+              <a:rPr lang="en-US" altLang="ko-KR" sz="2800" b="1" cap="none" dirty="0">
+                <a:latin typeface="Lora" pitchFamily="2" charset="0"/>
+              </a:rPr>
+              <a:t>AI Agent</a:t>
+            </a:r>
+          </a:p>
+        </p:txBody>
+      </p:sp>
+      <p:sp>
+        <p:nvSpPr>
+          <p:cNvPr id="16" name="TextBox 15">
+            <a:extLst>
+              <a:ext uri="{FF2B5EF4-FFF2-40B4-BE49-F238E27FC236}">
+                <a16:creationId xmlns:a16="http://schemas.microsoft.com/office/drawing/2014/main" id="{56837A6C-1C40-E40A-1386-2123C80207F2}"/>
+              </a:ext>
+            </a:extLst>
+          </p:cNvPr>
+          <p:cNvSpPr txBox="1"/>
+          <p:nvPr/>
+        </p:nvSpPr>
+        <p:spPr>
+          <a:xfrm>
+            <a:off x="1085850" y="1905000"/>
+            <a:ext cx="1638590" cy="369332"/>
+          </a:xfrm>
+          <a:prstGeom prst="rect">
+            <a:avLst/>
+          </a:prstGeom>
+          <a:noFill/>
+        </p:spPr>
+        <p:txBody>
+          <a:bodyPr wrap="none" rtlCol="0">
+            <a:spAutoFit/>
+          </a:bodyPr>
+          <a:lstStyle/>
+          <a:p>
+            <a:r>
+              <a:rPr lang="en-US" altLang="ko-KR" dirty="0">
+                <a:hlinkClick r:id="rId2"/>
+              </a:rPr>
+              <a:t>AI Agent Skills</a:t>
+            </a:r>
+            <a:endParaRPr lang="ko-KR" altLang="en-US" dirty="0"/>
+          </a:p>
+        </p:txBody>
+      </p:sp>
+      <p:pic>
+        <p:nvPicPr>
+          <p:cNvPr id="18" name="그림 17">
+            <a:extLst>
+              <a:ext uri="{FF2B5EF4-FFF2-40B4-BE49-F238E27FC236}">
+                <a16:creationId xmlns:a16="http://schemas.microsoft.com/office/drawing/2014/main" id="{80B869E8-9E67-910D-CE04-10AA339EBBE6}"/>
+              </a:ext>
+            </a:extLst>
+          </p:cNvPr>
+          <p:cNvPicPr>
+            <a:picLocks noChangeAspect="1"/>
+          </p:cNvPicPr>
+          <p:nvPr/>
+        </p:nvPicPr>
+        <p:blipFill>
+          <a:blip r:embed="rId3"/>
+          <a:stretch>
+            <a:fillRect/>
+          </a:stretch>
+        </p:blipFill>
+        <p:spPr>
+          <a:xfrm>
+            <a:off x="3535402" y="1478591"/>
+            <a:ext cx="4981964" cy="4922795"/>
+          </a:xfrm>
+          <a:prstGeom prst="rect">
+            <a:avLst/>
+          </a:prstGeom>
+        </p:spPr>
+      </p:pic>
+    </p:spTree>
+    <p:extLst>
+      <p:ext uri="{BB962C8B-B14F-4D97-AF65-F5344CB8AC3E}">
+        <p14:creationId xmlns:p14="http://schemas.microsoft.com/office/powerpoint/2010/main" val="2445979412"/>
+      </p:ext>
+    </p:extLst>
+  </p:cSld>
+  <p:clrMapOvr>
+    <a:masterClrMapping/>
+  </p:clrMapOvr>
+</p:sld>
+</file>
+
+<file path=ppt/slides/slide16.xml><?xml version="1.0" encoding="utf-8"?>
+<p:sld xmlns:a="http://schemas.openxmlformats.org/drawingml/2006/main" xmlns:r="http://schemas.openxmlformats.org/officeDocument/2006/relationships" xmlns:p="http://schemas.openxmlformats.org/presentationml/2006/main">
+  <p:cSld>
+    <p:spTree>
+      <p:nvGrpSpPr>
+        <p:cNvPr id="1" name="">
+          <a:extLst>
+            <a:ext uri="{FF2B5EF4-FFF2-40B4-BE49-F238E27FC236}">
+              <a16:creationId xmlns:a16="http://schemas.microsoft.com/office/drawing/2014/main" id="{2F69D315-B382-1617-22F4-BBF89CC1E178}"/>
+            </a:ext>
+          </a:extLst>
+        </p:cNvPr>
+        <p:cNvGrpSpPr/>
+        <p:nvPr/>
+      </p:nvGrpSpPr>
+      <p:grpSpPr>
+        <a:xfrm>
+          <a:off x="0" y="0"/>
+          <a:ext cx="0" cy="0"/>
+          <a:chOff x="0" y="0"/>
+          <a:chExt cx="0" cy="0"/>
+        </a:xfrm>
+      </p:grpSpPr>
+      <p:sp>
+        <p:nvSpPr>
+          <p:cNvPr id="4" name="슬라이드 번호 개체 틀 3">
+            <a:extLst>
+              <a:ext uri="{FF2B5EF4-FFF2-40B4-BE49-F238E27FC236}">
+                <a16:creationId xmlns:a16="http://schemas.microsoft.com/office/drawing/2014/main" id="{125AB818-D59C-FAA0-0AAD-538131313A19}"/>
+              </a:ext>
+            </a:extLst>
+          </p:cNvPr>
+          <p:cNvSpPr>
+            <a:spLocks noGrp="1"/>
+          </p:cNvSpPr>
+          <p:nvPr>
+            <p:ph type="sldNum" sz="quarter" idx="12"/>
+          </p:nvPr>
+        </p:nvSpPr>
+        <p:spPr>
+          <a:xfrm>
+            <a:off x="10514011" y="6036261"/>
+            <a:ext cx="753545" cy="365125"/>
+          </a:xfrm>
+        </p:spPr>
+        <p:txBody>
+          <a:bodyPr/>
+          <a:lstStyle/>
+          <a:p>
+            <a:fld id="{D57F1E4F-1CFF-5643-939E-217C01CDF565}" type="slidenum">
+              <a:rPr lang="en-US" smtClean="0"/>
+              <a:pPr/>
+              <a:t>16</a:t>
+            </a:fld>
+            <a:endParaRPr lang="en-US" dirty="0"/>
+          </a:p>
+        </p:txBody>
+      </p:sp>
+      <p:sp>
+        <p:nvSpPr>
+          <p:cNvPr id="3" name="제목 1">
+            <a:extLst>
+              <a:ext uri="{FF2B5EF4-FFF2-40B4-BE49-F238E27FC236}">
+                <a16:creationId xmlns:a16="http://schemas.microsoft.com/office/drawing/2014/main" id="{7A060307-5142-7081-A269-30B645F1362F}"/>
+              </a:ext>
+            </a:extLst>
+          </p:cNvPr>
+          <p:cNvSpPr txBox="1">
+            <a:spLocks/>
+          </p:cNvSpPr>
+          <p:nvPr/>
+        </p:nvSpPr>
+        <p:spPr>
+          <a:xfrm>
+            <a:off x="475645" y="481983"/>
+            <a:ext cx="10353762" cy="766439"/>
+          </a:xfrm>
+          <a:prstGeom prst="rect">
+            <a:avLst/>
+          </a:prstGeom>
+        </p:spPr>
+        <p:txBody>
+          <a:bodyPr vert="horz" lIns="91440" tIns="45720" rIns="91440" bIns="45720" rtlCol="0" anchor="ctr">
+            <a:normAutofit/>
+          </a:bodyPr>
+          <a:lstStyle>
+            <a:lvl1pPr algn="ctr" defTabSz="914400" rtl="0" eaLnBrk="1" latinLnBrk="1" hangingPunct="1">
+              <a:lnSpc>
+                <a:spcPct val="90000"/>
+              </a:lnSpc>
+              <a:spcBef>
+                <a:spcPct val="0"/>
+              </a:spcBef>
+              <a:buNone/>
+              <a:defRPr sz="3200" kern="1200" cap="all" baseline="0">
+                <a:solidFill>
+                  <a:schemeClr val="tx1"/>
+                </a:solidFill>
+                <a:effectLst/>
+                <a:latin typeface="Batang" panose="02030600000101010101" pitchFamily="18" charset="-127"/>
+                <a:ea typeface="Batang" panose="02030600000101010101" pitchFamily="18" charset="-127"/>
+                <a:cs typeface="+mj-cs"/>
+              </a:defRPr>
+            </a:lvl1pPr>
+          </a:lstStyle>
+          <a:p>
+            <a:pPr algn="l"/>
+            <a:r>
+              <a:rPr lang="en-US" altLang="ko-KR" sz="2800" b="1" cap="none" dirty="0">
+                <a:latin typeface="Lora" pitchFamily="2" charset="0"/>
+              </a:rPr>
+              <a:t>AI Agent</a:t>
+            </a:r>
+          </a:p>
+        </p:txBody>
+      </p:sp>
+      <p:sp>
+        <p:nvSpPr>
+          <p:cNvPr id="2" name="사각형: 둥근 모서리 1">
+            <a:extLst>
+              <a:ext uri="{FF2B5EF4-FFF2-40B4-BE49-F238E27FC236}">
+                <a16:creationId xmlns:a16="http://schemas.microsoft.com/office/drawing/2014/main" id="{3FF27FD2-2989-8E72-4D6F-0E509A7BCE5C}"/>
+              </a:ext>
+            </a:extLst>
+          </p:cNvPr>
+          <p:cNvSpPr/>
+          <p:nvPr/>
+        </p:nvSpPr>
+        <p:spPr>
+          <a:xfrm>
+            <a:off x="1857375" y="1811969"/>
+            <a:ext cx="1981200" cy="581025"/>
+          </a:xfrm>
+          <a:prstGeom prst="roundRect">
+            <a:avLst/>
+          </a:prstGeom>
+        </p:spPr>
+        <p:style>
+          <a:lnRef idx="2">
+            <a:schemeClr val="accent1">
+              <a:shade val="15000"/>
+            </a:schemeClr>
+          </a:lnRef>
+          <a:fillRef idx="1">
+            <a:schemeClr val="accent1"/>
+          </a:fillRef>
+          <a:effectRef idx="0">
+            <a:schemeClr val="accent1"/>
+          </a:effectRef>
+          <a:fontRef idx="minor">
+            <a:schemeClr val="lt1"/>
+          </a:fontRef>
+        </p:style>
+        <p:txBody>
+          <a:bodyPr rtlCol="0" anchor="ctr"/>
+          <a:lstStyle/>
+          <a:p>
+            <a:pPr algn="ctr"/>
+            <a:r>
+              <a:rPr lang="en-US" altLang="ko-KR" sz="2400" dirty="0">
+                <a:latin typeface="D2Coding" panose="020B0609020101020101" pitchFamily="49" charset="-127"/>
+                <a:ea typeface="D2Coding" panose="020B0609020101020101" pitchFamily="49" charset="-127"/>
+              </a:rPr>
+              <a:t>AI Agent</a:t>
+            </a:r>
+            <a:endParaRPr lang="ko-KR" altLang="en-US" sz="2400" dirty="0">
+              <a:latin typeface="D2Coding" panose="020B0609020101020101" pitchFamily="49" charset="-127"/>
+              <a:ea typeface="D2Coding" panose="020B0609020101020101" pitchFamily="49" charset="-127"/>
+            </a:endParaRPr>
+          </a:p>
+        </p:txBody>
+      </p:sp>
+      <p:sp>
+        <p:nvSpPr>
+          <p:cNvPr id="6" name="타원 5">
+            <a:extLst>
+              <a:ext uri="{FF2B5EF4-FFF2-40B4-BE49-F238E27FC236}">
+                <a16:creationId xmlns:a16="http://schemas.microsoft.com/office/drawing/2014/main" id="{CF960225-DCF9-4D70-3F6F-A80DB638DE63}"/>
+              </a:ext>
+            </a:extLst>
+          </p:cNvPr>
+          <p:cNvSpPr/>
+          <p:nvPr/>
+        </p:nvSpPr>
+        <p:spPr>
+          <a:xfrm>
+            <a:off x="542926" y="2956541"/>
+            <a:ext cx="1809750" cy="685800"/>
+          </a:xfrm>
+          <a:prstGeom prst="ellipse">
+            <a:avLst/>
+          </a:prstGeom>
+          <a:solidFill>
+            <a:schemeClr val="bg1">
+              <a:lumMod val="50000"/>
+            </a:schemeClr>
+          </a:solidFill>
+        </p:spPr>
+        <p:style>
+          <a:lnRef idx="2">
+            <a:schemeClr val="accent1">
+              <a:shade val="15000"/>
+            </a:schemeClr>
+          </a:lnRef>
+          <a:fillRef idx="1">
+            <a:schemeClr val="accent1"/>
+          </a:fillRef>
+          <a:effectRef idx="0">
+            <a:schemeClr val="accent1"/>
+          </a:effectRef>
+          <a:fontRef idx="minor">
+            <a:schemeClr val="lt1"/>
+          </a:fontRef>
+        </p:style>
+        <p:txBody>
+          <a:bodyPr rtlCol="0" anchor="ctr"/>
+          <a:lstStyle/>
+          <a:p>
+            <a:pPr algn="ctr"/>
+            <a:r>
+              <a:rPr lang="en-US" altLang="ko-KR" dirty="0">
+                <a:latin typeface="D2Coding" panose="020B0609020101020101" pitchFamily="49" charset="-127"/>
+                <a:ea typeface="D2Coding" panose="020B0609020101020101" pitchFamily="49" charset="-127"/>
+              </a:rPr>
+              <a:t>Context</a:t>
+            </a:r>
+            <a:endParaRPr lang="ko-KR" altLang="en-US" dirty="0">
+              <a:latin typeface="D2Coding" panose="020B0609020101020101" pitchFamily="49" charset="-127"/>
+              <a:ea typeface="D2Coding" panose="020B0609020101020101" pitchFamily="49" charset="-127"/>
+            </a:endParaRPr>
+          </a:p>
+        </p:txBody>
+      </p:sp>
+      <p:sp>
+        <p:nvSpPr>
+          <p:cNvPr id="7" name="타원 6">
+            <a:extLst>
+              <a:ext uri="{FF2B5EF4-FFF2-40B4-BE49-F238E27FC236}">
+                <a16:creationId xmlns:a16="http://schemas.microsoft.com/office/drawing/2014/main" id="{9BDCE812-EEFD-CC77-FE73-A201FC35E6A6}"/>
+              </a:ext>
+            </a:extLst>
+          </p:cNvPr>
+          <p:cNvSpPr/>
+          <p:nvPr/>
+        </p:nvSpPr>
+        <p:spPr>
+          <a:xfrm>
+            <a:off x="3457576" y="2956541"/>
+            <a:ext cx="1809750" cy="685800"/>
+          </a:xfrm>
+          <a:prstGeom prst="ellipse">
+            <a:avLst/>
+          </a:prstGeom>
+          <a:solidFill>
+            <a:schemeClr val="bg1">
+              <a:lumMod val="50000"/>
+            </a:schemeClr>
+          </a:solidFill>
+        </p:spPr>
+        <p:style>
+          <a:lnRef idx="2">
+            <a:schemeClr val="accent1">
+              <a:shade val="15000"/>
+            </a:schemeClr>
+          </a:lnRef>
+          <a:fillRef idx="1">
+            <a:schemeClr val="accent1"/>
+          </a:fillRef>
+          <a:effectRef idx="0">
+            <a:schemeClr val="accent1"/>
+          </a:effectRef>
+          <a:fontRef idx="minor">
+            <a:schemeClr val="lt1"/>
+          </a:fontRef>
+        </p:style>
+        <p:txBody>
+          <a:bodyPr rtlCol="0" anchor="ctr"/>
+          <a:lstStyle/>
+          <a:p>
+            <a:pPr algn="ctr"/>
+            <a:r>
+              <a:rPr lang="en-US" altLang="ko-KR" dirty="0">
+                <a:latin typeface="D2Coding" panose="020B0609020101020101" pitchFamily="49" charset="-127"/>
+                <a:ea typeface="D2Coding" panose="020B0609020101020101" pitchFamily="49" charset="-127"/>
+              </a:rPr>
+              <a:t>Tools</a:t>
+            </a:r>
+            <a:endParaRPr lang="ko-KR" altLang="en-US" dirty="0">
+              <a:latin typeface="D2Coding" panose="020B0609020101020101" pitchFamily="49" charset="-127"/>
+              <a:ea typeface="D2Coding" panose="020B0609020101020101" pitchFamily="49" charset="-127"/>
+            </a:endParaRPr>
+          </a:p>
+        </p:txBody>
+      </p:sp>
+      <p:sp>
+        <p:nvSpPr>
+          <p:cNvPr id="9" name="사각형: 둥근 모서리 8">
+            <a:extLst>
+              <a:ext uri="{FF2B5EF4-FFF2-40B4-BE49-F238E27FC236}">
+                <a16:creationId xmlns:a16="http://schemas.microsoft.com/office/drawing/2014/main" id="{1F69BED8-99AA-2D5A-C2B5-66C16F9B03D8}"/>
+              </a:ext>
+            </a:extLst>
+          </p:cNvPr>
+          <p:cNvSpPr/>
+          <p:nvPr/>
+        </p:nvSpPr>
+        <p:spPr>
+          <a:xfrm>
+            <a:off x="7981950" y="1811968"/>
+            <a:ext cx="1981200" cy="581025"/>
+          </a:xfrm>
+          <a:prstGeom prst="roundRect">
+            <a:avLst/>
+          </a:prstGeom>
+        </p:spPr>
+        <p:style>
+          <a:lnRef idx="2">
+            <a:schemeClr val="accent1">
+              <a:shade val="15000"/>
+            </a:schemeClr>
+          </a:lnRef>
+          <a:fillRef idx="1">
+            <a:schemeClr val="accent1"/>
+          </a:fillRef>
+          <a:effectRef idx="0">
+            <a:schemeClr val="accent1"/>
+          </a:effectRef>
+          <a:fontRef idx="minor">
+            <a:schemeClr val="lt1"/>
+          </a:fontRef>
+        </p:style>
+        <p:txBody>
+          <a:bodyPr rtlCol="0" anchor="ctr"/>
+          <a:lstStyle/>
+          <a:p>
+            <a:pPr algn="ctr"/>
+            <a:r>
+              <a:rPr lang="en-US" altLang="ko-KR" sz="2400" dirty="0">
+                <a:latin typeface="D2Coding" panose="020B0609020101020101" pitchFamily="49" charset="-127"/>
+                <a:ea typeface="D2Coding" panose="020B0609020101020101" pitchFamily="49" charset="-127"/>
+              </a:rPr>
+              <a:t>LLM</a:t>
+            </a:r>
+            <a:endParaRPr lang="ko-KR" altLang="en-US" sz="2400" dirty="0">
+              <a:latin typeface="D2Coding" panose="020B0609020101020101" pitchFamily="49" charset="-127"/>
+              <a:ea typeface="D2Coding" panose="020B0609020101020101" pitchFamily="49" charset="-127"/>
+            </a:endParaRPr>
+          </a:p>
+        </p:txBody>
+      </p:sp>
+      <p:sp>
+        <p:nvSpPr>
+          <p:cNvPr id="13" name="직사각형 12">
+            <a:extLst>
+              <a:ext uri="{FF2B5EF4-FFF2-40B4-BE49-F238E27FC236}">
+                <a16:creationId xmlns:a16="http://schemas.microsoft.com/office/drawing/2014/main" id="{F3A90BD8-5D68-1227-66C5-6E49C36856B2}"/>
+              </a:ext>
+            </a:extLst>
+          </p:cNvPr>
+          <p:cNvSpPr/>
+          <p:nvPr/>
+        </p:nvSpPr>
+        <p:spPr>
+          <a:xfrm>
+            <a:off x="9104311" y="2629821"/>
+            <a:ext cx="1409700" cy="581025"/>
+          </a:xfrm>
+          <a:prstGeom prst="rect">
+            <a:avLst/>
+          </a:prstGeom>
+          <a:solidFill>
+            <a:schemeClr val="tx1"/>
+          </a:solidFill>
+        </p:spPr>
+        <p:style>
+          <a:lnRef idx="2">
+            <a:schemeClr val="accent1">
+              <a:shade val="15000"/>
+            </a:schemeClr>
+          </a:lnRef>
+          <a:fillRef idx="1">
+            <a:schemeClr val="accent1"/>
+          </a:fillRef>
+          <a:effectRef idx="0">
+            <a:schemeClr val="accent1"/>
+          </a:effectRef>
+          <a:fontRef idx="minor">
+            <a:schemeClr val="lt1"/>
+          </a:fontRef>
+        </p:style>
+        <p:txBody>
+          <a:bodyPr rtlCol="0" anchor="ctr"/>
+          <a:lstStyle/>
+          <a:p>
+            <a:pPr algn="ctr"/>
+            <a:r>
+              <a:rPr lang="en-US" altLang="ko-KR" sz="1600">
+                <a:latin typeface="D2Coding" panose="020B0609020101020101" pitchFamily="49" charset="-127"/>
+                <a:ea typeface="D2Coding" panose="020B0609020101020101" pitchFamily="49" charset="-127"/>
+              </a:rPr>
+              <a:t>RAG</a:t>
+            </a:r>
+            <a:endParaRPr lang="ko-KR" altLang="en-US" sz="1600" dirty="0">
+              <a:latin typeface="D2Coding" panose="020B0609020101020101" pitchFamily="49" charset="-127"/>
+              <a:ea typeface="D2Coding" panose="020B0609020101020101" pitchFamily="49" charset="-127"/>
+            </a:endParaRPr>
+          </a:p>
+        </p:txBody>
+      </p:sp>
+      <p:sp>
+        <p:nvSpPr>
+          <p:cNvPr id="14" name="직사각형 13">
+            <a:extLst>
+              <a:ext uri="{FF2B5EF4-FFF2-40B4-BE49-F238E27FC236}">
+                <a16:creationId xmlns:a16="http://schemas.microsoft.com/office/drawing/2014/main" id="{2859F438-2A98-9A5E-190B-411A05AFDF0C}"/>
+              </a:ext>
+            </a:extLst>
+          </p:cNvPr>
+          <p:cNvSpPr/>
+          <p:nvPr/>
+        </p:nvSpPr>
+        <p:spPr>
+          <a:xfrm>
+            <a:off x="9104311" y="3642990"/>
+            <a:ext cx="1409700" cy="581025"/>
+          </a:xfrm>
+          <a:prstGeom prst="rect">
+            <a:avLst/>
+          </a:prstGeom>
+          <a:solidFill>
+            <a:schemeClr val="tx1"/>
+          </a:solidFill>
+        </p:spPr>
+        <p:style>
+          <a:lnRef idx="2">
+            <a:schemeClr val="accent1">
+              <a:shade val="15000"/>
+            </a:schemeClr>
+          </a:lnRef>
+          <a:fillRef idx="1">
+            <a:schemeClr val="accent1"/>
+          </a:fillRef>
+          <a:effectRef idx="0">
+            <a:schemeClr val="accent1"/>
+          </a:effectRef>
+          <a:fontRef idx="minor">
+            <a:schemeClr val="lt1"/>
+          </a:fontRef>
+        </p:style>
+        <p:txBody>
+          <a:bodyPr rtlCol="0" anchor="ctr"/>
+          <a:lstStyle/>
+          <a:p>
+            <a:pPr algn="ctr"/>
+            <a:r>
+              <a:rPr lang="en-US" altLang="ko-KR" sz="1600" dirty="0">
+                <a:latin typeface="D2Coding" panose="020B0609020101020101" pitchFamily="49" charset="-127"/>
+                <a:ea typeface="D2Coding" panose="020B0609020101020101" pitchFamily="49" charset="-127"/>
+              </a:rPr>
+              <a:t>Fine Tuning</a:t>
+            </a:r>
+            <a:endParaRPr lang="ko-KR" altLang="en-US" sz="1600" dirty="0">
+              <a:latin typeface="D2Coding" panose="020B0609020101020101" pitchFamily="49" charset="-127"/>
+              <a:ea typeface="D2Coding" panose="020B0609020101020101" pitchFamily="49" charset="-127"/>
+            </a:endParaRPr>
+          </a:p>
+        </p:txBody>
+      </p:sp>
+      <p:sp>
+        <p:nvSpPr>
+          <p:cNvPr id="15" name="직사각형 14">
+            <a:extLst>
+              <a:ext uri="{FF2B5EF4-FFF2-40B4-BE49-F238E27FC236}">
+                <a16:creationId xmlns:a16="http://schemas.microsoft.com/office/drawing/2014/main" id="{AA3FBB09-5780-0889-ADB0-AACDEB911DD3}"/>
+              </a:ext>
+            </a:extLst>
+          </p:cNvPr>
+          <p:cNvSpPr/>
+          <p:nvPr/>
+        </p:nvSpPr>
+        <p:spPr>
+          <a:xfrm>
+            <a:off x="9104311" y="4656159"/>
+            <a:ext cx="1409700" cy="581025"/>
+          </a:xfrm>
+          <a:prstGeom prst="rect">
+            <a:avLst/>
+          </a:prstGeom>
+          <a:solidFill>
+            <a:schemeClr val="tx1"/>
+          </a:solidFill>
+        </p:spPr>
+        <p:style>
+          <a:lnRef idx="2">
+            <a:schemeClr val="accent1">
+              <a:shade val="15000"/>
+            </a:schemeClr>
+          </a:lnRef>
+          <a:fillRef idx="1">
+            <a:schemeClr val="accent1"/>
+          </a:fillRef>
+          <a:effectRef idx="0">
+            <a:schemeClr val="accent1"/>
+          </a:effectRef>
+          <a:fontRef idx="minor">
+            <a:schemeClr val="lt1"/>
+          </a:fontRef>
+        </p:style>
+        <p:txBody>
+          <a:bodyPr rtlCol="0" anchor="ctr"/>
+          <a:lstStyle/>
+          <a:p>
+            <a:pPr algn="ctr"/>
+            <a:r>
+              <a:rPr lang="en-US" altLang="ko-KR" sz="1600" dirty="0">
+                <a:latin typeface="D2Coding" panose="020B0609020101020101" pitchFamily="49" charset="-127"/>
+                <a:ea typeface="D2Coding" panose="020B0609020101020101" pitchFamily="49" charset="-127"/>
+              </a:rPr>
+              <a:t>Prompt Engineering</a:t>
+            </a:r>
+            <a:endParaRPr lang="ko-KR" altLang="en-US" sz="1600" dirty="0">
+              <a:latin typeface="D2Coding" panose="020B0609020101020101" pitchFamily="49" charset="-127"/>
+              <a:ea typeface="D2Coding" panose="020B0609020101020101" pitchFamily="49" charset="-127"/>
+            </a:endParaRPr>
+          </a:p>
+        </p:txBody>
+      </p:sp>
+    </p:spTree>
+    <p:extLst>
+      <p:ext uri="{BB962C8B-B14F-4D97-AF65-F5344CB8AC3E}">
+        <p14:creationId xmlns:p14="http://schemas.microsoft.com/office/powerpoint/2010/main" val="1981194732"/>
+      </p:ext>
+    </p:extLst>
+  </p:cSld>
+  <p:clrMapOvr>
+    <a:masterClrMapping/>
+  </p:clrMapOvr>
+</p:sld>
+</file>
+
+<file path=ppt/slides/slide17.xml><?xml version="1.0" encoding="utf-8"?>
+<p:sld xmlns:a="http://schemas.openxmlformats.org/drawingml/2006/main" xmlns:r="http://schemas.openxmlformats.org/officeDocument/2006/relationships" xmlns:p="http://schemas.openxmlformats.org/presentationml/2006/main">
+  <p:cSld>
+    <p:spTree>
+      <p:nvGrpSpPr>
+        <p:cNvPr id="1" name="">
+          <a:extLst>
+            <a:ext uri="{FF2B5EF4-FFF2-40B4-BE49-F238E27FC236}">
               <a16:creationId xmlns:a16="http://schemas.microsoft.com/office/drawing/2014/main" id="{0BAD4B57-93D9-0468-7551-29306C63BF7A}"/>
             </a:ext>
           </a:extLst>
@@ -5016,7 +5757,7 @@
             <a:fld id="{D57F1E4F-1CFF-5643-939E-217C01CDF565}" type="slidenum">
               <a:rPr lang="en-US" smtClean="0"/>
               <a:pPr/>
-              <a:t>15</a:t>
+              <a:t>17</a:t>
             </a:fld>
             <a:endParaRPr lang="en-US" dirty="0"/>
           </a:p>

--- a/01_Workflow with AI Agent.pptx
+++ b/01_Workflow with AI Agent.pptx
@@ -5,10 +5,10 @@
     <p:sldMasterId id="2147483660" r:id="rId1"/>
   </p:sldMasterIdLst>
   <p:notesMasterIdLst>
-    <p:notesMasterId r:id="rId19"/>
+    <p:notesMasterId r:id="rId20"/>
   </p:notesMasterIdLst>
   <p:handoutMasterIdLst>
-    <p:handoutMasterId r:id="rId20"/>
+    <p:handoutMasterId r:id="rId21"/>
   </p:handoutMasterIdLst>
   <p:sldIdLst>
     <p:sldId id="256" r:id="rId2"/>
@@ -28,6 +28,7 @@
     <p:sldId id="1159" r:id="rId16"/>
     <p:sldId id="1160" r:id="rId17"/>
     <p:sldId id="1147" r:id="rId18"/>
+    <p:sldId id="1161" r:id="rId19"/>
   </p:sldIdLst>
   <p:sldSz cx="12192000" cy="6858000"/>
   <p:notesSz cx="6858000" cy="9144000"/>
@@ -152,6 +153,7 @@
             <p14:sldId id="1159"/>
             <p14:sldId id="1160"/>
             <p14:sldId id="1147"/>
+            <p14:sldId id="1161"/>
           </p14:sldIdLst>
         </p14:section>
         <p14:section name="자세한 정보" id="{2CC34DB2-6590-42C0-AD4B-A04C6060184E}">
@@ -5917,6 +5919,1400 @@
     <p:extLst>
       <p:ext uri="{BB962C8B-B14F-4D97-AF65-F5344CB8AC3E}">
         <p14:creationId xmlns:p14="http://schemas.microsoft.com/office/powerpoint/2010/main" val="570096588"/>
+      </p:ext>
+    </p:extLst>
+  </p:cSld>
+  <p:clrMapOvr>
+    <a:masterClrMapping/>
+  </p:clrMapOvr>
+</p:sld>
+</file>
+
+<file path=ppt/slides/slide18.xml><?xml version="1.0" encoding="utf-8"?>
+<p:sld xmlns:a="http://schemas.openxmlformats.org/drawingml/2006/main" xmlns:r="http://schemas.openxmlformats.org/officeDocument/2006/relationships" xmlns:p="http://schemas.openxmlformats.org/presentationml/2006/main">
+  <p:cSld>
+    <p:spTree>
+      <p:nvGrpSpPr>
+        <p:cNvPr id="1" name="">
+          <a:extLst>
+            <a:ext uri="{FF2B5EF4-FFF2-40B4-BE49-F238E27FC236}">
+              <a16:creationId xmlns:a16="http://schemas.microsoft.com/office/drawing/2014/main" id="{D0C8BD28-DB95-62F9-8D53-79638B3531AD}"/>
+            </a:ext>
+          </a:extLst>
+        </p:cNvPr>
+        <p:cNvGrpSpPr/>
+        <p:nvPr/>
+      </p:nvGrpSpPr>
+      <p:grpSpPr>
+        <a:xfrm>
+          <a:off x="0" y="0"/>
+          <a:ext cx="0" cy="0"/>
+          <a:chOff x="0" y="0"/>
+          <a:chExt cx="0" cy="0"/>
+        </a:xfrm>
+      </p:grpSpPr>
+      <p:sp>
+        <p:nvSpPr>
+          <p:cNvPr id="4" name="슬라이드 번호 개체 틀 3">
+            <a:extLst>
+              <a:ext uri="{FF2B5EF4-FFF2-40B4-BE49-F238E27FC236}">
+                <a16:creationId xmlns:a16="http://schemas.microsoft.com/office/drawing/2014/main" id="{EC32F9EC-F032-0F7E-ED31-C7237DDB365C}"/>
+              </a:ext>
+            </a:extLst>
+          </p:cNvPr>
+          <p:cNvSpPr>
+            <a:spLocks noGrp="1"/>
+          </p:cNvSpPr>
+          <p:nvPr>
+            <p:ph type="sldNum" sz="quarter" idx="12"/>
+          </p:nvPr>
+        </p:nvSpPr>
+        <p:spPr>
+          <a:xfrm>
+            <a:off x="10514011" y="6036261"/>
+            <a:ext cx="753545" cy="365125"/>
+          </a:xfrm>
+        </p:spPr>
+        <p:txBody>
+          <a:bodyPr/>
+          <a:lstStyle/>
+          <a:p>
+            <a:fld id="{D57F1E4F-1CFF-5643-939E-217C01CDF565}" type="slidenum">
+              <a:rPr lang="en-US" smtClean="0"/>
+              <a:pPr/>
+              <a:t>18</a:t>
+            </a:fld>
+            <a:endParaRPr lang="en-US" dirty="0"/>
+          </a:p>
+        </p:txBody>
+      </p:sp>
+      <p:sp>
+        <p:nvSpPr>
+          <p:cNvPr id="3" name="제목 1">
+            <a:extLst>
+              <a:ext uri="{FF2B5EF4-FFF2-40B4-BE49-F238E27FC236}">
+                <a16:creationId xmlns:a16="http://schemas.microsoft.com/office/drawing/2014/main" id="{F47161F7-4E40-9AA5-77DB-5C9C8F8DB001}"/>
+              </a:ext>
+            </a:extLst>
+          </p:cNvPr>
+          <p:cNvSpPr txBox="1">
+            <a:spLocks/>
+          </p:cNvSpPr>
+          <p:nvPr/>
+        </p:nvSpPr>
+        <p:spPr>
+          <a:xfrm>
+            <a:off x="475645" y="481983"/>
+            <a:ext cx="10353762" cy="766439"/>
+          </a:xfrm>
+          <a:prstGeom prst="rect">
+            <a:avLst/>
+          </a:prstGeom>
+        </p:spPr>
+        <p:txBody>
+          <a:bodyPr vert="horz" lIns="91440" tIns="45720" rIns="91440" bIns="45720" rtlCol="0" anchor="ctr">
+            <a:normAutofit/>
+          </a:bodyPr>
+          <a:lstStyle>
+            <a:lvl1pPr algn="ctr" defTabSz="914400" rtl="0" eaLnBrk="1" latinLnBrk="1" hangingPunct="1">
+              <a:lnSpc>
+                <a:spcPct val="90000"/>
+              </a:lnSpc>
+              <a:spcBef>
+                <a:spcPct val="0"/>
+              </a:spcBef>
+              <a:buNone/>
+              <a:defRPr sz="3200" kern="1200" cap="all" baseline="0">
+                <a:solidFill>
+                  <a:schemeClr val="tx1"/>
+                </a:solidFill>
+                <a:effectLst/>
+                <a:latin typeface="Batang" panose="02030600000101010101" pitchFamily="18" charset="-127"/>
+                <a:ea typeface="Batang" panose="02030600000101010101" pitchFamily="18" charset="-127"/>
+                <a:cs typeface="+mj-cs"/>
+              </a:defRPr>
+            </a:lvl1pPr>
+          </a:lstStyle>
+          <a:p>
+            <a:pPr algn="l"/>
+            <a:r>
+              <a:rPr lang="en-US" altLang="ko-KR" sz="2800" b="1" cap="none" dirty="0">
+                <a:latin typeface="Lora" pitchFamily="2" charset="0"/>
+              </a:rPr>
+              <a:t>Harness Engineering</a:t>
+            </a:r>
+          </a:p>
+        </p:txBody>
+      </p:sp>
+      <p:graphicFrame>
+        <p:nvGraphicFramePr>
+          <p:cNvPr id="5" name="표 4">
+            <a:extLst>
+              <a:ext uri="{FF2B5EF4-FFF2-40B4-BE49-F238E27FC236}">
+                <a16:creationId xmlns:a16="http://schemas.microsoft.com/office/drawing/2014/main" id="{8C134482-2CD9-E3B3-133A-BC9B2BE356E9}"/>
+              </a:ext>
+            </a:extLst>
+          </p:cNvPr>
+          <p:cNvGraphicFramePr>
+            <a:graphicFrameLocks noGrp="1"/>
+          </p:cNvGraphicFramePr>
+          <p:nvPr>
+            <p:extLst>
+              <p:ext uri="{D42A27DB-BD31-4B8C-83A1-F6EECF244321}">
+                <p14:modId xmlns:p14="http://schemas.microsoft.com/office/powerpoint/2010/main" val="1430182823"/>
+              </p:ext>
+            </p:extLst>
+          </p:nvPr>
+        </p:nvGraphicFramePr>
+        <p:xfrm>
+          <a:off x="638885" y="1543208"/>
+          <a:ext cx="11114964" cy="4043092"/>
+        </p:xfrm>
+        <a:graphic>
+          <a:graphicData uri="http://schemas.openxmlformats.org/drawingml/2006/table">
+            <a:tbl>
+              <a:tblPr/>
+              <a:tblGrid>
+                <a:gridCol w="2675815">
+                  <a:extLst>
+                    <a:ext uri="{9D8B030D-6E8A-4147-A177-3AD203B41FA5}">
+                      <a16:colId xmlns:a16="http://schemas.microsoft.com/office/drawing/2014/main" val="569965403"/>
+                    </a:ext>
+                  </a:extLst>
+                </a:gridCol>
+                <a:gridCol w="3724275">
+                  <a:extLst>
+                    <a:ext uri="{9D8B030D-6E8A-4147-A177-3AD203B41FA5}">
+                      <a16:colId xmlns:a16="http://schemas.microsoft.com/office/drawing/2014/main" val="296715999"/>
+                    </a:ext>
+                  </a:extLst>
+                </a:gridCol>
+                <a:gridCol w="4714874">
+                  <a:extLst>
+                    <a:ext uri="{9D8B030D-6E8A-4147-A177-3AD203B41FA5}">
+                      <a16:colId xmlns:a16="http://schemas.microsoft.com/office/drawing/2014/main" val="3804051023"/>
+                    </a:ext>
+                  </a:extLst>
+                </a:gridCol>
+              </a:tblGrid>
+              <a:tr h="258588">
+                <a:tc>
+                  <a:txBody>
+                    <a:bodyPr/>
+                    <a:lstStyle/>
+                    <a:p>
+                      <a:pPr algn="l" fontAlgn="t">
+                        <a:buNone/>
+                      </a:pPr>
+                      <a:r>
+                        <a:rPr lang="ko-KR" altLang="en-US" sz="1600" b="0" dirty="0">
+                          <a:effectLst/>
+                          <a:latin typeface="D2Coding" panose="020B0609020101020101" pitchFamily="49" charset="-127"/>
+                          <a:ea typeface="D2Coding" panose="020B0609020101020101" pitchFamily="49" charset="-127"/>
+                        </a:rPr>
+                        <a:t>요즘 말</a:t>
+                      </a:r>
+                    </a:p>
+                  </a:txBody>
+                  <a:tcPr marL="59674" marR="59674" marT="39783" marB="39783">
+                    <a:lnL w="7620" cap="flat" cmpd="sng" algn="ctr">
+                      <a:solidFill>
+                        <a:srgbClr val="DDD8CF"/>
+                      </a:solidFill>
+                      <a:prstDash val="solid"/>
+                      <a:round/>
+                      <a:headEnd type="none" w="med" len="med"/>
+                      <a:tailEnd type="none" w="med" len="med"/>
+                    </a:lnL>
+                    <a:lnR w="7620" cap="flat" cmpd="sng" algn="ctr">
+                      <a:solidFill>
+                        <a:srgbClr val="DDD8CF"/>
+                      </a:solidFill>
+                      <a:prstDash val="solid"/>
+                      <a:round/>
+                      <a:headEnd type="none" w="med" len="med"/>
+                      <a:tailEnd type="none" w="med" len="med"/>
+                    </a:lnR>
+                    <a:lnT w="7620" cap="flat" cmpd="sng" algn="ctr">
+                      <a:solidFill>
+                        <a:srgbClr val="DDD8CF"/>
+                      </a:solidFill>
+                      <a:prstDash val="solid"/>
+                      <a:round/>
+                      <a:headEnd type="none" w="med" len="med"/>
+                      <a:tailEnd type="none" w="med" len="med"/>
+                    </a:lnT>
+                    <a:lnB w="7620" cap="flat" cmpd="sng" algn="ctr">
+                      <a:solidFill>
+                        <a:srgbClr val="DCDCDC"/>
+                      </a:solidFill>
+                      <a:prstDash val="solid"/>
+                      <a:round/>
+                      <a:headEnd type="none" w="med" len="med"/>
+                      <a:tailEnd type="none" w="med" len="med"/>
+                    </a:lnB>
+                    <a:solidFill>
+                      <a:srgbClr val="F8F9F9"/>
+                    </a:solidFill>
+                  </a:tcPr>
+                </a:tc>
+                <a:tc>
+                  <a:txBody>
+                    <a:bodyPr/>
+                    <a:lstStyle/>
+                    <a:p>
+                      <a:pPr algn="l" fontAlgn="t">
+                        <a:buNone/>
+                      </a:pPr>
+                      <a:r>
+                        <a:rPr lang="ko-KR" altLang="en-US" sz="1600" b="0">
+                          <a:effectLst/>
+                          <a:latin typeface="D2Coding" panose="020B0609020101020101" pitchFamily="49" charset="-127"/>
+                          <a:ea typeface="D2Coding" panose="020B0609020101020101" pitchFamily="49" charset="-127"/>
+                        </a:rPr>
+                        <a:t>떠올리면 되는 고전</a:t>
+                      </a:r>
+                    </a:p>
+                  </a:txBody>
+                  <a:tcPr marL="59674" marR="59674" marT="39783" marB="39783">
+                    <a:lnL w="7620" cap="flat" cmpd="sng" algn="ctr">
+                      <a:solidFill>
+                        <a:srgbClr val="DDD8CF"/>
+                      </a:solidFill>
+                      <a:prstDash val="solid"/>
+                      <a:round/>
+                      <a:headEnd type="none" w="med" len="med"/>
+                      <a:tailEnd type="none" w="med" len="med"/>
+                    </a:lnL>
+                    <a:lnR w="7620" cap="flat" cmpd="sng" algn="ctr">
+                      <a:solidFill>
+                        <a:srgbClr val="70B766"/>
+                      </a:solidFill>
+                      <a:prstDash val="solid"/>
+                      <a:round/>
+                      <a:headEnd type="none" w="med" len="med"/>
+                      <a:tailEnd type="none" w="med" len="med"/>
+                    </a:lnR>
+                    <a:lnT w="7620" cap="flat" cmpd="sng" algn="ctr">
+                      <a:solidFill>
+                        <a:srgbClr val="DDD8CF"/>
+                      </a:solidFill>
+                      <a:prstDash val="solid"/>
+                      <a:round/>
+                      <a:headEnd type="none" w="med" len="med"/>
+                      <a:tailEnd type="none" w="med" len="med"/>
+                    </a:lnT>
+                    <a:lnB w="7620" cap="flat" cmpd="sng" algn="ctr">
+                      <a:solidFill>
+                        <a:srgbClr val="DCDCDC"/>
+                      </a:solidFill>
+                      <a:prstDash val="solid"/>
+                      <a:round/>
+                      <a:headEnd type="none" w="med" len="med"/>
+                      <a:tailEnd type="none" w="med" len="med"/>
+                    </a:lnB>
+                    <a:solidFill>
+                      <a:srgbClr val="F8F9F9"/>
+                    </a:solidFill>
+                  </a:tcPr>
+                </a:tc>
+                <a:tc>
+                  <a:txBody>
+                    <a:bodyPr/>
+                    <a:lstStyle/>
+                    <a:p>
+                      <a:pPr algn="l" fontAlgn="t">
+                        <a:buNone/>
+                      </a:pPr>
+                      <a:r>
+                        <a:rPr lang="ko-KR" altLang="en-US" sz="1600" b="0">
+                          <a:effectLst/>
+                          <a:latin typeface="D2Coding" panose="020B0609020101020101" pitchFamily="49" charset="-127"/>
+                          <a:ea typeface="D2Coding" panose="020B0609020101020101" pitchFamily="49" charset="-127"/>
+                        </a:rPr>
+                        <a:t>한 줄 요약</a:t>
+                      </a:r>
+                    </a:p>
+                  </a:txBody>
+                  <a:tcPr marL="59674" marR="59674" marT="39783" marB="39783">
+                    <a:lnL w="7620" cap="flat" cmpd="sng" algn="ctr">
+                      <a:solidFill>
+                        <a:srgbClr val="70B766"/>
+                      </a:solidFill>
+                      <a:prstDash val="solid"/>
+                      <a:round/>
+                      <a:headEnd type="none" w="med" len="med"/>
+                      <a:tailEnd type="none" w="med" len="med"/>
+                    </a:lnL>
+                    <a:lnR>
+                      <a:noFill/>
+                    </a:lnR>
+                    <a:lnT w="7620" cap="flat" cmpd="sng" algn="ctr">
+                      <a:solidFill>
+                        <a:srgbClr val="70B766"/>
+                      </a:solidFill>
+                      <a:prstDash val="solid"/>
+                      <a:round/>
+                      <a:headEnd type="none" w="med" len="med"/>
+                      <a:tailEnd type="none" w="med" len="med"/>
+                    </a:lnT>
+                    <a:lnB w="7620" cap="flat" cmpd="sng" algn="ctr">
+                      <a:solidFill>
+                        <a:srgbClr val="90B666"/>
+                      </a:solidFill>
+                      <a:prstDash val="solid"/>
+                      <a:round/>
+                      <a:headEnd type="none" w="med" len="med"/>
+                      <a:tailEnd type="none" w="med" len="med"/>
+                    </a:lnB>
+                    <a:solidFill>
+                      <a:srgbClr val="F8F9F9"/>
+                    </a:solidFill>
+                  </a:tcPr>
+                </a:tc>
+                <a:extLst>
+                  <a:ext uri="{0D108BD9-81ED-4DB2-BD59-A6C34878D82A}">
+                    <a16:rowId xmlns:a16="http://schemas.microsoft.com/office/drawing/2014/main" val="2892522137"/>
+                  </a:ext>
+                </a:extLst>
+              </a:tr>
+              <a:tr h="974677">
+                <a:tc>
+                  <a:txBody>
+                    <a:bodyPr/>
+                    <a:lstStyle/>
+                    <a:p>
+                      <a:pPr fontAlgn="t">
+                        <a:buNone/>
+                      </a:pPr>
+                      <a:r>
+                        <a:rPr lang="ko-KR" altLang="en-US" sz="1600" b="0" dirty="0" err="1">
+                          <a:effectLst/>
+                          <a:latin typeface="D2Coding" panose="020B0609020101020101" pitchFamily="49" charset="-127"/>
+                          <a:ea typeface="D2Coding" panose="020B0609020101020101" pitchFamily="49" charset="-127"/>
+                        </a:rPr>
+                        <a:t>바이브</a:t>
+                      </a:r>
+                      <a:r>
+                        <a:rPr lang="ko-KR" altLang="en-US" sz="1600" b="0" dirty="0">
+                          <a:effectLst/>
+                          <a:latin typeface="D2Coding" panose="020B0609020101020101" pitchFamily="49" charset="-127"/>
+                          <a:ea typeface="D2Coding" panose="020B0609020101020101" pitchFamily="49" charset="-127"/>
+                        </a:rPr>
+                        <a:t> 코딩 </a:t>
+                      </a:r>
+                      <a:r>
+                        <a:rPr lang="en-US" altLang="ko-KR" sz="1600" b="0" dirty="0">
+                          <a:effectLst/>
+                          <a:latin typeface="D2Coding" panose="020B0609020101020101" pitchFamily="49" charset="-127"/>
+                          <a:ea typeface="D2Coding" panose="020B0609020101020101" pitchFamily="49" charset="-127"/>
+                        </a:rPr>
+                        <a:t>(</a:t>
+                      </a:r>
+                      <a:r>
+                        <a:rPr lang="en-US" sz="1600" b="0" dirty="0">
+                          <a:effectLst/>
+                          <a:latin typeface="D2Coding" panose="020B0609020101020101" pitchFamily="49" charset="-127"/>
+                          <a:ea typeface="D2Coding" panose="020B0609020101020101" pitchFamily="49" charset="-127"/>
+                        </a:rPr>
+                        <a:t>vibe coding)</a:t>
+                      </a:r>
+                    </a:p>
+                  </a:txBody>
+                  <a:tcPr marL="59674" marR="59674" marT="39783" marB="39783">
+                    <a:lnL w="7620" cap="flat" cmpd="sng" algn="ctr">
+                      <a:solidFill>
+                        <a:srgbClr val="DDD8CF"/>
+                      </a:solidFill>
+                      <a:prstDash val="solid"/>
+                      <a:round/>
+                      <a:headEnd type="none" w="med" len="med"/>
+                      <a:tailEnd type="none" w="med" len="med"/>
+                    </a:lnL>
+                    <a:lnR w="7620" cap="flat" cmpd="sng" algn="ctr">
+                      <a:solidFill>
+                        <a:srgbClr val="DDD8CF"/>
+                      </a:solidFill>
+                      <a:prstDash val="solid"/>
+                      <a:round/>
+                      <a:headEnd type="none" w="med" len="med"/>
+                      <a:tailEnd type="none" w="med" len="med"/>
+                    </a:lnR>
+                    <a:lnT w="7620" cap="flat" cmpd="sng" algn="ctr">
+                      <a:solidFill>
+                        <a:srgbClr val="DCDCDC"/>
+                      </a:solidFill>
+                      <a:prstDash val="solid"/>
+                      <a:round/>
+                      <a:headEnd type="none" w="med" len="med"/>
+                      <a:tailEnd type="none" w="med" len="med"/>
+                    </a:lnT>
+                    <a:lnB w="7620" cap="flat" cmpd="sng" algn="ctr">
+                      <a:solidFill>
+                        <a:srgbClr val="DCDCDC"/>
+                      </a:solidFill>
+                      <a:prstDash val="solid"/>
+                      <a:round/>
+                      <a:headEnd type="none" w="med" len="med"/>
+                      <a:tailEnd type="none" w="med" len="med"/>
+                    </a:lnB>
+                    <a:solidFill>
+                      <a:srgbClr val="FFFFFF"/>
+                    </a:solidFill>
+                  </a:tcPr>
+                </a:tc>
+                <a:tc>
+                  <a:txBody>
+                    <a:bodyPr/>
+                    <a:lstStyle/>
+                    <a:p>
+                      <a:pPr fontAlgn="t">
+                        <a:buNone/>
+                      </a:pPr>
+                      <a:r>
+                        <a:rPr lang="ko-KR" altLang="en-US" sz="1600" b="0" dirty="0">
+                          <a:effectLst/>
+                          <a:latin typeface="D2Coding" panose="020B0609020101020101" pitchFamily="49" charset="-127"/>
+                          <a:ea typeface="D2Coding" panose="020B0609020101020101" pitchFamily="49" charset="-127"/>
+                        </a:rPr>
+                        <a:t>프로토타이핑 </a:t>
+                      </a:r>
+                      <a:r>
+                        <a:rPr lang="en-US" altLang="ko-KR" sz="1600" b="0" dirty="0">
+                          <a:effectLst/>
+                          <a:latin typeface="D2Coding" panose="020B0609020101020101" pitchFamily="49" charset="-127"/>
+                          <a:ea typeface="D2Coding" panose="020B0609020101020101" pitchFamily="49" charset="-127"/>
+                        </a:rPr>
+                        <a:t>(prototyping)</a:t>
+                      </a:r>
+                      <a:endParaRPr lang="ko-KR" altLang="en-US" sz="1600" b="0" dirty="0">
+                        <a:effectLst/>
+                        <a:latin typeface="D2Coding" panose="020B0609020101020101" pitchFamily="49" charset="-127"/>
+                        <a:ea typeface="D2Coding" panose="020B0609020101020101" pitchFamily="49" charset="-127"/>
+                      </a:endParaRPr>
+                    </a:p>
+                  </a:txBody>
+                  <a:tcPr marL="59674" marR="59674" marT="39783" marB="39783">
+                    <a:lnL w="7620" cap="flat" cmpd="sng" algn="ctr">
+                      <a:solidFill>
+                        <a:srgbClr val="DDD8CF"/>
+                      </a:solidFill>
+                      <a:prstDash val="solid"/>
+                      <a:round/>
+                      <a:headEnd type="none" w="med" len="med"/>
+                      <a:tailEnd type="none" w="med" len="med"/>
+                    </a:lnL>
+                    <a:lnR w="7620" cap="flat" cmpd="sng" algn="ctr">
+                      <a:solidFill>
+                        <a:srgbClr val="90B666"/>
+                      </a:solidFill>
+                      <a:prstDash val="solid"/>
+                      <a:round/>
+                      <a:headEnd type="none" w="med" len="med"/>
+                      <a:tailEnd type="none" w="med" len="med"/>
+                    </a:lnR>
+                    <a:lnT w="7620" cap="flat" cmpd="sng" algn="ctr">
+                      <a:solidFill>
+                        <a:srgbClr val="DCDCDC"/>
+                      </a:solidFill>
+                      <a:prstDash val="solid"/>
+                      <a:round/>
+                      <a:headEnd type="none" w="med" len="med"/>
+                      <a:tailEnd type="none" w="med" len="med"/>
+                    </a:lnT>
+                    <a:lnB w="7620" cap="flat" cmpd="sng" algn="ctr">
+                      <a:solidFill>
+                        <a:srgbClr val="DCDCDC"/>
+                      </a:solidFill>
+                      <a:prstDash val="solid"/>
+                      <a:round/>
+                      <a:headEnd type="none" w="med" len="med"/>
+                      <a:tailEnd type="none" w="med" len="med"/>
+                    </a:lnB>
+                    <a:solidFill>
+                      <a:srgbClr val="FFFFFF"/>
+                    </a:solidFill>
+                  </a:tcPr>
+                </a:tc>
+                <a:tc>
+                  <a:txBody>
+                    <a:bodyPr/>
+                    <a:lstStyle/>
+                    <a:p>
+                      <a:pPr fontAlgn="t">
+                        <a:buNone/>
+                      </a:pPr>
+                      <a:r>
+                        <a:rPr lang="ko-KR" altLang="en-US" sz="1600" b="0">
+                          <a:effectLst/>
+                          <a:latin typeface="D2Coding" panose="020B0609020101020101" pitchFamily="49" charset="-127"/>
+                          <a:ea typeface="D2Coding" panose="020B0609020101020101" pitchFamily="49" charset="-127"/>
+                        </a:rPr>
+                        <a:t>느낌 가는 대로 빠르게 만들어 던져보는 스케치</a:t>
+                      </a:r>
+                      <a:r>
+                        <a:rPr lang="en-US" altLang="ko-KR" sz="1600" b="0">
+                          <a:effectLst/>
+                          <a:latin typeface="D2Coding" panose="020B0609020101020101" pitchFamily="49" charset="-127"/>
+                          <a:ea typeface="D2Coding" panose="020B0609020101020101" pitchFamily="49" charset="-127"/>
+                        </a:rPr>
+                        <a:t>. </a:t>
+                      </a:r>
+                      <a:r>
+                        <a:rPr lang="ko-KR" altLang="en-US" sz="1600" b="0">
+                          <a:effectLst/>
+                          <a:latin typeface="D2Coding" panose="020B0609020101020101" pitchFamily="49" charset="-127"/>
+                          <a:ea typeface="D2Coding" panose="020B0609020101020101" pitchFamily="49" charset="-127"/>
+                        </a:rPr>
+                        <a:t>맘에 안 들면 버리는 게 당연한 </a:t>
+                      </a:r>
+                      <a:r>
+                        <a:rPr lang="en-US" altLang="ko-KR" sz="1600" b="0">
+                          <a:effectLst/>
+                          <a:latin typeface="D2Coding" panose="020B0609020101020101" pitchFamily="49" charset="-127"/>
+                          <a:ea typeface="D2Coding" panose="020B0609020101020101" pitchFamily="49" charset="-127"/>
+                        </a:rPr>
+                        <a:t>1</a:t>
+                      </a:r>
+                      <a:r>
+                        <a:rPr lang="ko-KR" altLang="en-US" sz="1600" b="0">
+                          <a:effectLst/>
+                          <a:latin typeface="D2Coding" panose="020B0609020101020101" pitchFamily="49" charset="-127"/>
+                          <a:ea typeface="D2Coding" panose="020B0609020101020101" pitchFamily="49" charset="-127"/>
+                        </a:rPr>
+                        <a:t>회용</a:t>
+                      </a:r>
+                      <a:r>
+                        <a:rPr lang="en-US" altLang="ko-KR" sz="1600" b="0">
+                          <a:effectLst/>
+                          <a:latin typeface="D2Coding" panose="020B0609020101020101" pitchFamily="49" charset="-127"/>
+                          <a:ea typeface="D2Coding" panose="020B0609020101020101" pitchFamily="49" charset="-127"/>
+                        </a:rPr>
+                        <a:t>.</a:t>
+                      </a:r>
+                    </a:p>
+                  </a:txBody>
+                  <a:tcPr marL="59674" marR="59674" marT="39783" marB="39783">
+                    <a:lnL w="7620" cap="flat" cmpd="sng" algn="ctr">
+                      <a:solidFill>
+                        <a:srgbClr val="90B666"/>
+                      </a:solidFill>
+                      <a:prstDash val="solid"/>
+                      <a:round/>
+                      <a:headEnd type="none" w="med" len="med"/>
+                      <a:tailEnd type="none" w="med" len="med"/>
+                    </a:lnL>
+                    <a:lnR>
+                      <a:noFill/>
+                    </a:lnR>
+                    <a:lnT w="7620" cap="flat" cmpd="sng" algn="ctr">
+                      <a:solidFill>
+                        <a:srgbClr val="90B666"/>
+                      </a:solidFill>
+                      <a:prstDash val="solid"/>
+                      <a:round/>
+                      <a:headEnd type="none" w="med" len="med"/>
+                      <a:tailEnd type="none" w="med" len="med"/>
+                    </a:lnT>
+                    <a:lnB w="7620" cap="flat" cmpd="sng" algn="ctr">
+                      <a:solidFill>
+                        <a:srgbClr val="50B166"/>
+                      </a:solidFill>
+                      <a:prstDash val="solid"/>
+                      <a:round/>
+                      <a:headEnd type="none" w="med" len="med"/>
+                      <a:tailEnd type="none" w="med" len="med"/>
+                    </a:lnB>
+                    <a:solidFill>
+                      <a:srgbClr val="FFFFFF"/>
+                    </a:solidFill>
+                  </a:tcPr>
+                </a:tc>
+                <a:extLst>
+                  <a:ext uri="{0D108BD9-81ED-4DB2-BD59-A6C34878D82A}">
+                    <a16:rowId xmlns:a16="http://schemas.microsoft.com/office/drawing/2014/main" val="532239784"/>
+                  </a:ext>
+                </a:extLst>
+              </a:tr>
+              <a:tr h="974677">
+                <a:tc>
+                  <a:txBody>
+                    <a:bodyPr/>
+                    <a:lstStyle/>
+                    <a:p>
+                      <a:pPr fontAlgn="t">
+                        <a:buNone/>
+                      </a:pPr>
+                      <a:r>
+                        <a:rPr lang="ko-KR" altLang="en-US" sz="1600" b="0">
+                          <a:effectLst/>
+                          <a:latin typeface="D2Coding" panose="020B0609020101020101" pitchFamily="49" charset="-127"/>
+                          <a:ea typeface="D2Coding" panose="020B0609020101020101" pitchFamily="49" charset="-127"/>
+                        </a:rPr>
+                        <a:t>스펙 코딩 </a:t>
+                      </a:r>
+                      <a:r>
+                        <a:rPr lang="en-US" altLang="ko-KR" sz="1600" b="0">
+                          <a:effectLst/>
+                          <a:latin typeface="D2Coding" panose="020B0609020101020101" pitchFamily="49" charset="-127"/>
+                          <a:ea typeface="D2Coding" panose="020B0609020101020101" pitchFamily="49" charset="-127"/>
+                        </a:rPr>
+                        <a:t>(</a:t>
+                      </a:r>
+                      <a:r>
+                        <a:rPr lang="en-US" sz="1600" b="0">
+                          <a:effectLst/>
+                          <a:latin typeface="D2Coding" panose="020B0609020101020101" pitchFamily="49" charset="-127"/>
+                          <a:ea typeface="D2Coding" panose="020B0609020101020101" pitchFamily="49" charset="-127"/>
+                        </a:rPr>
+                        <a:t>spec coding)</a:t>
+                      </a:r>
+                    </a:p>
+                  </a:txBody>
+                  <a:tcPr marL="59674" marR="59674" marT="39783" marB="39783">
+                    <a:lnL w="7620" cap="flat" cmpd="sng" algn="ctr">
+                      <a:solidFill>
+                        <a:srgbClr val="DDD8CF"/>
+                      </a:solidFill>
+                      <a:prstDash val="solid"/>
+                      <a:round/>
+                      <a:headEnd type="none" w="med" len="med"/>
+                      <a:tailEnd type="none" w="med" len="med"/>
+                    </a:lnL>
+                    <a:lnR w="7620" cap="flat" cmpd="sng" algn="ctr">
+                      <a:solidFill>
+                        <a:srgbClr val="DDD8CF"/>
+                      </a:solidFill>
+                      <a:prstDash val="solid"/>
+                      <a:round/>
+                      <a:headEnd type="none" w="med" len="med"/>
+                      <a:tailEnd type="none" w="med" len="med"/>
+                    </a:lnR>
+                    <a:lnT w="7620" cap="flat" cmpd="sng" algn="ctr">
+                      <a:solidFill>
+                        <a:srgbClr val="DCDCDC"/>
+                      </a:solidFill>
+                      <a:prstDash val="solid"/>
+                      <a:round/>
+                      <a:headEnd type="none" w="med" len="med"/>
+                      <a:tailEnd type="none" w="med" len="med"/>
+                    </a:lnT>
+                    <a:lnB w="7620" cap="flat" cmpd="sng" algn="ctr">
+                      <a:solidFill>
+                        <a:srgbClr val="DCDCDC"/>
+                      </a:solidFill>
+                      <a:prstDash val="solid"/>
+                      <a:round/>
+                      <a:headEnd type="none" w="med" len="med"/>
+                      <a:tailEnd type="none" w="med" len="med"/>
+                    </a:lnB>
+                    <a:solidFill>
+                      <a:srgbClr val="FFFFFF"/>
+                    </a:solidFill>
+                  </a:tcPr>
+                </a:tc>
+                <a:tc>
+                  <a:txBody>
+                    <a:bodyPr/>
+                    <a:lstStyle/>
+                    <a:p>
+                      <a:pPr fontAlgn="t">
+                        <a:buNone/>
+                      </a:pPr>
+                      <a:r>
+                        <a:rPr lang="ko-KR" altLang="en-US" sz="1600" b="0" dirty="0">
+                          <a:effectLst/>
+                          <a:latin typeface="D2Coding" panose="020B0609020101020101" pitchFamily="49" charset="-127"/>
+                          <a:ea typeface="D2Coding" panose="020B0609020101020101" pitchFamily="49" charset="-127"/>
+                        </a:rPr>
+                        <a:t>요구공학 </a:t>
+                      </a:r>
+                      <a:r>
+                        <a:rPr lang="en-US" altLang="ko-KR" sz="1600" b="0" dirty="0">
+                          <a:effectLst/>
+                          <a:latin typeface="D2Coding" panose="020B0609020101020101" pitchFamily="49" charset="-127"/>
+                          <a:ea typeface="D2Coding" panose="020B0609020101020101" pitchFamily="49" charset="-127"/>
+                        </a:rPr>
+                        <a:t>(</a:t>
+                      </a:r>
+                      <a:r>
+                        <a:rPr lang="en-US" sz="1600" b="0" dirty="0">
+                          <a:effectLst/>
+                          <a:latin typeface="D2Coding" panose="020B0609020101020101" pitchFamily="49" charset="-127"/>
+                          <a:ea typeface="D2Coding" panose="020B0609020101020101" pitchFamily="49" charset="-127"/>
+                        </a:rPr>
+                        <a:t>requirements engineering)·</a:t>
+                      </a:r>
+                      <a:r>
+                        <a:rPr lang="ko-KR" altLang="en-US" sz="1600" b="0" dirty="0">
+                          <a:effectLst/>
+                          <a:latin typeface="D2Coding" panose="020B0609020101020101" pitchFamily="49" charset="-127"/>
+                          <a:ea typeface="D2Coding" panose="020B0609020101020101" pitchFamily="49" charset="-127"/>
+                        </a:rPr>
+                        <a:t>분석</a:t>
+                      </a:r>
+                      <a:r>
+                        <a:rPr lang="en-US" altLang="ko-KR" sz="1600" b="0" dirty="0">
+                          <a:effectLst/>
+                          <a:latin typeface="D2Coding" panose="020B0609020101020101" pitchFamily="49" charset="-127"/>
+                          <a:ea typeface="D2Coding" panose="020B0609020101020101" pitchFamily="49" charset="-127"/>
+                        </a:rPr>
+                        <a:t>·</a:t>
+                      </a:r>
+                      <a:r>
+                        <a:rPr lang="ko-KR" altLang="en-US" sz="1600" b="0" dirty="0">
+                          <a:effectLst/>
+                          <a:latin typeface="D2Coding" panose="020B0609020101020101" pitchFamily="49" charset="-127"/>
+                          <a:ea typeface="D2Coding" panose="020B0609020101020101" pitchFamily="49" charset="-127"/>
+                        </a:rPr>
+                        <a:t>설계</a:t>
+                      </a:r>
+                    </a:p>
+                  </a:txBody>
+                  <a:tcPr marL="59674" marR="59674" marT="39783" marB="39783">
+                    <a:lnL w="7620" cap="flat" cmpd="sng" algn="ctr">
+                      <a:solidFill>
+                        <a:srgbClr val="DDD8CF"/>
+                      </a:solidFill>
+                      <a:prstDash val="solid"/>
+                      <a:round/>
+                      <a:headEnd type="none" w="med" len="med"/>
+                      <a:tailEnd type="none" w="med" len="med"/>
+                    </a:lnL>
+                    <a:lnR w="7620" cap="flat" cmpd="sng" algn="ctr">
+                      <a:solidFill>
+                        <a:srgbClr val="50B166"/>
+                      </a:solidFill>
+                      <a:prstDash val="solid"/>
+                      <a:round/>
+                      <a:headEnd type="none" w="med" len="med"/>
+                      <a:tailEnd type="none" w="med" len="med"/>
+                    </a:lnR>
+                    <a:lnT w="7620" cap="flat" cmpd="sng" algn="ctr">
+                      <a:solidFill>
+                        <a:srgbClr val="DCDCDC"/>
+                      </a:solidFill>
+                      <a:prstDash val="solid"/>
+                      <a:round/>
+                      <a:headEnd type="none" w="med" len="med"/>
+                      <a:tailEnd type="none" w="med" len="med"/>
+                    </a:lnT>
+                    <a:lnB w="7620" cap="flat" cmpd="sng" algn="ctr">
+                      <a:solidFill>
+                        <a:srgbClr val="DCDCDC"/>
+                      </a:solidFill>
+                      <a:prstDash val="solid"/>
+                      <a:round/>
+                      <a:headEnd type="none" w="med" len="med"/>
+                      <a:tailEnd type="none" w="med" len="med"/>
+                    </a:lnB>
+                    <a:solidFill>
+                      <a:srgbClr val="FFFFFF"/>
+                    </a:solidFill>
+                  </a:tcPr>
+                </a:tc>
+                <a:tc>
+                  <a:txBody>
+                    <a:bodyPr/>
+                    <a:lstStyle/>
+                    <a:p>
+                      <a:pPr fontAlgn="t">
+                        <a:buNone/>
+                      </a:pPr>
+                      <a:r>
+                        <a:rPr lang="ko-KR" altLang="en-US" sz="1600" b="0">
+                          <a:effectLst/>
+                          <a:latin typeface="D2Coding" panose="020B0609020101020101" pitchFamily="49" charset="-127"/>
+                          <a:ea typeface="D2Coding" panose="020B0609020101020101" pitchFamily="49" charset="-127"/>
+                        </a:rPr>
+                        <a:t>코딩하기 전에 무엇을</a:t>
+                      </a:r>
+                      <a:r>
+                        <a:rPr lang="en-US" altLang="ko-KR" sz="1600" b="0">
+                          <a:effectLst/>
+                          <a:latin typeface="D2Coding" panose="020B0609020101020101" pitchFamily="49" charset="-127"/>
+                          <a:ea typeface="D2Coding" panose="020B0609020101020101" pitchFamily="49" charset="-127"/>
+                        </a:rPr>
+                        <a:t>, </a:t>
+                      </a:r>
+                      <a:r>
+                        <a:rPr lang="ko-KR" altLang="en-US" sz="1600" b="0">
+                          <a:effectLst/>
+                          <a:latin typeface="D2Coding" panose="020B0609020101020101" pitchFamily="49" charset="-127"/>
+                          <a:ea typeface="D2Coding" panose="020B0609020101020101" pitchFamily="49" charset="-127"/>
+                        </a:rPr>
+                        <a:t>왜 만들어야 하는지 텍스트로 확실히 못 박고 들어가기</a:t>
+                      </a:r>
+                      <a:r>
+                        <a:rPr lang="en-US" altLang="ko-KR" sz="1600" b="0">
+                          <a:effectLst/>
+                          <a:latin typeface="D2Coding" panose="020B0609020101020101" pitchFamily="49" charset="-127"/>
+                          <a:ea typeface="D2Coding" panose="020B0609020101020101" pitchFamily="49" charset="-127"/>
+                        </a:rPr>
+                        <a:t>.</a:t>
+                      </a:r>
+                    </a:p>
+                  </a:txBody>
+                  <a:tcPr marL="59674" marR="59674" marT="39783" marB="39783">
+                    <a:lnL w="7620" cap="flat" cmpd="sng" algn="ctr">
+                      <a:solidFill>
+                        <a:srgbClr val="50B166"/>
+                      </a:solidFill>
+                      <a:prstDash val="solid"/>
+                      <a:round/>
+                      <a:headEnd type="none" w="med" len="med"/>
+                      <a:tailEnd type="none" w="med" len="med"/>
+                    </a:lnL>
+                    <a:lnR>
+                      <a:noFill/>
+                    </a:lnR>
+                    <a:lnT w="7620" cap="flat" cmpd="sng" algn="ctr">
+                      <a:solidFill>
+                        <a:srgbClr val="50B166"/>
+                      </a:solidFill>
+                      <a:prstDash val="solid"/>
+                      <a:round/>
+                      <a:headEnd type="none" w="med" len="med"/>
+                      <a:tailEnd type="none" w="med" len="med"/>
+                    </a:lnT>
+                    <a:lnB w="7620" cap="flat" cmpd="sng" algn="ctr">
+                      <a:solidFill>
+                        <a:srgbClr val="60C966"/>
+                      </a:solidFill>
+                      <a:prstDash val="solid"/>
+                      <a:round/>
+                      <a:headEnd type="none" w="med" len="med"/>
+                      <a:tailEnd type="none" w="med" len="med"/>
+                    </a:lnB>
+                    <a:solidFill>
+                      <a:srgbClr val="FFFFFF"/>
+                    </a:solidFill>
+                  </a:tcPr>
+                </a:tc>
+                <a:extLst>
+                  <a:ext uri="{0D108BD9-81ED-4DB2-BD59-A6C34878D82A}">
+                    <a16:rowId xmlns:a16="http://schemas.microsoft.com/office/drawing/2014/main" val="1696417974"/>
+                  </a:ext>
+                </a:extLst>
+              </a:tr>
+              <a:tr h="974677">
+                <a:tc>
+                  <a:txBody>
+                    <a:bodyPr/>
+                    <a:lstStyle/>
+                    <a:p>
+                      <a:pPr fontAlgn="t">
+                        <a:buNone/>
+                      </a:pPr>
+                      <a:r>
+                        <a:rPr lang="ko-KR" altLang="en-US" sz="1600" b="0">
+                          <a:effectLst/>
+                          <a:latin typeface="D2Coding" panose="020B0609020101020101" pitchFamily="49" charset="-127"/>
+                          <a:ea typeface="D2Coding" panose="020B0609020101020101" pitchFamily="49" charset="-127"/>
+                        </a:rPr>
+                        <a:t>루프 </a:t>
+                      </a:r>
+                      <a:r>
+                        <a:rPr lang="en-US" altLang="ko-KR" sz="1600" b="0">
+                          <a:effectLst/>
+                          <a:latin typeface="D2Coding" panose="020B0609020101020101" pitchFamily="49" charset="-127"/>
+                          <a:ea typeface="D2Coding" panose="020B0609020101020101" pitchFamily="49" charset="-127"/>
+                        </a:rPr>
+                        <a:t>(</a:t>
+                      </a:r>
+                      <a:r>
+                        <a:rPr lang="en-US" sz="1600" b="0">
+                          <a:effectLst/>
+                          <a:latin typeface="D2Coding" panose="020B0609020101020101" pitchFamily="49" charset="-127"/>
+                          <a:ea typeface="D2Coding" panose="020B0609020101020101" pitchFamily="49" charset="-127"/>
+                        </a:rPr>
+                        <a:t>loop)</a:t>
+                      </a:r>
+                    </a:p>
+                  </a:txBody>
+                  <a:tcPr marL="59674" marR="59674" marT="39783" marB="39783">
+                    <a:lnL w="7620" cap="flat" cmpd="sng" algn="ctr">
+                      <a:solidFill>
+                        <a:srgbClr val="DDD8CF"/>
+                      </a:solidFill>
+                      <a:prstDash val="solid"/>
+                      <a:round/>
+                      <a:headEnd type="none" w="med" len="med"/>
+                      <a:tailEnd type="none" w="med" len="med"/>
+                    </a:lnL>
+                    <a:lnR w="7620" cap="flat" cmpd="sng" algn="ctr">
+                      <a:solidFill>
+                        <a:srgbClr val="DDD8CF"/>
+                      </a:solidFill>
+                      <a:prstDash val="solid"/>
+                      <a:round/>
+                      <a:headEnd type="none" w="med" len="med"/>
+                      <a:tailEnd type="none" w="med" len="med"/>
+                    </a:lnR>
+                    <a:lnT w="7620" cap="flat" cmpd="sng" algn="ctr">
+                      <a:solidFill>
+                        <a:srgbClr val="DCDCDC"/>
+                      </a:solidFill>
+                      <a:prstDash val="solid"/>
+                      <a:round/>
+                      <a:headEnd type="none" w="med" len="med"/>
+                      <a:tailEnd type="none" w="med" len="med"/>
+                    </a:lnT>
+                    <a:lnB w="7620" cap="flat" cmpd="sng" algn="ctr">
+                      <a:solidFill>
+                        <a:srgbClr val="DCDCDC"/>
+                      </a:solidFill>
+                      <a:prstDash val="solid"/>
+                      <a:round/>
+                      <a:headEnd type="none" w="med" len="med"/>
+                      <a:tailEnd type="none" w="med" len="med"/>
+                    </a:lnB>
+                    <a:solidFill>
+                      <a:srgbClr val="FFFFFF"/>
+                    </a:solidFill>
+                  </a:tcPr>
+                </a:tc>
+                <a:tc>
+                  <a:txBody>
+                    <a:bodyPr/>
+                    <a:lstStyle/>
+                    <a:p>
+                      <a:pPr fontAlgn="t">
+                        <a:buNone/>
+                      </a:pPr>
+                      <a:r>
+                        <a:rPr lang="ko-KR" altLang="en-US" sz="1600" b="0">
+                          <a:effectLst/>
+                          <a:latin typeface="D2Coding" panose="020B0609020101020101" pitchFamily="49" charset="-127"/>
+                          <a:ea typeface="D2Coding" panose="020B0609020101020101" pitchFamily="49" charset="-127"/>
+                        </a:rPr>
+                        <a:t>스파이럴 모델 </a:t>
+                      </a:r>
+                      <a:r>
+                        <a:rPr lang="en-US" altLang="ko-KR" sz="1600" b="0">
+                          <a:effectLst/>
+                          <a:latin typeface="D2Coding" panose="020B0609020101020101" pitchFamily="49" charset="-127"/>
+                          <a:ea typeface="D2Coding" panose="020B0609020101020101" pitchFamily="49" charset="-127"/>
+                        </a:rPr>
+                        <a:t>(</a:t>
+                      </a:r>
+                      <a:r>
+                        <a:rPr lang="en-US" sz="1600" b="0">
+                          <a:effectLst/>
+                          <a:latin typeface="D2Coding" panose="020B0609020101020101" pitchFamily="49" charset="-127"/>
+                          <a:ea typeface="D2Coding" panose="020B0609020101020101" pitchFamily="49" charset="-127"/>
+                        </a:rPr>
+                        <a:t>spiral model)</a:t>
+                      </a:r>
+                    </a:p>
+                  </a:txBody>
+                  <a:tcPr marL="59674" marR="59674" marT="39783" marB="39783">
+                    <a:lnL w="7620" cap="flat" cmpd="sng" algn="ctr">
+                      <a:solidFill>
+                        <a:srgbClr val="DDD8CF"/>
+                      </a:solidFill>
+                      <a:prstDash val="solid"/>
+                      <a:round/>
+                      <a:headEnd type="none" w="med" len="med"/>
+                      <a:tailEnd type="none" w="med" len="med"/>
+                    </a:lnL>
+                    <a:lnR w="7620" cap="flat" cmpd="sng" algn="ctr">
+                      <a:solidFill>
+                        <a:srgbClr val="60C966"/>
+                      </a:solidFill>
+                      <a:prstDash val="solid"/>
+                      <a:round/>
+                      <a:headEnd type="none" w="med" len="med"/>
+                      <a:tailEnd type="none" w="med" len="med"/>
+                    </a:lnR>
+                    <a:lnT w="7620" cap="flat" cmpd="sng" algn="ctr">
+                      <a:solidFill>
+                        <a:srgbClr val="DCDCDC"/>
+                      </a:solidFill>
+                      <a:prstDash val="solid"/>
+                      <a:round/>
+                      <a:headEnd type="none" w="med" len="med"/>
+                      <a:tailEnd type="none" w="med" len="med"/>
+                    </a:lnT>
+                    <a:lnB w="7620" cap="flat" cmpd="sng" algn="ctr">
+                      <a:solidFill>
+                        <a:srgbClr val="DCDCDC"/>
+                      </a:solidFill>
+                      <a:prstDash val="solid"/>
+                      <a:round/>
+                      <a:headEnd type="none" w="med" len="med"/>
+                      <a:tailEnd type="none" w="med" len="med"/>
+                    </a:lnB>
+                    <a:solidFill>
+                      <a:srgbClr val="FFFFFF"/>
+                    </a:solidFill>
+                  </a:tcPr>
+                </a:tc>
+                <a:tc>
+                  <a:txBody>
+                    <a:bodyPr/>
+                    <a:lstStyle/>
+                    <a:p>
+                      <a:pPr fontAlgn="t">
+                        <a:buNone/>
+                      </a:pPr>
+                      <a:r>
+                        <a:rPr lang="ko-KR" altLang="en-US" sz="1600" b="0" dirty="0">
+                          <a:effectLst/>
+                          <a:latin typeface="D2Coding" panose="020B0609020101020101" pitchFamily="49" charset="-127"/>
+                          <a:ea typeface="D2Coding" panose="020B0609020101020101" pitchFamily="49" charset="-127"/>
+                        </a:rPr>
+                        <a:t>목표 설정 → 측정 → 실행 → 교정의 무한 루프</a:t>
+                      </a:r>
+                      <a:r>
+                        <a:rPr lang="en-US" altLang="ko-KR" sz="1600" b="0" dirty="0">
+                          <a:effectLst/>
+                          <a:latin typeface="D2Coding" panose="020B0609020101020101" pitchFamily="49" charset="-127"/>
+                          <a:ea typeface="D2Coding" panose="020B0609020101020101" pitchFamily="49" charset="-127"/>
+                        </a:rPr>
+                        <a:t>. </a:t>
+                      </a:r>
+                      <a:r>
+                        <a:rPr lang="ko-KR" altLang="en-US" sz="1600" b="0" dirty="0">
+                          <a:effectLst/>
+                          <a:latin typeface="D2Coding" panose="020B0609020101020101" pitchFamily="49" charset="-127"/>
+                          <a:ea typeface="D2Coding" panose="020B0609020101020101" pitchFamily="49" charset="-127"/>
+                        </a:rPr>
+                        <a:t>측정이 불가능하면 루프도 멈춘다</a:t>
+                      </a:r>
+                      <a:r>
+                        <a:rPr lang="en-US" altLang="ko-KR" sz="1600" b="0" dirty="0">
+                          <a:effectLst/>
+                          <a:latin typeface="D2Coding" panose="020B0609020101020101" pitchFamily="49" charset="-127"/>
+                          <a:ea typeface="D2Coding" panose="020B0609020101020101" pitchFamily="49" charset="-127"/>
+                        </a:rPr>
+                        <a:t>.</a:t>
+                      </a:r>
+                    </a:p>
+                  </a:txBody>
+                  <a:tcPr marL="59674" marR="59674" marT="39783" marB="39783">
+                    <a:lnL w="7620" cap="flat" cmpd="sng" algn="ctr">
+                      <a:solidFill>
+                        <a:srgbClr val="60C966"/>
+                      </a:solidFill>
+                      <a:prstDash val="solid"/>
+                      <a:round/>
+                      <a:headEnd type="none" w="med" len="med"/>
+                      <a:tailEnd type="none" w="med" len="med"/>
+                    </a:lnL>
+                    <a:lnR>
+                      <a:noFill/>
+                    </a:lnR>
+                    <a:lnT w="7620" cap="flat" cmpd="sng" algn="ctr">
+                      <a:solidFill>
+                        <a:srgbClr val="60C966"/>
+                      </a:solidFill>
+                      <a:prstDash val="solid"/>
+                      <a:round/>
+                      <a:headEnd type="none" w="med" len="med"/>
+                      <a:tailEnd type="none" w="med" len="med"/>
+                    </a:lnT>
+                    <a:lnB w="7620" cap="flat" cmpd="sng" algn="ctr">
+                      <a:solidFill>
+                        <a:srgbClr val="20CB66"/>
+                      </a:solidFill>
+                      <a:prstDash val="solid"/>
+                      <a:round/>
+                      <a:headEnd type="none" w="med" len="med"/>
+                      <a:tailEnd type="none" w="med" len="med"/>
+                    </a:lnB>
+                    <a:solidFill>
+                      <a:srgbClr val="FFFFFF"/>
+                    </a:solidFill>
+                  </a:tcPr>
+                </a:tc>
+                <a:extLst>
+                  <a:ext uri="{0D108BD9-81ED-4DB2-BD59-A6C34878D82A}">
+                    <a16:rowId xmlns:a16="http://schemas.microsoft.com/office/drawing/2014/main" val="3127674535"/>
+                  </a:ext>
+                </a:extLst>
+              </a:tr>
+              <a:tr h="795655">
+                <a:tc>
+                  <a:txBody>
+                    <a:bodyPr/>
+                    <a:lstStyle/>
+                    <a:p>
+                      <a:pPr fontAlgn="t">
+                        <a:buNone/>
+                      </a:pPr>
+                      <a:r>
+                        <a:rPr lang="ko-KR" altLang="en-US" sz="1600" b="0">
+                          <a:effectLst/>
+                          <a:latin typeface="D2Coding" panose="020B0609020101020101" pitchFamily="49" charset="-127"/>
+                          <a:ea typeface="D2Coding" panose="020B0609020101020101" pitchFamily="49" charset="-127"/>
+                        </a:rPr>
+                        <a:t>하네스 </a:t>
+                      </a:r>
+                      <a:r>
+                        <a:rPr lang="en-US" altLang="ko-KR" sz="1600" b="0">
+                          <a:effectLst/>
+                          <a:latin typeface="D2Coding" panose="020B0609020101020101" pitchFamily="49" charset="-127"/>
+                          <a:ea typeface="D2Coding" panose="020B0609020101020101" pitchFamily="49" charset="-127"/>
+                        </a:rPr>
+                        <a:t>(</a:t>
+                      </a:r>
+                      <a:r>
+                        <a:rPr lang="en-US" sz="1600" b="0">
+                          <a:effectLst/>
+                          <a:latin typeface="D2Coding" panose="020B0609020101020101" pitchFamily="49" charset="-127"/>
+                          <a:ea typeface="D2Coding" panose="020B0609020101020101" pitchFamily="49" charset="-127"/>
+                        </a:rPr>
+                        <a:t>harness)</a:t>
+                      </a:r>
+                    </a:p>
+                  </a:txBody>
+                  <a:tcPr marL="59674" marR="59674" marT="39783" marB="39783">
+                    <a:lnL w="7620" cap="flat" cmpd="sng" algn="ctr">
+                      <a:solidFill>
+                        <a:srgbClr val="DDD8CF"/>
+                      </a:solidFill>
+                      <a:prstDash val="solid"/>
+                      <a:round/>
+                      <a:headEnd type="none" w="med" len="med"/>
+                      <a:tailEnd type="none" w="med" len="med"/>
+                    </a:lnL>
+                    <a:lnR w="7620" cap="flat" cmpd="sng" algn="ctr">
+                      <a:solidFill>
+                        <a:srgbClr val="DDD8CF"/>
+                      </a:solidFill>
+                      <a:prstDash val="solid"/>
+                      <a:round/>
+                      <a:headEnd type="none" w="med" len="med"/>
+                      <a:tailEnd type="none" w="med" len="med"/>
+                    </a:lnR>
+                    <a:lnT w="7620" cap="flat" cmpd="sng" algn="ctr">
+                      <a:solidFill>
+                        <a:srgbClr val="DCDCDC"/>
+                      </a:solidFill>
+                      <a:prstDash val="solid"/>
+                      <a:round/>
+                      <a:headEnd type="none" w="med" len="med"/>
+                      <a:tailEnd type="none" w="med" len="med"/>
+                    </a:lnT>
+                    <a:lnB w="7620" cap="flat" cmpd="sng" algn="ctr">
+                      <a:solidFill>
+                        <a:srgbClr val="DDD8CF"/>
+                      </a:solidFill>
+                      <a:prstDash val="solid"/>
+                      <a:round/>
+                      <a:headEnd type="none" w="med" len="med"/>
+                      <a:tailEnd type="none" w="med" len="med"/>
+                    </a:lnB>
+                    <a:solidFill>
+                      <a:srgbClr val="FFFFFF"/>
+                    </a:solidFill>
+                  </a:tcPr>
+                </a:tc>
+                <a:tc>
+                  <a:txBody>
+                    <a:bodyPr/>
+                    <a:lstStyle/>
+                    <a:p>
+                      <a:pPr fontAlgn="t">
+                        <a:buNone/>
+                      </a:pPr>
+                      <a:r>
+                        <a:rPr lang="ko-KR" altLang="en-US" sz="1600" b="0">
+                          <a:effectLst/>
+                          <a:latin typeface="D2Coding" panose="020B0609020101020101" pitchFamily="49" charset="-127"/>
+                          <a:ea typeface="D2Coding" panose="020B0609020101020101" pitchFamily="49" charset="-127"/>
+                        </a:rPr>
+                        <a:t>테스트 하네스 </a:t>
+                      </a:r>
+                      <a:r>
+                        <a:rPr lang="en-US" altLang="ko-KR" sz="1600" b="0">
+                          <a:effectLst/>
+                          <a:latin typeface="D2Coding" panose="020B0609020101020101" pitchFamily="49" charset="-127"/>
+                          <a:ea typeface="D2Coding" panose="020B0609020101020101" pitchFamily="49" charset="-127"/>
+                        </a:rPr>
+                        <a:t>(test harness)</a:t>
+                      </a:r>
+                      <a:r>
+                        <a:rPr lang="ko-KR" altLang="en-US" sz="1600" b="0">
+                          <a:effectLst/>
+                          <a:latin typeface="D2Coding" panose="020B0609020101020101" pitchFamily="49" charset="-127"/>
+                          <a:ea typeface="D2Coding" panose="020B0609020101020101" pitchFamily="49" charset="-127"/>
+                        </a:rPr>
+                        <a:t> </a:t>
+                      </a:r>
+                      <a:r>
+                        <a:rPr lang="en-US" altLang="ko-KR" sz="1600" b="0">
+                          <a:effectLst/>
+                          <a:latin typeface="D2Coding" panose="020B0609020101020101" pitchFamily="49" charset="-127"/>
+                          <a:ea typeface="D2Coding" panose="020B0609020101020101" pitchFamily="49" charset="-127"/>
+                        </a:rPr>
+                        <a:t>+ </a:t>
+                      </a:r>
+                      <a:r>
+                        <a:rPr lang="ko-KR" altLang="en-US" sz="1600" b="0">
+                          <a:effectLst/>
+                          <a:latin typeface="D2Coding" panose="020B0609020101020101" pitchFamily="49" charset="-127"/>
+                          <a:ea typeface="D2Coding" panose="020B0609020101020101" pitchFamily="49" charset="-127"/>
+                        </a:rPr>
+                        <a:t>그 위의 전부</a:t>
+                      </a:r>
+                    </a:p>
+                  </a:txBody>
+                  <a:tcPr marL="59674" marR="59674" marT="39783" marB="39783">
+                    <a:lnL w="7620" cap="flat" cmpd="sng" algn="ctr">
+                      <a:solidFill>
+                        <a:srgbClr val="DDD8CF"/>
+                      </a:solidFill>
+                      <a:prstDash val="solid"/>
+                      <a:round/>
+                      <a:headEnd type="none" w="med" len="med"/>
+                      <a:tailEnd type="none" w="med" len="med"/>
+                    </a:lnL>
+                    <a:lnR w="7620" cap="flat" cmpd="sng" algn="ctr">
+                      <a:solidFill>
+                        <a:srgbClr val="20CB66"/>
+                      </a:solidFill>
+                      <a:prstDash val="solid"/>
+                      <a:round/>
+                      <a:headEnd type="none" w="med" len="med"/>
+                      <a:tailEnd type="none" w="med" len="med"/>
+                    </a:lnR>
+                    <a:lnT w="7620" cap="flat" cmpd="sng" algn="ctr">
+                      <a:solidFill>
+                        <a:srgbClr val="DCDCDC"/>
+                      </a:solidFill>
+                      <a:prstDash val="solid"/>
+                      <a:round/>
+                      <a:headEnd type="none" w="med" len="med"/>
+                      <a:tailEnd type="none" w="med" len="med"/>
+                    </a:lnT>
+                    <a:lnB w="7620" cap="flat" cmpd="sng" algn="ctr">
+                      <a:solidFill>
+                        <a:srgbClr val="DDD8CF"/>
+                      </a:solidFill>
+                      <a:prstDash val="solid"/>
+                      <a:round/>
+                      <a:headEnd type="none" w="med" len="med"/>
+                      <a:tailEnd type="none" w="med" len="med"/>
+                    </a:lnB>
+                    <a:solidFill>
+                      <a:srgbClr val="FFFFFF"/>
+                    </a:solidFill>
+                  </a:tcPr>
+                </a:tc>
+                <a:tc>
+                  <a:txBody>
+                    <a:bodyPr/>
+                    <a:lstStyle/>
+                    <a:p>
+                      <a:pPr fontAlgn="t">
+                        <a:buNone/>
+                      </a:pPr>
+                      <a:r>
+                        <a:rPr lang="ko-KR" altLang="en-US" sz="1600" b="0" dirty="0">
+                          <a:effectLst/>
+                          <a:latin typeface="D2Coding" panose="020B0609020101020101" pitchFamily="49" charset="-127"/>
+                          <a:ea typeface="D2Coding" panose="020B0609020101020101" pitchFamily="49" charset="-127"/>
+                        </a:rPr>
+                        <a:t>이 모든 규칙을 기계적으로 강제하는 안전하고 견고한 그릇</a:t>
+                      </a:r>
+                    </a:p>
+                  </a:txBody>
+                  <a:tcPr marL="59674" marR="59674" marT="39783" marB="39783">
+                    <a:lnL w="7620" cap="flat" cmpd="sng" algn="ctr">
+                      <a:solidFill>
+                        <a:srgbClr val="20CB66"/>
+                      </a:solidFill>
+                      <a:prstDash val="solid"/>
+                      <a:round/>
+                      <a:headEnd type="none" w="med" len="med"/>
+                      <a:tailEnd type="none" w="med" len="med"/>
+                    </a:lnL>
+                    <a:lnR>
+                      <a:noFill/>
+                    </a:lnR>
+                    <a:lnT w="7620" cap="flat" cmpd="sng" algn="ctr">
+                      <a:solidFill>
+                        <a:srgbClr val="20CB66"/>
+                      </a:solidFill>
+                      <a:prstDash val="solid"/>
+                      <a:round/>
+                      <a:headEnd type="none" w="med" len="med"/>
+                      <a:tailEnd type="none" w="med" len="med"/>
+                    </a:lnT>
+                    <a:lnB w="7620" cap="flat" cmpd="sng" algn="ctr">
+                      <a:solidFill>
+                        <a:srgbClr val="20CB66"/>
+                      </a:solidFill>
+                      <a:prstDash val="solid"/>
+                      <a:round/>
+                      <a:headEnd type="none" w="med" len="med"/>
+                      <a:tailEnd type="none" w="med" len="med"/>
+                    </a:lnB>
+                    <a:solidFill>
+                      <a:srgbClr val="FFFFFF"/>
+                    </a:solidFill>
+                  </a:tcPr>
+                </a:tc>
+                <a:extLst>
+                  <a:ext uri="{0D108BD9-81ED-4DB2-BD59-A6C34878D82A}">
+                    <a16:rowId xmlns:a16="http://schemas.microsoft.com/office/drawing/2014/main" val="4260920565"/>
+                  </a:ext>
+                </a:extLst>
+              </a:tr>
+            </a:tbl>
+          </a:graphicData>
+        </a:graphic>
+      </p:graphicFrame>
+      <p:sp>
+        <p:nvSpPr>
+          <p:cNvPr id="6" name="TextBox 5">
+            <a:extLst>
+              <a:ext uri="{FF2B5EF4-FFF2-40B4-BE49-F238E27FC236}">
+                <a16:creationId xmlns:a16="http://schemas.microsoft.com/office/drawing/2014/main" id="{3CFFC055-AD74-D401-E12F-0C7E68F52296}"/>
+              </a:ext>
+            </a:extLst>
+          </p:cNvPr>
+          <p:cNvSpPr txBox="1"/>
+          <p:nvPr/>
+        </p:nvSpPr>
+        <p:spPr>
+          <a:xfrm>
+            <a:off x="771525" y="6036261"/>
+            <a:ext cx="2457450" cy="369332"/>
+          </a:xfrm>
+          <a:prstGeom prst="rect">
+            <a:avLst/>
+          </a:prstGeom>
+          <a:noFill/>
+        </p:spPr>
+        <p:txBody>
+          <a:bodyPr wrap="square" rtlCol="0">
+            <a:spAutoFit/>
+          </a:bodyPr>
+          <a:lstStyle/>
+          <a:p>
+            <a:r>
+              <a:rPr lang="ko-KR" altLang="en-US" dirty="0" err="1">
+                <a:hlinkClick r:id="rId2"/>
+              </a:rPr>
+              <a:t>하네스</a:t>
+            </a:r>
+            <a:r>
+              <a:rPr lang="ko-KR" altLang="en-US" dirty="0">
+                <a:hlinkClick r:id="rId2"/>
+              </a:rPr>
+              <a:t> 엔지니어링</a:t>
+            </a:r>
+            <a:endParaRPr lang="ko-KR" altLang="en-US" dirty="0"/>
+          </a:p>
+        </p:txBody>
+      </p:sp>
+    </p:spTree>
+    <p:extLst>
+      <p:ext uri="{BB962C8B-B14F-4D97-AF65-F5344CB8AC3E}">
+        <p14:creationId xmlns:p14="http://schemas.microsoft.com/office/powerpoint/2010/main" val="2978939052"/>
       </p:ext>
     </p:extLst>
   </p:cSld>
